--- a/slides/flsg/8-orchestration-flsg.pptx
+++ b/slides/flsg/8-orchestration-flsg.pptx
@@ -5,7 +5,7 @@
     <p:sldMasterId id="2147483648" r:id="rId1"/>
   </p:sldMasterIdLst>
   <p:notesMasterIdLst>
-    <p:notesMasterId r:id="rId7"/>
+    <p:notesMasterId r:id="rId16"/>
   </p:notesMasterIdLst>
   <p:sldIdLst>
     <p:sldId id="256" r:id="rId2"/>
@@ -13,6 +13,15 @@
     <p:sldId id="258" r:id="rId4"/>
     <p:sldId id="259" r:id="rId5"/>
     <p:sldId id="260" r:id="rId6"/>
+    <p:sldId id="293" r:id="rId7"/>
+    <p:sldId id="294" r:id="rId8"/>
+    <p:sldId id="286" r:id="rId9"/>
+    <p:sldId id="277" r:id="rId10"/>
+    <p:sldId id="287" r:id="rId11"/>
+    <p:sldId id="288" r:id="rId12"/>
+    <p:sldId id="289" r:id="rId13"/>
+    <p:sldId id="290" r:id="rId14"/>
+    <p:sldId id="291" r:id="rId15"/>
   </p:sldIdLst>
   <p:sldSz cx="12192000" cy="6858000"/>
   <p:notesSz cx="6858000" cy="9144000"/>
@@ -111,6 +120,11 @@
       </a:defRPr>
     </a:lvl9pPr>
   </p:defaultTextStyle>
+  <p:extLst>
+    <p:ext uri="{EFAFB233-063F-42B5-8137-9DF3F51BA10A}">
+      <p15:sldGuideLst xmlns:p15="http://schemas.microsoft.com/office/powerpoint/2012/main"/>
+    </p:ext>
+  </p:extLst>
 </p:presentation>
 </file>
 
@@ -715,6 +729,194 @@
 </p:notes>
 </file>
 
+<file path=ppt/notesSlides/notesSlide3.xml><?xml version="1.0" encoding="utf-8"?>
+<p:notes xmlns:a="http://schemas.openxmlformats.org/drawingml/2006/main" xmlns:r="http://schemas.openxmlformats.org/officeDocument/2006/relationships" xmlns:p="http://schemas.openxmlformats.org/presentationml/2006/main" showMasterSp="0" showMasterPhAnim="0">
+  <p:cSld>
+    <p:spTree>
+      <p:nvGrpSpPr>
+        <p:cNvPr id="1" name="Shape 212"/>
+        <p:cNvGrpSpPr/>
+        <p:nvPr/>
+      </p:nvGrpSpPr>
+      <p:grpSpPr>
+        <a:xfrm>
+          <a:off x="0" y="0"/>
+          <a:ext cx="0" cy="0"/>
+          <a:chOff x="0" y="0"/>
+          <a:chExt cx="0" cy="0"/>
+        </a:xfrm>
+      </p:grpSpPr>
+      <p:sp>
+        <p:nvSpPr>
+          <p:cNvPr id="213" name="Google Shape;213;g3306756b4ba_0_2906:notes"/>
+          <p:cNvSpPr>
+            <a:spLocks noGrp="1" noRot="1" noChangeAspect="1"/>
+          </p:cNvSpPr>
+          <p:nvPr>
+            <p:ph type="sldImg" idx="2"/>
+          </p:nvPr>
+        </p:nvSpPr>
+        <p:spPr>
+          <a:xfrm>
+            <a:off x="381000" y="685800"/>
+            <a:ext cx="6096000" cy="3429000"/>
+          </a:xfrm>
+          <a:custGeom>
+            <a:avLst/>
+            <a:gdLst/>
+            <a:ahLst/>
+            <a:cxnLst/>
+            <a:rect l="l" t="t" r="r" b="b"/>
+            <a:pathLst>
+              <a:path w="120000" h="120000" extrusionOk="0">
+                <a:moveTo>
+                  <a:pt x="0" y="0"/>
+                </a:moveTo>
+                <a:lnTo>
+                  <a:pt x="120000" y="0"/>
+                </a:lnTo>
+                <a:lnTo>
+                  <a:pt x="120000" y="120000"/>
+                </a:lnTo>
+                <a:lnTo>
+                  <a:pt x="0" y="120000"/>
+                </a:lnTo>
+                <a:close/>
+              </a:path>
+            </a:pathLst>
+          </a:custGeom>
+        </p:spPr>
+      </p:sp>
+      <p:sp>
+        <p:nvSpPr>
+          <p:cNvPr id="214" name="Google Shape;214;g3306756b4ba_0_2906:notes"/>
+          <p:cNvSpPr txBox="1">
+            <a:spLocks noGrp="1"/>
+          </p:cNvSpPr>
+          <p:nvPr>
+            <p:ph type="body" idx="1"/>
+          </p:nvPr>
+        </p:nvSpPr>
+        <p:spPr>
+          <a:xfrm>
+            <a:off x="685800" y="4343400"/>
+            <a:ext cx="5486400" cy="4114800"/>
+          </a:xfrm>
+          <a:prstGeom prst="rect">
+            <a:avLst/>
+          </a:prstGeom>
+        </p:spPr>
+        <p:txBody>
+          <a:bodyPr spcFirstLastPara="1" wrap="square" lIns="91425" tIns="91425" rIns="91425" bIns="91425" anchor="t" anchorCtr="0">
+            <a:noAutofit/>
+          </a:bodyPr>
+          <a:lstStyle/>
+          <a:p>
+            <a:pPr marL="0" lvl="0" indent="0" algn="l" rtl="0">
+              <a:spcBef>
+                <a:spcPts val="0"/>
+              </a:spcBef>
+              <a:spcAft>
+                <a:spcPts val="0"/>
+              </a:spcAft>
+              <a:buNone/>
+            </a:pPr>
+            <a:endParaRPr dirty="0"/>
+          </a:p>
+        </p:txBody>
+      </p:sp>
+    </p:spTree>
+  </p:cSld>
+  <p:clrMapOvr>
+    <a:masterClrMapping/>
+  </p:clrMapOvr>
+</p:notes>
+</file>
+
+<file path=ppt/notesSlides/notesSlide4.xml><?xml version="1.0" encoding="utf-8"?>
+<p:notes xmlns:a="http://schemas.openxmlformats.org/drawingml/2006/main" xmlns:r="http://schemas.openxmlformats.org/officeDocument/2006/relationships" xmlns:p="http://schemas.openxmlformats.org/presentationml/2006/main">
+  <p:cSld>
+    <p:spTree>
+      <p:nvGrpSpPr>
+        <p:cNvPr id="1" name=""/>
+        <p:cNvGrpSpPr/>
+        <p:nvPr/>
+      </p:nvGrpSpPr>
+      <p:grpSpPr>
+        <a:xfrm>
+          <a:off x="0" y="0"/>
+          <a:ext cx="0" cy="0"/>
+          <a:chOff x="0" y="0"/>
+          <a:chExt cx="0" cy="0"/>
+        </a:xfrm>
+      </p:grpSpPr>
+      <p:sp>
+        <p:nvSpPr>
+          <p:cNvPr id="2" name="Slide Image Placeholder 1"/>
+          <p:cNvSpPr>
+            <a:spLocks noGrp="1" noRot="1" noChangeAspect="1"/>
+          </p:cNvSpPr>
+          <p:nvPr>
+            <p:ph type="sldImg"/>
+          </p:nvPr>
+        </p:nvSpPr>
+        <p:spPr/>
+      </p:sp>
+      <p:sp>
+        <p:nvSpPr>
+          <p:cNvPr id="3" name="Notes Placeholder 2"/>
+          <p:cNvSpPr>
+            <a:spLocks noGrp="1"/>
+          </p:cNvSpPr>
+          <p:nvPr>
+            <p:ph type="body" idx="1"/>
+          </p:nvPr>
+        </p:nvSpPr>
+        <p:spPr/>
+        <p:txBody>
+          <a:bodyPr/>
+          <a:lstStyle/>
+          <a:p>
+            <a:endParaRPr lang="en-US" dirty="0"/>
+          </a:p>
+        </p:txBody>
+      </p:sp>
+      <p:sp>
+        <p:nvSpPr>
+          <p:cNvPr id="4" name="Slide Number Placeholder 3"/>
+          <p:cNvSpPr>
+            <a:spLocks noGrp="1"/>
+          </p:cNvSpPr>
+          <p:nvPr>
+            <p:ph type="sldNum" sz="quarter" idx="5"/>
+          </p:nvPr>
+        </p:nvSpPr>
+        <p:spPr/>
+        <p:txBody>
+          <a:bodyPr/>
+          <a:lstStyle/>
+          <a:p>
+            <a:fld id="{ED406CDB-AC11-B347-A8D6-730584B108C3}" type="slidenum">
+              <a:rPr lang="en-US" smtClean="0"/>
+              <a:t>11</a:t>
+            </a:fld>
+            <a:endParaRPr lang="en-US"/>
+          </a:p>
+        </p:txBody>
+      </p:sp>
+    </p:spTree>
+    <p:extLst>
+      <p:ext uri="{BB962C8B-B14F-4D97-AF65-F5344CB8AC3E}">
+        <p14:creationId xmlns:p14="http://schemas.microsoft.com/office/powerpoint/2010/main" val="2956719426"/>
+      </p:ext>
+    </p:extLst>
+  </p:cSld>
+  <p:clrMapOvr>
+    <a:masterClrMapping/>
+  </p:clrMapOvr>
+</p:notes>
+</file>
+
 <file path=ppt/slideLayouts/slideLayout1.xml><?xml version="1.0" encoding="utf-8"?>
 <p:sldLayout xmlns:a="http://schemas.openxmlformats.org/drawingml/2006/main" xmlns:r="http://schemas.openxmlformats.org/officeDocument/2006/relationships" xmlns:p="http://schemas.openxmlformats.org/presentationml/2006/main" type="title" preserve="1">
   <p:cSld name="Title Slide">
@@ -1338,6 +1540,382 @@
     <p:extLst>
       <p:ext uri="{BB962C8B-B14F-4D97-AF65-F5344CB8AC3E}">
         <p14:creationId xmlns:p14="http://schemas.microsoft.com/office/powerpoint/2010/main" val="1810412079"/>
+      </p:ext>
+    </p:extLst>
+  </p:cSld>
+  <p:clrMapOvr>
+    <a:masterClrMapping/>
+  </p:clrMapOvr>
+</p:sldLayout>
+</file>
+
+<file path=ppt/slideLayouts/slideLayout12.xml><?xml version="1.0" encoding="utf-8"?>
+<p:sldLayout xmlns:a="http://schemas.openxmlformats.org/drawingml/2006/main" xmlns:r="http://schemas.openxmlformats.org/officeDocument/2006/relationships" xmlns:p="http://schemas.openxmlformats.org/presentationml/2006/main" matchingName="Title and body" type="tx">
+  <p:cSld name="Title and body">
+    <p:spTree>
+      <p:nvGrpSpPr>
+        <p:cNvPr id="1" name="Shape 17"/>
+        <p:cNvGrpSpPr/>
+        <p:nvPr/>
+      </p:nvGrpSpPr>
+      <p:grpSpPr>
+        <a:xfrm>
+          <a:off x="0" y="0"/>
+          <a:ext cx="0" cy="0"/>
+          <a:chOff x="0" y="0"/>
+          <a:chExt cx="0" cy="0"/>
+        </a:xfrm>
+      </p:grpSpPr>
+      <p:sp>
+        <p:nvSpPr>
+          <p:cNvPr id="18" name="Google Shape;18;p4"/>
+          <p:cNvSpPr txBox="1">
+            <a:spLocks noGrp="1"/>
+          </p:cNvSpPr>
+          <p:nvPr>
+            <p:ph type="title"/>
+          </p:nvPr>
+        </p:nvSpPr>
+        <p:spPr>
+          <a:xfrm>
+            <a:off x="415600" y="390467"/>
+            <a:ext cx="11360800" cy="1068000"/>
+          </a:xfrm>
+          <a:prstGeom prst="rect">
+            <a:avLst/>
+          </a:prstGeom>
+        </p:spPr>
+        <p:txBody>
+          <a:bodyPr spcFirstLastPara="1" wrap="square" lIns="91425" tIns="91425" rIns="91425" bIns="91425" anchor="t" anchorCtr="0">
+            <a:normAutofit/>
+          </a:bodyPr>
+          <a:lstStyle>
+            <a:lvl1pPr lvl="0">
+              <a:spcBef>
+                <a:spcPts val="0"/>
+              </a:spcBef>
+              <a:spcAft>
+                <a:spcPts val="0"/>
+              </a:spcAft>
+              <a:buSzPts val="4200"/>
+              <a:buNone/>
+              <a:defRPr/>
+            </a:lvl1pPr>
+            <a:lvl2pPr lvl="1">
+              <a:spcBef>
+                <a:spcPts val="0"/>
+              </a:spcBef>
+              <a:spcAft>
+                <a:spcPts val="0"/>
+              </a:spcAft>
+              <a:buSzPts val="4200"/>
+              <a:buNone/>
+              <a:defRPr/>
+            </a:lvl2pPr>
+            <a:lvl3pPr lvl="2">
+              <a:spcBef>
+                <a:spcPts val="0"/>
+              </a:spcBef>
+              <a:spcAft>
+                <a:spcPts val="0"/>
+              </a:spcAft>
+              <a:buSzPts val="4200"/>
+              <a:buNone/>
+              <a:defRPr/>
+            </a:lvl3pPr>
+            <a:lvl4pPr lvl="3">
+              <a:spcBef>
+                <a:spcPts val="0"/>
+              </a:spcBef>
+              <a:spcAft>
+                <a:spcPts val="0"/>
+              </a:spcAft>
+              <a:buSzPts val="4200"/>
+              <a:buNone/>
+              <a:defRPr/>
+            </a:lvl4pPr>
+            <a:lvl5pPr lvl="4">
+              <a:spcBef>
+                <a:spcPts val="0"/>
+              </a:spcBef>
+              <a:spcAft>
+                <a:spcPts val="0"/>
+              </a:spcAft>
+              <a:buSzPts val="4200"/>
+              <a:buNone/>
+              <a:defRPr/>
+            </a:lvl5pPr>
+            <a:lvl6pPr lvl="5">
+              <a:spcBef>
+                <a:spcPts val="0"/>
+              </a:spcBef>
+              <a:spcAft>
+                <a:spcPts val="0"/>
+              </a:spcAft>
+              <a:buSzPts val="4200"/>
+              <a:buNone/>
+              <a:defRPr/>
+            </a:lvl6pPr>
+            <a:lvl7pPr lvl="6">
+              <a:spcBef>
+                <a:spcPts val="0"/>
+              </a:spcBef>
+              <a:spcAft>
+                <a:spcPts val="0"/>
+              </a:spcAft>
+              <a:buSzPts val="4200"/>
+              <a:buNone/>
+              <a:defRPr/>
+            </a:lvl7pPr>
+            <a:lvl8pPr lvl="7">
+              <a:spcBef>
+                <a:spcPts val="0"/>
+              </a:spcBef>
+              <a:spcAft>
+                <a:spcPts val="0"/>
+              </a:spcAft>
+              <a:buSzPts val="4200"/>
+              <a:buNone/>
+              <a:defRPr/>
+            </a:lvl8pPr>
+            <a:lvl9pPr lvl="8">
+              <a:spcBef>
+                <a:spcPts val="0"/>
+              </a:spcBef>
+              <a:spcAft>
+                <a:spcPts val="0"/>
+              </a:spcAft>
+              <a:buSzPts val="4200"/>
+              <a:buNone/>
+              <a:defRPr/>
+            </a:lvl9pPr>
+          </a:lstStyle>
+          <a:p>
+            <a:endParaRPr/>
+          </a:p>
+        </p:txBody>
+      </p:sp>
+      <p:sp>
+        <p:nvSpPr>
+          <p:cNvPr id="19" name="Google Shape;19;p4"/>
+          <p:cNvSpPr txBox="1">
+            <a:spLocks noGrp="1"/>
+          </p:cNvSpPr>
+          <p:nvPr>
+            <p:ph type="body" idx="1"/>
+          </p:nvPr>
+        </p:nvSpPr>
+        <p:spPr>
+          <a:xfrm>
+            <a:off x="415600" y="1638233"/>
+            <a:ext cx="11360800" cy="4453600"/>
+          </a:xfrm>
+          <a:prstGeom prst="rect">
+            <a:avLst/>
+          </a:prstGeom>
+        </p:spPr>
+        <p:txBody>
+          <a:bodyPr spcFirstLastPara="1" wrap="square" lIns="91425" tIns="91425" rIns="91425" bIns="91425" anchor="t" anchorCtr="0">
+            <a:normAutofit/>
+          </a:bodyPr>
+          <a:lstStyle>
+            <a:lvl1pPr marL="609585" lvl="0" indent="-457189">
+              <a:spcBef>
+                <a:spcPts val="0"/>
+              </a:spcBef>
+              <a:spcAft>
+                <a:spcPts val="0"/>
+              </a:spcAft>
+              <a:buSzPts val="1800"/>
+              <a:buChar char="●"/>
+              <a:defRPr/>
+            </a:lvl1pPr>
+            <a:lvl2pPr marL="1219170" lvl="1" indent="-423323">
+              <a:spcBef>
+                <a:spcPts val="0"/>
+              </a:spcBef>
+              <a:spcAft>
+                <a:spcPts val="0"/>
+              </a:spcAft>
+              <a:buSzPts val="1400"/>
+              <a:buChar char="○"/>
+              <a:defRPr/>
+            </a:lvl2pPr>
+            <a:lvl3pPr marL="1828754" lvl="2" indent="-423323">
+              <a:spcBef>
+                <a:spcPts val="0"/>
+              </a:spcBef>
+              <a:spcAft>
+                <a:spcPts val="0"/>
+              </a:spcAft>
+              <a:buSzPts val="1400"/>
+              <a:buChar char="■"/>
+              <a:defRPr/>
+            </a:lvl3pPr>
+            <a:lvl4pPr marL="2438339" lvl="3" indent="-423323">
+              <a:spcBef>
+                <a:spcPts val="0"/>
+              </a:spcBef>
+              <a:spcAft>
+                <a:spcPts val="0"/>
+              </a:spcAft>
+              <a:buSzPts val="1400"/>
+              <a:buChar char="●"/>
+              <a:defRPr/>
+            </a:lvl4pPr>
+            <a:lvl5pPr marL="3047924" lvl="4" indent="-423323">
+              <a:spcBef>
+                <a:spcPts val="0"/>
+              </a:spcBef>
+              <a:spcAft>
+                <a:spcPts val="0"/>
+              </a:spcAft>
+              <a:buSzPts val="1400"/>
+              <a:buChar char="○"/>
+              <a:defRPr/>
+            </a:lvl5pPr>
+            <a:lvl6pPr marL="3657509" lvl="5" indent="-423323">
+              <a:spcBef>
+                <a:spcPts val="0"/>
+              </a:spcBef>
+              <a:spcAft>
+                <a:spcPts val="0"/>
+              </a:spcAft>
+              <a:buSzPts val="1400"/>
+              <a:buChar char="■"/>
+              <a:defRPr/>
+            </a:lvl6pPr>
+            <a:lvl7pPr marL="4267093" lvl="6" indent="-423323">
+              <a:spcBef>
+                <a:spcPts val="0"/>
+              </a:spcBef>
+              <a:spcAft>
+                <a:spcPts val="0"/>
+              </a:spcAft>
+              <a:buSzPts val="1400"/>
+              <a:buChar char="●"/>
+              <a:defRPr/>
+            </a:lvl7pPr>
+            <a:lvl8pPr marL="4876678" lvl="7" indent="-423323">
+              <a:spcBef>
+                <a:spcPts val="0"/>
+              </a:spcBef>
+              <a:spcAft>
+                <a:spcPts val="0"/>
+              </a:spcAft>
+              <a:buSzPts val="1400"/>
+              <a:buChar char="○"/>
+              <a:defRPr/>
+            </a:lvl8pPr>
+            <a:lvl9pPr marL="5486263" lvl="8" indent="-423323">
+              <a:spcBef>
+                <a:spcPts val="0"/>
+              </a:spcBef>
+              <a:spcAft>
+                <a:spcPts val="0"/>
+              </a:spcAft>
+              <a:buSzPts val="1400"/>
+              <a:buChar char="■"/>
+              <a:defRPr/>
+            </a:lvl9pPr>
+          </a:lstStyle>
+          <a:p>
+            <a:endParaRPr/>
+          </a:p>
+        </p:txBody>
+      </p:sp>
+      <p:sp>
+        <p:nvSpPr>
+          <p:cNvPr id="20" name="Google Shape;20;p4"/>
+          <p:cNvSpPr txBox="1">
+            <a:spLocks noGrp="1"/>
+          </p:cNvSpPr>
+          <p:nvPr>
+            <p:ph type="sldNum" idx="12"/>
+          </p:nvPr>
+        </p:nvSpPr>
+        <p:spPr>
+          <a:xfrm>
+            <a:off x="11296611" y="6217623"/>
+            <a:ext cx="731600" cy="524800"/>
+          </a:xfrm>
+          <a:prstGeom prst="rect">
+            <a:avLst/>
+          </a:prstGeom>
+        </p:spPr>
+        <p:txBody>
+          <a:bodyPr spcFirstLastPara="1" wrap="square" lIns="91425" tIns="91425" rIns="91425" bIns="91425" anchor="ctr" anchorCtr="0">
+            <a:normAutofit/>
+          </a:bodyPr>
+          <a:lstStyle>
+            <a:lvl1pPr lvl="0">
+              <a:buNone/>
+              <a:defRPr/>
+            </a:lvl1pPr>
+            <a:lvl2pPr lvl="1">
+              <a:buNone/>
+              <a:defRPr/>
+            </a:lvl2pPr>
+            <a:lvl3pPr lvl="2">
+              <a:buNone/>
+              <a:defRPr/>
+            </a:lvl3pPr>
+            <a:lvl4pPr lvl="3">
+              <a:buNone/>
+              <a:defRPr/>
+            </a:lvl4pPr>
+            <a:lvl5pPr lvl="4">
+              <a:buNone/>
+              <a:defRPr/>
+            </a:lvl5pPr>
+            <a:lvl6pPr lvl="5">
+              <a:buNone/>
+              <a:defRPr/>
+            </a:lvl6pPr>
+            <a:lvl7pPr lvl="6">
+              <a:buNone/>
+              <a:defRPr/>
+            </a:lvl7pPr>
+            <a:lvl8pPr lvl="7">
+              <a:buNone/>
+              <a:defRPr/>
+            </a:lvl8pPr>
+            <a:lvl9pPr lvl="8">
+              <a:buNone/>
+              <a:defRPr/>
+            </a:lvl9pPr>
+          </a:lstStyle>
+          <a:p>
+            <a:pPr marL="0" lvl="0" indent="0" algn="r" rtl="0">
+              <a:spcBef>
+                <a:spcPts val="0"/>
+              </a:spcBef>
+              <a:spcAft>
+                <a:spcPts val="0"/>
+              </a:spcAft>
+              <a:buNone/>
+            </a:pPr>
+            <a:fld id="{00000000-1234-1234-1234-123412341234}" type="slidenum">
+              <a:rPr lang="en-GB"/>
+              <a:pPr marL="0" lvl="0" indent="0" algn="r" rtl="0">
+                <a:spcBef>
+                  <a:spcPts val="0"/>
+                </a:spcBef>
+                <a:spcAft>
+                  <a:spcPts val="0"/>
+                </a:spcAft>
+                <a:buNone/>
+              </a:pPr>
+              <a:t>‹#›</a:t>
+            </a:fld>
+            <a:endParaRPr/>
+          </a:p>
+        </p:txBody>
+      </p:sp>
+    </p:spTree>
+    <p:extLst>
+      <p:ext uri="{BB962C8B-B14F-4D97-AF65-F5344CB8AC3E}">
+        <p14:creationId xmlns:p14="http://schemas.microsoft.com/office/powerpoint/2010/main" val="3912593732"/>
       </p:ext>
     </p:extLst>
   </p:cSld>
@@ -3649,6 +4227,7 @@
     <p:sldLayoutId id="2147483657" r:id="rId9"/>
     <p:sldLayoutId id="2147483658" r:id="rId10"/>
     <p:sldLayoutId id="2147483659" r:id="rId11"/>
+    <p:sldLayoutId id="2147483660" r:id="rId12"/>
   </p:sldLayoutIdLst>
   <p:txStyles>
     <p:titleStyle>
@@ -4047,6 +4626,1327 @@
     <p:extLst>
       <p:ext uri="{BB962C8B-B14F-4D97-AF65-F5344CB8AC3E}">
         <p14:creationId xmlns:p14="http://schemas.microsoft.com/office/powerpoint/2010/main" val="4123532707"/>
+      </p:ext>
+    </p:extLst>
+  </p:cSld>
+  <p:clrMapOvr>
+    <a:masterClrMapping/>
+  </p:clrMapOvr>
+</p:sld>
+</file>
+
+<file path=ppt/slides/slide10.xml><?xml version="1.0" encoding="utf-8"?>
+<p:sld xmlns:a="http://schemas.openxmlformats.org/drawingml/2006/main" xmlns:r="http://schemas.openxmlformats.org/officeDocument/2006/relationships" xmlns:p="http://schemas.openxmlformats.org/presentationml/2006/main">
+  <p:cSld>
+    <p:spTree>
+      <p:nvGrpSpPr>
+        <p:cNvPr id="1" name=""/>
+        <p:cNvGrpSpPr/>
+        <p:nvPr/>
+      </p:nvGrpSpPr>
+      <p:grpSpPr>
+        <a:xfrm>
+          <a:off x="0" y="0"/>
+          <a:ext cx="0" cy="0"/>
+          <a:chOff x="0" y="0"/>
+          <a:chExt cx="0" cy="0"/>
+        </a:xfrm>
+      </p:grpSpPr>
+      <p:sp>
+        <p:nvSpPr>
+          <p:cNvPr id="2" name="Title 1">
+            <a:extLst>
+              <a:ext uri="{FF2B5EF4-FFF2-40B4-BE49-F238E27FC236}">
+                <a16:creationId xmlns:a16="http://schemas.microsoft.com/office/drawing/2014/main" id="{57AAA68A-EBFF-162D-923D-A5CBBE66B681}"/>
+              </a:ext>
+            </a:extLst>
+          </p:cNvPr>
+          <p:cNvSpPr>
+            <a:spLocks noGrp="1"/>
+          </p:cNvSpPr>
+          <p:nvPr>
+            <p:ph type="title"/>
+          </p:nvPr>
+        </p:nvSpPr>
+        <p:spPr/>
+        <p:txBody>
+          <a:bodyPr/>
+          <a:lstStyle/>
+          <a:p>
+            <a:r>
+              <a:rPr lang="en-GB" dirty="0"/>
+              <a:t>The RAG Pipeline</a:t>
+            </a:r>
+          </a:p>
+        </p:txBody>
+      </p:sp>
+      <p:pic>
+        <p:nvPicPr>
+          <p:cNvPr id="4" name="Picture 3" descr="A diagram of a diagram&#10;&#10;Description automatically generated">
+            <a:extLst>
+              <a:ext uri="{FF2B5EF4-FFF2-40B4-BE49-F238E27FC236}">
+                <a16:creationId xmlns:a16="http://schemas.microsoft.com/office/drawing/2014/main" id="{A77467EB-061F-15F2-078A-76B038BFC874}"/>
+              </a:ext>
+            </a:extLst>
+          </p:cNvPr>
+          <p:cNvPicPr>
+            <a:picLocks noChangeAspect="1"/>
+          </p:cNvPicPr>
+          <p:nvPr/>
+        </p:nvPicPr>
+        <p:blipFill>
+          <a:blip r:embed="rId2"/>
+          <a:stretch>
+            <a:fillRect/>
+          </a:stretch>
+        </p:blipFill>
+        <p:spPr>
+          <a:xfrm>
+            <a:off x="5248414" y="1690688"/>
+            <a:ext cx="6630119" cy="4467948"/>
+          </a:xfrm>
+          <a:prstGeom prst="rect">
+            <a:avLst/>
+          </a:prstGeom>
+        </p:spPr>
+      </p:pic>
+      <p:sp>
+        <p:nvSpPr>
+          <p:cNvPr id="3" name="Content Placeholder 2">
+            <a:extLst>
+              <a:ext uri="{FF2B5EF4-FFF2-40B4-BE49-F238E27FC236}">
+                <a16:creationId xmlns:a16="http://schemas.microsoft.com/office/drawing/2014/main" id="{A1E70467-644A-A9BC-D5C8-416CE2DA406F}"/>
+              </a:ext>
+            </a:extLst>
+          </p:cNvPr>
+          <p:cNvSpPr>
+            <a:spLocks noGrp="1"/>
+          </p:cNvSpPr>
+          <p:nvPr>
+            <p:ph idx="1"/>
+          </p:nvPr>
+        </p:nvSpPr>
+        <p:spPr>
+          <a:xfrm>
+            <a:off x="688170" y="1496986"/>
+            <a:ext cx="4560244" cy="5181239"/>
+          </a:xfrm>
+        </p:spPr>
+        <p:txBody>
+          <a:bodyPr vert="horz" lIns="91440" tIns="45720" rIns="91440" bIns="45720" rtlCol="0" anchor="t">
+            <a:normAutofit fontScale="85000" lnSpcReduction="10000"/>
+          </a:bodyPr>
+          <a:lstStyle/>
+          <a:p>
+            <a:pPr>
+              <a:buNone/>
+            </a:pPr>
+            <a:r>
+              <a:rPr lang="en-GB" sz="1800" dirty="0">
+                <a:solidFill>
+                  <a:srgbClr val="0B7743"/>
+                </a:solidFill>
+                <a:latin typeface="Source Code Pro"/>
+                <a:ea typeface="Source Code Pro"/>
+              </a:rPr>
+              <a:t>‘system’</a:t>
+            </a:r>
+            <a:r>
+              <a:rPr lang="en-GB" sz="1800" dirty="0">
+                <a:solidFill>
+                  <a:srgbClr val="666666"/>
+                </a:solidFill>
+                <a:latin typeface="Source Code Pro"/>
+                <a:ea typeface="Source Code Pro"/>
+              </a:rPr>
+              <a:t>:</a:t>
+            </a:r>
+          </a:p>
+          <a:p>
+            <a:pPr>
+              <a:buNone/>
+            </a:pPr>
+            <a:r>
+              <a:rPr lang="en-GB" sz="1800" dirty="0">
+                <a:solidFill>
+                  <a:srgbClr val="9325A5"/>
+                </a:solidFill>
+                <a:latin typeface="Source Code Pro"/>
+                <a:ea typeface="Source Code Pro"/>
+              </a:rPr>
+              <a:t>“You are an expert in baking.”</a:t>
+            </a:r>
+          </a:p>
+          <a:p>
+            <a:pPr>
+              <a:buNone/>
+            </a:pPr>
+            <a:endParaRPr lang="en-GB" dirty="0"/>
+          </a:p>
+          <a:p>
+            <a:pPr>
+              <a:buNone/>
+            </a:pPr>
+            <a:r>
+              <a:rPr lang="en-GB" sz="1800" dirty="0">
+                <a:solidFill>
+                  <a:srgbClr val="0B7743"/>
+                </a:solidFill>
+                <a:latin typeface="Source Code Pro"/>
+                <a:ea typeface="Source Code Pro"/>
+              </a:rPr>
+              <a:t>‘user’</a:t>
+            </a:r>
+            <a:r>
+              <a:rPr lang="en-GB" sz="1800" dirty="0">
+                <a:solidFill>
+                  <a:srgbClr val="666666"/>
+                </a:solidFill>
+                <a:latin typeface="Source Code Pro"/>
+                <a:ea typeface="Source Code Pro"/>
+              </a:rPr>
+              <a:t>:</a:t>
+            </a:r>
+          </a:p>
+          <a:p>
+            <a:pPr>
+              <a:buNone/>
+            </a:pPr>
+            <a:r>
+              <a:rPr lang="en-GB" sz="1800" dirty="0">
+                <a:solidFill>
+                  <a:srgbClr val="9325A5"/>
+                </a:solidFill>
+                <a:latin typeface="Source Code Pro"/>
+                <a:ea typeface="Source Code Pro"/>
+              </a:rPr>
+              <a:t>“Provide me a recipe for macarons.”</a:t>
+            </a:r>
+          </a:p>
+          <a:p>
+            <a:pPr>
+              <a:buNone/>
+            </a:pPr>
+            <a:endParaRPr lang="en-GB" dirty="0"/>
+          </a:p>
+          <a:p>
+            <a:pPr>
+              <a:buNone/>
+            </a:pPr>
+            <a:r>
+              <a:rPr lang="en-GB" sz="1800" dirty="0" err="1">
+                <a:solidFill>
+                  <a:schemeClr val="tx1">
+                    <a:lumMod val="76000"/>
+                    <a:lumOff val="24000"/>
+                  </a:schemeClr>
+                </a:solidFill>
+                <a:latin typeface="Source Code Pro"/>
+                <a:ea typeface="Source Code Pro"/>
+              </a:rPr>
+              <a:t>user_query</a:t>
+            </a:r>
+            <a:r>
+              <a:rPr lang="en-GB" sz="1800" dirty="0">
+                <a:solidFill>
+                  <a:schemeClr val="tx1">
+                    <a:lumMod val="76000"/>
+                    <a:lumOff val="24000"/>
+                  </a:schemeClr>
+                </a:solidFill>
+                <a:latin typeface="Source Code Pro"/>
+                <a:ea typeface="Source Code Pro"/>
+              </a:rPr>
+              <a:t> -&gt; </a:t>
+            </a:r>
+            <a:r>
+              <a:rPr lang="en-GB" sz="1800" dirty="0" err="1">
+                <a:solidFill>
+                  <a:schemeClr val="tx1">
+                    <a:lumMod val="76000"/>
+                    <a:lumOff val="24000"/>
+                  </a:schemeClr>
+                </a:solidFill>
+                <a:latin typeface="Source Code Pro"/>
+                <a:ea typeface="Source Code Pro"/>
+              </a:rPr>
+              <a:t>embed_query</a:t>
+            </a:r>
+            <a:r>
+              <a:rPr lang="en-GB" sz="1800" dirty="0">
+                <a:solidFill>
+                  <a:schemeClr val="tx1">
+                    <a:lumMod val="76000"/>
+                    <a:lumOff val="24000"/>
+                  </a:schemeClr>
+                </a:solidFill>
+                <a:latin typeface="Source Code Pro"/>
+                <a:ea typeface="Source Code Pro"/>
+              </a:rPr>
+              <a:t> -&gt; search database -&gt; </a:t>
+            </a:r>
+            <a:r>
+              <a:rPr lang="en-GB" sz="1800" dirty="0" err="1">
+                <a:solidFill>
+                  <a:schemeClr val="tx1">
+                    <a:lumMod val="76000"/>
+                    <a:lumOff val="24000"/>
+                  </a:schemeClr>
+                </a:solidFill>
+                <a:latin typeface="Source Code Pro"/>
+                <a:ea typeface="Source Code Pro"/>
+              </a:rPr>
+              <a:t>top_k_results</a:t>
+            </a:r>
+            <a:endParaRPr lang="en-GB" sz="1800" dirty="0">
+              <a:solidFill>
+                <a:schemeClr val="tx1">
+                  <a:lumMod val="76000"/>
+                  <a:lumOff val="24000"/>
+                </a:schemeClr>
+              </a:solidFill>
+              <a:latin typeface="Source Code Pro"/>
+              <a:ea typeface="Source Code Pro"/>
+            </a:endParaRPr>
+          </a:p>
+          <a:p>
+            <a:pPr>
+              <a:buNone/>
+            </a:pPr>
+            <a:endParaRPr lang="en-GB" sz="1800" dirty="0">
+              <a:solidFill>
+                <a:schemeClr val="tx1">
+                  <a:lumMod val="76000"/>
+                  <a:lumOff val="24000"/>
+                </a:schemeClr>
+              </a:solidFill>
+              <a:latin typeface="Source Code Pro"/>
+              <a:ea typeface="Source Code Pro"/>
+            </a:endParaRPr>
+          </a:p>
+          <a:p>
+            <a:pPr>
+              <a:buNone/>
+            </a:pPr>
+            <a:r>
+              <a:rPr lang="en-GB" sz="1800" dirty="0">
+                <a:solidFill>
+                  <a:srgbClr val="0B7743"/>
+                </a:solidFill>
+                <a:latin typeface="Source Code Pro"/>
+                <a:ea typeface="Source Code Pro"/>
+              </a:rPr>
+              <a:t>‘knowledge’</a:t>
+            </a:r>
+            <a:r>
+              <a:rPr lang="en-GB" sz="1800" dirty="0">
+                <a:solidFill>
+                  <a:srgbClr val="666666"/>
+                </a:solidFill>
+                <a:latin typeface="Source Code Pro"/>
+                <a:ea typeface="Source Code Pro"/>
+              </a:rPr>
+              <a:t>:</a:t>
+            </a:r>
+          </a:p>
+          <a:p>
+            <a:pPr>
+              <a:buNone/>
+            </a:pPr>
+            <a:r>
+              <a:rPr lang="en-GB" sz="1800" dirty="0">
+                <a:solidFill>
+                  <a:srgbClr val="9325A5"/>
+                </a:solidFill>
+                <a:latin typeface="Source Code Pro"/>
+                <a:ea typeface="Source Code Pro"/>
+              </a:rPr>
+              <a:t>“[Top Recipe 1, Top Recipe 2, Top Recipe k]”</a:t>
+            </a:r>
+          </a:p>
+          <a:p>
+            <a:pPr>
+              <a:buNone/>
+            </a:pPr>
+            <a:endParaRPr lang="en-GB" dirty="0"/>
+          </a:p>
+          <a:p>
+            <a:pPr marL="0" indent="0">
+              <a:buNone/>
+            </a:pPr>
+            <a:r>
+              <a:rPr lang="en-GB" sz="1800" dirty="0">
+                <a:solidFill>
+                  <a:srgbClr val="0B7743"/>
+                </a:solidFill>
+                <a:latin typeface="Source Code Pro"/>
+                <a:ea typeface="Source Code Pro"/>
+              </a:rPr>
+              <a:t>‘assistant’</a:t>
+            </a:r>
+            <a:r>
+              <a:rPr lang="en-GB" sz="1800" dirty="0">
+                <a:solidFill>
+                  <a:srgbClr val="666666"/>
+                </a:solidFill>
+                <a:latin typeface="Source Code Pro"/>
+                <a:ea typeface="Source Code Pro"/>
+              </a:rPr>
+              <a:t>:</a:t>
+            </a:r>
+          </a:p>
+          <a:p>
+            <a:pPr marL="0" indent="0">
+              <a:buNone/>
+            </a:pPr>
+            <a:r>
+              <a:rPr lang="en-GB" sz="1800" dirty="0">
+                <a:solidFill>
+                  <a:srgbClr val="9325A5"/>
+                </a:solidFill>
+                <a:latin typeface="Source Code Pro"/>
+                <a:ea typeface="Source Code Pro"/>
+              </a:rPr>
+              <a:t>“Certainly! Here is a recipe for macarons …”</a:t>
+            </a:r>
+            <a:endParaRPr lang="en-GB" dirty="0"/>
+          </a:p>
+        </p:txBody>
+      </p:sp>
+    </p:spTree>
+    <p:extLst>
+      <p:ext uri="{BB962C8B-B14F-4D97-AF65-F5344CB8AC3E}">
+        <p14:creationId xmlns:p14="http://schemas.microsoft.com/office/powerpoint/2010/main" val="3451334686"/>
+      </p:ext>
+    </p:extLst>
+  </p:cSld>
+  <p:clrMapOvr>
+    <a:masterClrMapping/>
+  </p:clrMapOvr>
+</p:sld>
+</file>
+
+<file path=ppt/slides/slide11.xml><?xml version="1.0" encoding="utf-8"?>
+<p:sld xmlns:a="http://schemas.openxmlformats.org/drawingml/2006/main" xmlns:r="http://schemas.openxmlformats.org/officeDocument/2006/relationships" xmlns:p="http://schemas.openxmlformats.org/presentationml/2006/main">
+  <p:cSld>
+    <p:spTree>
+      <p:nvGrpSpPr>
+        <p:cNvPr id="1" name=""/>
+        <p:cNvGrpSpPr/>
+        <p:nvPr/>
+      </p:nvGrpSpPr>
+      <p:grpSpPr>
+        <a:xfrm>
+          <a:off x="0" y="0"/>
+          <a:ext cx="0" cy="0"/>
+          <a:chOff x="0" y="0"/>
+          <a:chExt cx="0" cy="0"/>
+        </a:xfrm>
+      </p:grpSpPr>
+      <p:sp>
+        <p:nvSpPr>
+          <p:cNvPr id="2" name="Title 1">
+            <a:extLst>
+              <a:ext uri="{FF2B5EF4-FFF2-40B4-BE49-F238E27FC236}">
+                <a16:creationId xmlns:a16="http://schemas.microsoft.com/office/drawing/2014/main" id="{8B409050-3E94-D366-3D30-938C9CB92D70}"/>
+              </a:ext>
+            </a:extLst>
+          </p:cNvPr>
+          <p:cNvSpPr>
+            <a:spLocks noGrp="1"/>
+          </p:cNvSpPr>
+          <p:nvPr>
+            <p:ph type="title"/>
+          </p:nvPr>
+        </p:nvSpPr>
+        <p:spPr/>
+        <p:txBody>
+          <a:bodyPr/>
+          <a:lstStyle/>
+          <a:p>
+            <a:r>
+              <a:rPr lang="en-GB" dirty="0"/>
+              <a:t>Tools</a:t>
+            </a:r>
+          </a:p>
+        </p:txBody>
+      </p:sp>
+      <p:graphicFrame>
+        <p:nvGraphicFramePr>
+          <p:cNvPr id="5" name="Content Placeholder 4">
+            <a:extLst>
+              <a:ext uri="{FF2B5EF4-FFF2-40B4-BE49-F238E27FC236}">
+                <a16:creationId xmlns:a16="http://schemas.microsoft.com/office/drawing/2014/main" id="{3C99A2CF-6201-2BF5-0362-76F511F6A998}"/>
+              </a:ext>
+            </a:extLst>
+          </p:cNvPr>
+          <p:cNvGraphicFramePr>
+            <a:graphicFrameLocks noGrp="1"/>
+          </p:cNvGraphicFramePr>
+          <p:nvPr>
+            <p:ph idx="1"/>
+          </p:nvPr>
+        </p:nvGraphicFramePr>
+        <p:xfrm>
+          <a:off x="2087308" y="2029869"/>
+          <a:ext cx="8017356" cy="3648075"/>
+        </p:xfrm>
+        <a:graphic>
+          <a:graphicData uri="http://schemas.openxmlformats.org/drawingml/2006/table">
+            <a:tbl>
+              <a:tblPr bandRow="1">
+                <a:tableStyleId>{5C22544A-7EE6-4342-B048-85BDC9FD1C3A}</a:tableStyleId>
+              </a:tblPr>
+              <a:tblGrid>
+                <a:gridCol w="2036741">
+                  <a:extLst>
+                    <a:ext uri="{9D8B030D-6E8A-4147-A177-3AD203B41FA5}">
+                      <a16:colId xmlns:a16="http://schemas.microsoft.com/office/drawing/2014/main" val="283657678"/>
+                    </a:ext>
+                  </a:extLst>
+                </a:gridCol>
+                <a:gridCol w="5980615">
+                  <a:extLst>
+                    <a:ext uri="{9D8B030D-6E8A-4147-A177-3AD203B41FA5}">
+                      <a16:colId xmlns:a16="http://schemas.microsoft.com/office/drawing/2014/main" val="2446216171"/>
+                    </a:ext>
+                  </a:extLst>
+                </a:gridCol>
+              </a:tblGrid>
+              <a:tr h="2638425">
+                <a:tc>
+                  <a:txBody>
+                    <a:bodyPr/>
+                    <a:lstStyle/>
+                    <a:p>
+                      <a:pPr algn="l" fontAlgn="base">
+                        <a:lnSpc>
+                          <a:spcPts val="2175"/>
+                        </a:lnSpc>
+                        <a:buNone/>
+                      </a:pPr>
+                      <a:r>
+                        <a:rPr lang="en-GB" sz="1800" b="0" i="0" u="none" strike="noStrike" dirty="0">
+                          <a:solidFill>
+                            <a:srgbClr val="0B7743"/>
+                          </a:solidFill>
+                          <a:effectLst/>
+                          <a:latin typeface="Source Code Pro"/>
+                        </a:rPr>
+                        <a:t>‘system’</a:t>
+                      </a:r>
+                      <a:endParaRPr lang="en-GB" b="0" i="0" dirty="0">
+                        <a:solidFill>
+                          <a:srgbClr val="000000"/>
+                        </a:solidFill>
+                        <a:effectLst/>
+                        <a:latin typeface="Source Code Pro"/>
+                      </a:endParaRPr>
+                    </a:p>
+                  </a:txBody>
+                  <a:tcPr marL="95250" marR="95250" marT="95250" marB="95250">
+                    <a:lnL w="9525" cap="flat" cmpd="sng" algn="ctr">
+                      <a:solidFill>
+                        <a:srgbClr val="9E9E9E"/>
+                      </a:solidFill>
+                      <a:prstDash val="solid"/>
+                      <a:round/>
+                      <a:headEnd type="none" w="med" len="med"/>
+                      <a:tailEnd type="none" w="med" len="med"/>
+                    </a:lnL>
+                    <a:lnR w="9525" cap="flat" cmpd="sng" algn="ctr">
+                      <a:solidFill>
+                        <a:srgbClr val="9E9E9E"/>
+                      </a:solidFill>
+                      <a:prstDash val="solid"/>
+                      <a:round/>
+                      <a:headEnd type="none" w="med" len="med"/>
+                      <a:tailEnd type="none" w="med" len="med"/>
+                    </a:lnR>
+                    <a:lnT w="9525" cap="flat" cmpd="sng" algn="ctr">
+                      <a:solidFill>
+                        <a:srgbClr val="9E9E9E"/>
+                      </a:solidFill>
+                      <a:prstDash val="solid"/>
+                      <a:round/>
+                      <a:headEnd type="none" w="med" len="med"/>
+                      <a:tailEnd type="none" w="med" len="med"/>
+                    </a:lnT>
+                    <a:lnB w="9525" cap="flat" cmpd="sng" algn="ctr">
+                      <a:solidFill>
+                        <a:srgbClr val="9E9E9E"/>
+                      </a:solidFill>
+                      <a:prstDash val="solid"/>
+                      <a:round/>
+                      <a:headEnd type="none" w="med" len="med"/>
+                      <a:tailEnd type="none" w="med" len="med"/>
+                    </a:lnB>
+                    <a:noFill/>
+                  </a:tcPr>
+                </a:tc>
+                <a:tc>
+                  <a:txBody>
+                    <a:bodyPr/>
+                    <a:lstStyle/>
+                    <a:p>
+                      <a:pPr algn="l" fontAlgn="base">
+                        <a:lnSpc>
+                          <a:spcPts val="2175"/>
+                        </a:lnSpc>
+                        <a:buNone/>
+                      </a:pPr>
+                      <a:r>
+                        <a:rPr lang="en-GB" sz="1800" b="0" i="0" u="none" strike="noStrike" dirty="0">
+                          <a:solidFill>
+                            <a:srgbClr val="9325A5"/>
+                          </a:solidFill>
+                          <a:effectLst/>
+                          <a:latin typeface="Source Code Pro"/>
+                        </a:rPr>
+                        <a:t>“You are a helpful mathematician. You have access to the following functions:</a:t>
+                      </a:r>
+                      <a:endParaRPr lang="en-GB" b="0" i="0">
+                        <a:solidFill>
+                          <a:srgbClr val="000000"/>
+                        </a:solidFill>
+                        <a:effectLst/>
+                      </a:endParaRPr>
+                    </a:p>
+                    <a:p>
+                      <a:pPr lvl="0" algn="l">
+                        <a:lnSpc>
+                          <a:spcPts val="2175"/>
+                        </a:lnSpc>
+                        <a:buNone/>
+                      </a:pPr>
+                      <a:endParaRPr lang="en-GB" sz="1800" b="0" i="0" u="none" strike="noStrike" dirty="0">
+                        <a:solidFill>
+                          <a:srgbClr val="9325A5"/>
+                        </a:solidFill>
+                        <a:effectLst/>
+                        <a:latin typeface="Source Code Pro"/>
+                      </a:endParaRPr>
+                    </a:p>
+                    <a:p>
+                      <a:pPr algn="l" fontAlgn="base">
+                        <a:lnSpc>
+                          <a:spcPts val="2175"/>
+                        </a:lnSpc>
+                        <a:buNone/>
+                      </a:pPr>
+                      <a:r>
+                        <a:rPr lang="en-GB" sz="1800" b="0" i="0" u="none" strike="noStrike" dirty="0">
+                          <a:solidFill>
+                            <a:srgbClr val="9325A5"/>
+                          </a:solidFill>
+                          <a:effectLst/>
+                          <a:latin typeface="Source Code Pro"/>
+                        </a:rPr>
+                        <a:t>{{ </a:t>
+                      </a:r>
+                      <a:r>
+                        <a:rPr lang="en-GB" sz="1800" b="0" i="0" u="none" strike="noStrike" dirty="0" err="1">
+                          <a:solidFill>
+                            <a:srgbClr val="9325A5"/>
+                          </a:solidFill>
+                          <a:effectLst/>
+                          <a:latin typeface="Source Code Pro"/>
+                        </a:rPr>
+                        <a:t>tool_schema</a:t>
+                      </a:r>
+                      <a:r>
+                        <a:rPr lang="en-GB" sz="1800" b="0" i="0" u="none" strike="noStrike" dirty="0">
+                          <a:solidFill>
+                            <a:srgbClr val="9325A5"/>
+                          </a:solidFill>
+                          <a:effectLst/>
+                          <a:latin typeface="Source Code Pro"/>
+                        </a:rPr>
+                        <a:t> }}</a:t>
+                      </a:r>
+                      <a:endParaRPr lang="en-GB" b="0" i="0">
+                        <a:solidFill>
+                          <a:srgbClr val="000000"/>
+                        </a:solidFill>
+                        <a:effectLst/>
+                      </a:endParaRPr>
+                    </a:p>
+                    <a:p>
+                      <a:pPr lvl="0" algn="l">
+                        <a:lnSpc>
+                          <a:spcPts val="2175"/>
+                        </a:lnSpc>
+                        <a:buNone/>
+                      </a:pPr>
+                      <a:endParaRPr lang="en-GB" sz="1800" b="0" i="0" u="none" strike="noStrike" dirty="0">
+                        <a:solidFill>
+                          <a:srgbClr val="9325A5"/>
+                        </a:solidFill>
+                        <a:effectLst/>
+                        <a:latin typeface="Source Code Pro"/>
+                      </a:endParaRPr>
+                    </a:p>
+                    <a:p>
+                      <a:pPr algn="l" fontAlgn="base">
+                        <a:lnSpc>
+                          <a:spcPts val="2175"/>
+                        </a:lnSpc>
+                        <a:buNone/>
+                      </a:pPr>
+                      <a:r>
+                        <a:rPr lang="en-GB" sz="1800" b="0" i="0" u="none" strike="noStrike" dirty="0">
+                          <a:solidFill>
+                            <a:srgbClr val="9325A5"/>
+                          </a:solidFill>
+                          <a:effectLst/>
+                          <a:latin typeface="Source Code Pro"/>
+                        </a:rPr>
+                        <a:t>If you choose to use the tool, respond in </a:t>
+                      </a:r>
+                      <a:r>
+                        <a:rPr lang="en-GB" sz="1800" b="0" i="0" u="none" strike="noStrike" dirty="0" err="1">
+                          <a:solidFill>
+                            <a:srgbClr val="9325A5"/>
+                          </a:solidFill>
+                          <a:effectLst/>
+                          <a:latin typeface="Source Code Pro"/>
+                        </a:rPr>
+                        <a:t>json</a:t>
+                      </a:r>
+                      <a:r>
+                        <a:rPr lang="en-GB" sz="1800" b="0" i="0" u="none" strike="noStrike" dirty="0">
+                          <a:solidFill>
+                            <a:srgbClr val="9325A5"/>
+                          </a:solidFill>
+                          <a:effectLst/>
+                          <a:latin typeface="Source Code Pro"/>
+                        </a:rPr>
+                        <a:t> with the correct arguments to the function.”</a:t>
+                      </a:r>
+                      <a:endParaRPr lang="en-GB" b="0" i="0">
+                        <a:solidFill>
+                          <a:srgbClr val="000000"/>
+                        </a:solidFill>
+                        <a:effectLst/>
+                      </a:endParaRPr>
+                    </a:p>
+                  </a:txBody>
+                  <a:tcPr marL="95250" marR="95250" marT="95250" marB="95250">
+                    <a:lnL w="9525" cap="flat" cmpd="sng" algn="ctr">
+                      <a:solidFill>
+                        <a:srgbClr val="9E9E9E"/>
+                      </a:solidFill>
+                      <a:prstDash val="solid"/>
+                      <a:round/>
+                      <a:headEnd type="none" w="med" len="med"/>
+                      <a:tailEnd type="none" w="med" len="med"/>
+                    </a:lnL>
+                    <a:lnR w="9525" cap="flat" cmpd="sng" algn="ctr">
+                      <a:solidFill>
+                        <a:srgbClr val="9E9E9E"/>
+                      </a:solidFill>
+                      <a:prstDash val="solid"/>
+                      <a:round/>
+                      <a:headEnd type="none" w="med" len="med"/>
+                      <a:tailEnd type="none" w="med" len="med"/>
+                    </a:lnR>
+                    <a:lnT w="9525" cap="flat" cmpd="sng" algn="ctr">
+                      <a:solidFill>
+                        <a:srgbClr val="9E9E9E"/>
+                      </a:solidFill>
+                      <a:prstDash val="solid"/>
+                      <a:round/>
+                      <a:headEnd type="none" w="med" len="med"/>
+                      <a:tailEnd type="none" w="med" len="med"/>
+                    </a:lnT>
+                    <a:lnB w="9525" cap="flat" cmpd="sng" algn="ctr">
+                      <a:solidFill>
+                        <a:srgbClr val="9E9E9E"/>
+                      </a:solidFill>
+                      <a:prstDash val="solid"/>
+                      <a:round/>
+                      <a:headEnd type="none" w="med" len="med"/>
+                      <a:tailEnd type="none" w="med" len="med"/>
+                    </a:lnB>
+                    <a:noFill/>
+                  </a:tcPr>
+                </a:tc>
+                <a:extLst>
+                  <a:ext uri="{0D108BD9-81ED-4DB2-BD59-A6C34878D82A}">
+                    <a16:rowId xmlns:a16="http://schemas.microsoft.com/office/drawing/2014/main" val="1810655398"/>
+                  </a:ext>
+                </a:extLst>
+              </a:tr>
+              <a:tr h="504825">
+                <a:tc>
+                  <a:txBody>
+                    <a:bodyPr/>
+                    <a:lstStyle/>
+                    <a:p>
+                      <a:pPr algn="l" fontAlgn="base">
+                        <a:lnSpc>
+                          <a:spcPts val="2175"/>
+                        </a:lnSpc>
+                        <a:buNone/>
+                      </a:pPr>
+                      <a:r>
+                        <a:rPr lang="en-GB" sz="1800" b="0" i="0" u="none" strike="noStrike" dirty="0">
+                          <a:solidFill>
+                            <a:srgbClr val="0B7743"/>
+                          </a:solidFill>
+                          <a:effectLst/>
+                          <a:latin typeface="Source Code Pro"/>
+                        </a:rPr>
+                        <a:t>‘user’</a:t>
+                      </a:r>
+                      <a:endParaRPr lang="en-GB" b="0" i="0" dirty="0">
+                        <a:solidFill>
+                          <a:srgbClr val="000000"/>
+                        </a:solidFill>
+                        <a:effectLst/>
+                        <a:latin typeface="Source Code Pro"/>
+                      </a:endParaRPr>
+                    </a:p>
+                  </a:txBody>
+                  <a:tcPr marL="95250" marR="95250" marT="95250" marB="95250">
+                    <a:lnL w="9525" cap="flat" cmpd="sng" algn="ctr">
+                      <a:solidFill>
+                        <a:srgbClr val="9E9E9E"/>
+                      </a:solidFill>
+                      <a:prstDash val="solid"/>
+                      <a:round/>
+                      <a:headEnd type="none" w="med" len="med"/>
+                      <a:tailEnd type="none" w="med" len="med"/>
+                    </a:lnL>
+                    <a:lnR w="9525" cap="flat" cmpd="sng" algn="ctr">
+                      <a:solidFill>
+                        <a:srgbClr val="9E9E9E"/>
+                      </a:solidFill>
+                      <a:prstDash val="solid"/>
+                      <a:round/>
+                      <a:headEnd type="none" w="med" len="med"/>
+                      <a:tailEnd type="none" w="med" len="med"/>
+                    </a:lnR>
+                    <a:lnT w="9525" cap="flat" cmpd="sng" algn="ctr">
+                      <a:solidFill>
+                        <a:srgbClr val="9E9E9E"/>
+                      </a:solidFill>
+                      <a:prstDash val="solid"/>
+                      <a:round/>
+                      <a:headEnd type="none" w="med" len="med"/>
+                      <a:tailEnd type="none" w="med" len="med"/>
+                    </a:lnT>
+                    <a:lnB w="9525" cap="flat" cmpd="sng" algn="ctr">
+                      <a:solidFill>
+                        <a:srgbClr val="9E9E9E"/>
+                      </a:solidFill>
+                      <a:prstDash val="solid"/>
+                      <a:round/>
+                      <a:headEnd type="none" w="med" len="med"/>
+                      <a:tailEnd type="none" w="med" len="med"/>
+                    </a:lnB>
+                    <a:noFill/>
+                  </a:tcPr>
+                </a:tc>
+                <a:tc>
+                  <a:txBody>
+                    <a:bodyPr/>
+                    <a:lstStyle/>
+                    <a:p>
+                      <a:pPr algn="l" fontAlgn="base">
+                        <a:lnSpc>
+                          <a:spcPts val="2175"/>
+                        </a:lnSpc>
+                        <a:buNone/>
+                      </a:pPr>
+                      <a:r>
+                        <a:rPr lang="en-GB" sz="1800" b="0" i="0" u="none" strike="noStrike" dirty="0">
+                          <a:solidFill>
+                            <a:srgbClr val="9325A5"/>
+                          </a:solidFill>
+                          <a:effectLst/>
+                          <a:latin typeface="Source Code Pro"/>
+                        </a:rPr>
+                        <a:t>“What is 1056 x 1316?”</a:t>
+                      </a:r>
+                      <a:endParaRPr lang="en-GB" b="0" i="0" dirty="0">
+                        <a:solidFill>
+                          <a:srgbClr val="000000"/>
+                        </a:solidFill>
+                        <a:effectLst/>
+                        <a:latin typeface="Source Code Pro"/>
+                      </a:endParaRPr>
+                    </a:p>
+                  </a:txBody>
+                  <a:tcPr marL="95250" marR="95250" marT="95250" marB="95250">
+                    <a:lnL w="9525" cap="flat" cmpd="sng" algn="ctr">
+                      <a:solidFill>
+                        <a:srgbClr val="9E9E9E"/>
+                      </a:solidFill>
+                      <a:prstDash val="solid"/>
+                      <a:round/>
+                      <a:headEnd type="none" w="med" len="med"/>
+                      <a:tailEnd type="none" w="med" len="med"/>
+                    </a:lnL>
+                    <a:lnR w="9525" cap="flat" cmpd="sng" algn="ctr">
+                      <a:solidFill>
+                        <a:srgbClr val="9E9E9E"/>
+                      </a:solidFill>
+                      <a:prstDash val="solid"/>
+                      <a:round/>
+                      <a:headEnd type="none" w="med" len="med"/>
+                      <a:tailEnd type="none" w="med" len="med"/>
+                    </a:lnR>
+                    <a:lnT w="9525" cap="flat" cmpd="sng" algn="ctr">
+                      <a:solidFill>
+                        <a:srgbClr val="9E9E9E"/>
+                      </a:solidFill>
+                      <a:prstDash val="solid"/>
+                      <a:round/>
+                      <a:headEnd type="none" w="med" len="med"/>
+                      <a:tailEnd type="none" w="med" len="med"/>
+                    </a:lnT>
+                    <a:lnB w="9525" cap="flat" cmpd="sng" algn="ctr">
+                      <a:solidFill>
+                        <a:srgbClr val="9E9E9E"/>
+                      </a:solidFill>
+                      <a:prstDash val="solid"/>
+                      <a:round/>
+                      <a:headEnd type="none" w="med" len="med"/>
+                      <a:tailEnd type="none" w="med" len="med"/>
+                    </a:lnB>
+                    <a:noFill/>
+                  </a:tcPr>
+                </a:tc>
+                <a:extLst>
+                  <a:ext uri="{0D108BD9-81ED-4DB2-BD59-A6C34878D82A}">
+                    <a16:rowId xmlns:a16="http://schemas.microsoft.com/office/drawing/2014/main" val="923839307"/>
+                  </a:ext>
+                </a:extLst>
+              </a:tr>
+              <a:tr h="504825">
+                <a:tc>
+                  <a:txBody>
+                    <a:bodyPr/>
+                    <a:lstStyle/>
+                    <a:p>
+                      <a:pPr algn="l" fontAlgn="base">
+                        <a:lnSpc>
+                          <a:spcPts val="2175"/>
+                        </a:lnSpc>
+                        <a:buNone/>
+                      </a:pPr>
+                      <a:r>
+                        <a:rPr lang="en-GB" sz="1800" b="0" i="0" u="none" strike="noStrike" dirty="0">
+                          <a:solidFill>
+                            <a:srgbClr val="0B7743"/>
+                          </a:solidFill>
+                          <a:effectLst/>
+                          <a:latin typeface="Source Code Pro"/>
+                        </a:rPr>
+                        <a:t>‘assistant’</a:t>
+                      </a:r>
+                      <a:endParaRPr lang="en-GB" b="0" i="0" dirty="0">
+                        <a:solidFill>
+                          <a:srgbClr val="000000"/>
+                        </a:solidFill>
+                        <a:effectLst/>
+                        <a:latin typeface="Source Code Pro"/>
+                      </a:endParaRPr>
+                    </a:p>
+                  </a:txBody>
+                  <a:tcPr marL="95250" marR="95250" marT="95250" marB="95250">
+                    <a:lnL w="9525" cap="flat" cmpd="sng" algn="ctr">
+                      <a:solidFill>
+                        <a:srgbClr val="9E9E9E"/>
+                      </a:solidFill>
+                      <a:prstDash val="solid"/>
+                      <a:round/>
+                      <a:headEnd type="none" w="med" len="med"/>
+                      <a:tailEnd type="none" w="med" len="med"/>
+                    </a:lnL>
+                    <a:lnR w="9525" cap="flat" cmpd="sng" algn="ctr">
+                      <a:solidFill>
+                        <a:srgbClr val="9E9E9E"/>
+                      </a:solidFill>
+                      <a:prstDash val="solid"/>
+                      <a:round/>
+                      <a:headEnd type="none" w="med" len="med"/>
+                      <a:tailEnd type="none" w="med" len="med"/>
+                    </a:lnR>
+                    <a:lnT w="9525" cap="flat" cmpd="sng" algn="ctr">
+                      <a:solidFill>
+                        <a:srgbClr val="9E9E9E"/>
+                      </a:solidFill>
+                      <a:prstDash val="solid"/>
+                      <a:round/>
+                      <a:headEnd type="none" w="med" len="med"/>
+                      <a:tailEnd type="none" w="med" len="med"/>
+                    </a:lnT>
+                    <a:lnB w="9525" cap="flat" cmpd="sng" algn="ctr">
+                      <a:solidFill>
+                        <a:srgbClr val="9E9E9E"/>
+                      </a:solidFill>
+                      <a:prstDash val="solid"/>
+                      <a:round/>
+                      <a:headEnd type="none" w="med" len="med"/>
+                      <a:tailEnd type="none" w="med" len="med"/>
+                    </a:lnB>
+                    <a:noFill/>
+                  </a:tcPr>
+                </a:tc>
+                <a:tc>
+                  <a:txBody>
+                    <a:bodyPr/>
+                    <a:lstStyle/>
+                    <a:p>
+                      <a:pPr algn="l" fontAlgn="base">
+                        <a:lnSpc>
+                          <a:spcPts val="2175"/>
+                        </a:lnSpc>
+                        <a:buNone/>
+                      </a:pPr>
+                      <a:r>
+                        <a:rPr lang="en-GB" sz="1800" b="0" i="0" u="none" strike="noStrike" dirty="0">
+                          <a:solidFill>
+                            <a:srgbClr val="9325A5"/>
+                          </a:solidFill>
+                          <a:effectLst/>
+                          <a:latin typeface="Source Code Pro"/>
+                        </a:rPr>
+                        <a:t>“{‘a’:1056, ‘b’:1316}”</a:t>
+                      </a:r>
+                      <a:endParaRPr lang="en-GB" b="0" i="0" dirty="0">
+                        <a:solidFill>
+                          <a:srgbClr val="000000"/>
+                        </a:solidFill>
+                        <a:effectLst/>
+                        <a:latin typeface="Source Code Pro"/>
+                      </a:endParaRPr>
+                    </a:p>
+                  </a:txBody>
+                  <a:tcPr marL="95250" marR="95250" marT="95250" marB="95250">
+                    <a:lnL w="9525" cap="flat" cmpd="sng" algn="ctr">
+                      <a:solidFill>
+                        <a:srgbClr val="9E9E9E"/>
+                      </a:solidFill>
+                      <a:prstDash val="solid"/>
+                      <a:round/>
+                      <a:headEnd type="none" w="med" len="med"/>
+                      <a:tailEnd type="none" w="med" len="med"/>
+                    </a:lnL>
+                    <a:lnR w="9525" cap="flat" cmpd="sng" algn="ctr">
+                      <a:solidFill>
+                        <a:srgbClr val="9E9E9E"/>
+                      </a:solidFill>
+                      <a:prstDash val="solid"/>
+                      <a:round/>
+                      <a:headEnd type="none" w="med" len="med"/>
+                      <a:tailEnd type="none" w="med" len="med"/>
+                    </a:lnR>
+                    <a:lnT w="9525" cap="flat" cmpd="sng" algn="ctr">
+                      <a:solidFill>
+                        <a:srgbClr val="9E9E9E"/>
+                      </a:solidFill>
+                      <a:prstDash val="solid"/>
+                      <a:round/>
+                      <a:headEnd type="none" w="med" len="med"/>
+                      <a:tailEnd type="none" w="med" len="med"/>
+                    </a:lnT>
+                    <a:lnB w="9525" cap="flat" cmpd="sng" algn="ctr">
+                      <a:solidFill>
+                        <a:srgbClr val="9E9E9E"/>
+                      </a:solidFill>
+                      <a:prstDash val="solid"/>
+                      <a:round/>
+                      <a:headEnd type="none" w="med" len="med"/>
+                      <a:tailEnd type="none" w="med" len="med"/>
+                    </a:lnB>
+                    <a:noFill/>
+                  </a:tcPr>
+                </a:tc>
+                <a:extLst>
+                  <a:ext uri="{0D108BD9-81ED-4DB2-BD59-A6C34878D82A}">
+                    <a16:rowId xmlns:a16="http://schemas.microsoft.com/office/drawing/2014/main" val="3157024178"/>
+                  </a:ext>
+                </a:extLst>
+              </a:tr>
+            </a:tbl>
+          </a:graphicData>
+        </a:graphic>
+      </p:graphicFrame>
+    </p:spTree>
+    <p:extLst>
+      <p:ext uri="{BB962C8B-B14F-4D97-AF65-F5344CB8AC3E}">
+        <p14:creationId xmlns:p14="http://schemas.microsoft.com/office/powerpoint/2010/main" val="1973323032"/>
+      </p:ext>
+    </p:extLst>
+  </p:cSld>
+  <p:clrMapOvr>
+    <a:masterClrMapping/>
+  </p:clrMapOvr>
+</p:sld>
+</file>
+
+<file path=ppt/slides/slide12.xml><?xml version="1.0" encoding="utf-8"?>
+<p:sld xmlns:a="http://schemas.openxmlformats.org/drawingml/2006/main" xmlns:r="http://schemas.openxmlformats.org/officeDocument/2006/relationships" xmlns:p="http://schemas.openxmlformats.org/presentationml/2006/main">
+  <p:cSld>
+    <p:spTree>
+      <p:nvGrpSpPr>
+        <p:cNvPr id="1" name=""/>
+        <p:cNvGrpSpPr/>
+        <p:nvPr/>
+      </p:nvGrpSpPr>
+      <p:grpSpPr>
+        <a:xfrm>
+          <a:off x="0" y="0"/>
+          <a:ext cx="0" cy="0"/>
+          <a:chOff x="0" y="0"/>
+          <a:chExt cx="0" cy="0"/>
+        </a:xfrm>
+      </p:grpSpPr>
+      <p:sp>
+        <p:nvSpPr>
+          <p:cNvPr id="2" name="Title 1">
+            <a:extLst>
+              <a:ext uri="{FF2B5EF4-FFF2-40B4-BE49-F238E27FC236}">
+                <a16:creationId xmlns:a16="http://schemas.microsoft.com/office/drawing/2014/main" id="{3E85E0F3-30DF-7E3D-2754-635E1BC87CDD}"/>
+              </a:ext>
+            </a:extLst>
+          </p:cNvPr>
+          <p:cNvSpPr>
+            <a:spLocks noGrp="1"/>
+          </p:cNvSpPr>
+          <p:nvPr>
+            <p:ph type="title"/>
+          </p:nvPr>
+        </p:nvSpPr>
+        <p:spPr/>
+        <p:txBody>
+          <a:bodyPr/>
+          <a:lstStyle/>
+          <a:p>
+            <a:r>
+              <a:rPr lang="en-GB" dirty="0"/>
+              <a:t>Tools</a:t>
+            </a:r>
+          </a:p>
+        </p:txBody>
+      </p:sp>
+      <p:pic>
+        <p:nvPicPr>
+          <p:cNvPr id="4" name="Content Placeholder 3">
+            <a:extLst>
+              <a:ext uri="{FF2B5EF4-FFF2-40B4-BE49-F238E27FC236}">
+                <a16:creationId xmlns:a16="http://schemas.microsoft.com/office/drawing/2014/main" id="{E84A8247-E8A3-440D-9244-21C90856CF7D}"/>
+              </a:ext>
+            </a:extLst>
+          </p:cNvPr>
+          <p:cNvPicPr>
+            <a:picLocks noGrp="1" noChangeAspect="1"/>
+          </p:cNvPicPr>
+          <p:nvPr>
+            <p:ph idx="1"/>
+          </p:nvPr>
+        </p:nvPicPr>
+        <p:blipFill>
+          <a:blip r:embed="rId2"/>
+          <a:stretch>
+            <a:fillRect/>
+          </a:stretch>
+        </p:blipFill>
+        <p:spPr>
+          <a:xfrm>
+            <a:off x="3563937" y="2253457"/>
+            <a:ext cx="5057775" cy="3228975"/>
+          </a:xfrm>
+          <a:prstGeom prst="rect">
+            <a:avLst/>
+          </a:prstGeom>
+        </p:spPr>
+      </p:pic>
+    </p:spTree>
+    <p:extLst>
+      <p:ext uri="{BB962C8B-B14F-4D97-AF65-F5344CB8AC3E}">
+        <p14:creationId xmlns:p14="http://schemas.microsoft.com/office/powerpoint/2010/main" val="86510108"/>
+      </p:ext>
+    </p:extLst>
+  </p:cSld>
+  <p:clrMapOvr>
+    <a:masterClrMapping/>
+  </p:clrMapOvr>
+</p:sld>
+</file>
+
+<file path=ppt/slides/slide13.xml><?xml version="1.0" encoding="utf-8"?>
+<p:sld xmlns:a="http://schemas.openxmlformats.org/drawingml/2006/main" xmlns:r="http://schemas.openxmlformats.org/officeDocument/2006/relationships" xmlns:p="http://schemas.openxmlformats.org/presentationml/2006/main">
+  <p:cSld>
+    <p:spTree>
+      <p:nvGrpSpPr>
+        <p:cNvPr id="1" name=""/>
+        <p:cNvGrpSpPr/>
+        <p:nvPr/>
+      </p:nvGrpSpPr>
+      <p:grpSpPr>
+        <a:xfrm>
+          <a:off x="0" y="0"/>
+          <a:ext cx="0" cy="0"/>
+          <a:chOff x="0" y="0"/>
+          <a:chExt cx="0" cy="0"/>
+        </a:xfrm>
+      </p:grpSpPr>
+      <p:sp>
+        <p:nvSpPr>
+          <p:cNvPr id="2" name="Title 1">
+            <a:extLst>
+              <a:ext uri="{FF2B5EF4-FFF2-40B4-BE49-F238E27FC236}">
+                <a16:creationId xmlns:a16="http://schemas.microsoft.com/office/drawing/2014/main" id="{AC709D7E-F08D-02D0-83B9-8B919070D4E6}"/>
+              </a:ext>
+            </a:extLst>
+          </p:cNvPr>
+          <p:cNvSpPr>
+            <a:spLocks noGrp="1"/>
+          </p:cNvSpPr>
+          <p:nvPr>
+            <p:ph type="title"/>
+          </p:nvPr>
+        </p:nvSpPr>
+        <p:spPr/>
+        <p:txBody>
+          <a:bodyPr/>
+          <a:lstStyle/>
+          <a:p>
+            <a:r>
+              <a:rPr lang="en-GB" dirty="0"/>
+              <a:t>Tools</a:t>
+            </a:r>
+          </a:p>
+        </p:txBody>
+      </p:sp>
+      <p:pic>
+        <p:nvPicPr>
+          <p:cNvPr id="4" name="Content Placeholder 3">
+            <a:extLst>
+              <a:ext uri="{FF2B5EF4-FFF2-40B4-BE49-F238E27FC236}">
+                <a16:creationId xmlns:a16="http://schemas.microsoft.com/office/drawing/2014/main" id="{6DFA782C-205E-17DF-64EC-23CAB765870F}"/>
+              </a:ext>
+            </a:extLst>
+          </p:cNvPr>
+          <p:cNvPicPr>
+            <a:picLocks noGrp="1" noChangeAspect="1"/>
+          </p:cNvPicPr>
+          <p:nvPr>
+            <p:ph idx="1"/>
+          </p:nvPr>
+        </p:nvPicPr>
+        <p:blipFill>
+          <a:blip r:embed="rId2"/>
+          <a:stretch>
+            <a:fillRect/>
+          </a:stretch>
+        </p:blipFill>
+        <p:spPr>
+          <a:xfrm>
+            <a:off x="2585506" y="1685925"/>
+            <a:ext cx="7020988" cy="4637088"/>
+          </a:xfrm>
+          <a:prstGeom prst="rect">
+            <a:avLst/>
+          </a:prstGeom>
+        </p:spPr>
+      </p:pic>
+    </p:spTree>
+    <p:extLst>
+      <p:ext uri="{BB962C8B-B14F-4D97-AF65-F5344CB8AC3E}">
+        <p14:creationId xmlns:p14="http://schemas.microsoft.com/office/powerpoint/2010/main" val="903869713"/>
+      </p:ext>
+    </p:extLst>
+  </p:cSld>
+  <p:clrMapOvr>
+    <a:masterClrMapping/>
+  </p:clrMapOvr>
+</p:sld>
+</file>
+
+<file path=ppt/slides/slide14.xml><?xml version="1.0" encoding="utf-8"?>
+<p:sld xmlns:a="http://schemas.openxmlformats.org/drawingml/2006/main" xmlns:r="http://schemas.openxmlformats.org/officeDocument/2006/relationships" xmlns:p="http://schemas.openxmlformats.org/presentationml/2006/main">
+  <p:cSld>
+    <p:spTree>
+      <p:nvGrpSpPr>
+        <p:cNvPr id="1" name=""/>
+        <p:cNvGrpSpPr/>
+        <p:nvPr/>
+      </p:nvGrpSpPr>
+      <p:grpSpPr>
+        <a:xfrm>
+          <a:off x="0" y="0"/>
+          <a:ext cx="0" cy="0"/>
+          <a:chOff x="0" y="0"/>
+          <a:chExt cx="0" cy="0"/>
+        </a:xfrm>
+      </p:grpSpPr>
+      <p:sp>
+        <p:nvSpPr>
+          <p:cNvPr id="2" name="Title 1">
+            <a:extLst>
+              <a:ext uri="{FF2B5EF4-FFF2-40B4-BE49-F238E27FC236}">
+                <a16:creationId xmlns:a16="http://schemas.microsoft.com/office/drawing/2014/main" id="{ED52E3A1-7CEE-1B7B-BFEB-01CC437B078B}"/>
+              </a:ext>
+            </a:extLst>
+          </p:cNvPr>
+          <p:cNvSpPr>
+            <a:spLocks noGrp="1"/>
+          </p:cNvSpPr>
+          <p:nvPr>
+            <p:ph type="title"/>
+          </p:nvPr>
+        </p:nvSpPr>
+        <p:spPr/>
+        <p:txBody>
+          <a:bodyPr/>
+          <a:lstStyle/>
+          <a:p>
+            <a:r>
+              <a:rPr lang="en-GB"/>
+              <a:t>Tools</a:t>
+            </a:r>
+          </a:p>
+        </p:txBody>
+      </p:sp>
+      <p:pic>
+        <p:nvPicPr>
+          <p:cNvPr id="4" name="Picture 3" descr="A diagram of a llama&#10;&#10;AI-generated content may be incorrect.">
+            <a:extLst>
+              <a:ext uri="{FF2B5EF4-FFF2-40B4-BE49-F238E27FC236}">
+                <a16:creationId xmlns:a16="http://schemas.microsoft.com/office/drawing/2014/main" id="{B8607B1A-4424-44E0-1725-5CF1BA26E3FE}"/>
+              </a:ext>
+            </a:extLst>
+          </p:cNvPr>
+          <p:cNvPicPr>
+            <a:picLocks noChangeAspect="1"/>
+          </p:cNvPicPr>
+          <p:nvPr/>
+        </p:nvPicPr>
+        <p:blipFill>
+          <a:blip r:embed="rId2"/>
+          <a:stretch>
+            <a:fillRect/>
+          </a:stretch>
+        </p:blipFill>
+        <p:spPr>
+          <a:xfrm>
+            <a:off x="1285875" y="1428750"/>
+            <a:ext cx="9613900" cy="5429250"/>
+          </a:xfrm>
+          <a:prstGeom prst="rect">
+            <a:avLst/>
+          </a:prstGeom>
+        </p:spPr>
+      </p:pic>
+    </p:spTree>
+    <p:extLst>
+      <p:ext uri="{BB962C8B-B14F-4D97-AF65-F5344CB8AC3E}">
+        <p14:creationId xmlns:p14="http://schemas.microsoft.com/office/powerpoint/2010/main" val="1865397357"/>
       </p:ext>
     </p:extLst>
   </p:cSld>
@@ -6559,6 +8459,7191 @@
       <p:bldP spid="5" grpId="0" build="p"/>
     </p:bldLst>
   </p:timing>
+</p:sld>
+</file>
+
+<file path=ppt/slides/slide6.xml><?xml version="1.0" encoding="utf-8"?>
+<p:sld xmlns:a="http://schemas.openxmlformats.org/drawingml/2006/main" xmlns:r="http://schemas.openxmlformats.org/officeDocument/2006/relationships" xmlns:p="http://schemas.openxmlformats.org/presentationml/2006/main">
+  <p:cSld>
+    <p:spTree>
+      <p:nvGrpSpPr>
+        <p:cNvPr id="1" name=""/>
+        <p:cNvGrpSpPr/>
+        <p:nvPr/>
+      </p:nvGrpSpPr>
+      <p:grpSpPr>
+        <a:xfrm>
+          <a:off x="0" y="0"/>
+          <a:ext cx="0" cy="0"/>
+          <a:chOff x="0" y="0"/>
+          <a:chExt cx="0" cy="0"/>
+        </a:xfrm>
+      </p:grpSpPr>
+      <p:sp>
+        <p:nvSpPr>
+          <p:cNvPr id="2" name="Title 1">
+            <a:extLst>
+              <a:ext uri="{FF2B5EF4-FFF2-40B4-BE49-F238E27FC236}">
+                <a16:creationId xmlns:a16="http://schemas.microsoft.com/office/drawing/2014/main" id="{765694F5-3DF7-8763-1C92-8C5D4FACC121}"/>
+              </a:ext>
+            </a:extLst>
+          </p:cNvPr>
+          <p:cNvSpPr>
+            <a:spLocks noGrp="1"/>
+          </p:cNvSpPr>
+          <p:nvPr>
+            <p:ph type="title"/>
+          </p:nvPr>
+        </p:nvSpPr>
+        <p:spPr/>
+        <p:txBody>
+          <a:bodyPr/>
+          <a:lstStyle/>
+          <a:p>
+            <a:r>
+              <a:rPr lang="en-GB" dirty="0"/>
+              <a:t>Retrieval Augmented Generation</a:t>
+            </a:r>
+          </a:p>
+        </p:txBody>
+      </p:sp>
+      <p:sp>
+        <p:nvSpPr>
+          <p:cNvPr id="3" name="Content Placeholder 2">
+            <a:extLst>
+              <a:ext uri="{FF2B5EF4-FFF2-40B4-BE49-F238E27FC236}">
+                <a16:creationId xmlns:a16="http://schemas.microsoft.com/office/drawing/2014/main" id="{B8A2436E-9097-316C-AE3B-BAE2E3CA19AE}"/>
+              </a:ext>
+            </a:extLst>
+          </p:cNvPr>
+          <p:cNvSpPr>
+            <a:spLocks noGrp="1"/>
+          </p:cNvSpPr>
+          <p:nvPr>
+            <p:ph idx="1"/>
+          </p:nvPr>
+        </p:nvSpPr>
+        <p:spPr/>
+        <p:txBody>
+          <a:bodyPr vert="horz" lIns="91440" tIns="45720" rIns="91440" bIns="45720" rtlCol="0" anchor="t">
+            <a:normAutofit/>
+          </a:bodyPr>
+          <a:lstStyle/>
+          <a:p>
+            <a:pPr>
+              <a:buNone/>
+            </a:pPr>
+            <a:endParaRPr lang="en-GB" sz="1800" dirty="0">
+              <a:solidFill>
+                <a:srgbClr val="0B7743"/>
+              </a:solidFill>
+              <a:latin typeface="Source Code Pro"/>
+              <a:ea typeface="Source Code Pro"/>
+            </a:endParaRPr>
+          </a:p>
+          <a:p>
+            <a:pPr>
+              <a:buNone/>
+            </a:pPr>
+            <a:endParaRPr lang="en-GB" sz="1800" dirty="0">
+              <a:solidFill>
+                <a:srgbClr val="0B7743"/>
+              </a:solidFill>
+              <a:latin typeface="Source Code Pro"/>
+              <a:ea typeface="Source Code Pro"/>
+            </a:endParaRPr>
+          </a:p>
+          <a:p>
+            <a:pPr>
+              <a:buNone/>
+            </a:pPr>
+            <a:r>
+              <a:rPr lang="en-GB" sz="1800" dirty="0">
+                <a:solidFill>
+                  <a:srgbClr val="0B7743"/>
+                </a:solidFill>
+                <a:latin typeface="Source Code Pro"/>
+                <a:ea typeface="Source Code Pro"/>
+              </a:rPr>
+              <a:t>‘system’</a:t>
+            </a:r>
+            <a:r>
+              <a:rPr lang="en-GB" sz="1800" dirty="0">
+                <a:solidFill>
+                  <a:srgbClr val="666666"/>
+                </a:solidFill>
+                <a:latin typeface="Source Code Pro"/>
+                <a:ea typeface="Source Code Pro"/>
+              </a:rPr>
+              <a:t>    : </a:t>
+            </a:r>
+            <a:r>
+              <a:rPr lang="en-GB" sz="1800" dirty="0">
+                <a:solidFill>
+                  <a:srgbClr val="9325A5"/>
+                </a:solidFill>
+                <a:latin typeface="Source Code Pro"/>
+                <a:ea typeface="Source Code Pro"/>
+              </a:rPr>
+              <a:t>“You are an expert in baking.”</a:t>
+            </a:r>
+            <a:endParaRPr lang="en-GB"/>
+          </a:p>
+          <a:p>
+            <a:pPr>
+              <a:buNone/>
+            </a:pPr>
+            <a:r>
+              <a:rPr lang="en-GB" sz="1800" dirty="0">
+                <a:solidFill>
+                  <a:srgbClr val="0B7743"/>
+                </a:solidFill>
+                <a:latin typeface="Source Code Pro"/>
+                <a:ea typeface="Source Code Pro"/>
+              </a:rPr>
+              <a:t>‘user’</a:t>
+            </a:r>
+            <a:r>
+              <a:rPr lang="en-GB" sz="1800" dirty="0">
+                <a:solidFill>
+                  <a:srgbClr val="666666"/>
+                </a:solidFill>
+                <a:latin typeface="Source Code Pro"/>
+                <a:ea typeface="Source Code Pro"/>
+              </a:rPr>
+              <a:t>      : </a:t>
+            </a:r>
+            <a:r>
+              <a:rPr lang="en-GB" sz="1800" dirty="0">
+                <a:solidFill>
+                  <a:srgbClr val="9325A5"/>
+                </a:solidFill>
+                <a:latin typeface="Source Code Pro"/>
+                <a:ea typeface="Source Code Pro"/>
+              </a:rPr>
+              <a:t>“Provide me a recipe for macarons.”</a:t>
+            </a:r>
+            <a:endParaRPr lang="en-GB"/>
+          </a:p>
+          <a:p>
+            <a:pPr marL="0" indent="0">
+              <a:buNone/>
+            </a:pPr>
+            <a:r>
+              <a:rPr lang="en-GB" sz="1800" dirty="0">
+                <a:solidFill>
+                  <a:srgbClr val="0B7743"/>
+                </a:solidFill>
+                <a:latin typeface="Source Code Pro"/>
+                <a:ea typeface="Source Code Pro"/>
+              </a:rPr>
+              <a:t>‘assistant’</a:t>
+            </a:r>
+            <a:r>
+              <a:rPr lang="en-GB" sz="1800" dirty="0">
+                <a:solidFill>
+                  <a:srgbClr val="666666"/>
+                </a:solidFill>
+                <a:latin typeface="Source Code Pro"/>
+                <a:ea typeface="Source Code Pro"/>
+              </a:rPr>
+              <a:t> : </a:t>
+            </a:r>
+            <a:r>
+              <a:rPr lang="en-GB" sz="1800" dirty="0">
+                <a:solidFill>
+                  <a:srgbClr val="9325A5"/>
+                </a:solidFill>
+                <a:latin typeface="Source Code Pro"/>
+                <a:ea typeface="Source Code Pro"/>
+              </a:rPr>
+              <a:t>“Certainly! Here is a recipe for macarons …”</a:t>
+            </a:r>
+            <a:endParaRPr lang="en-GB" dirty="0"/>
+          </a:p>
+        </p:txBody>
+      </p:sp>
+    </p:spTree>
+    <p:extLst>
+      <p:ext uri="{BB962C8B-B14F-4D97-AF65-F5344CB8AC3E}">
+        <p14:creationId xmlns:p14="http://schemas.microsoft.com/office/powerpoint/2010/main" val="3614625065"/>
+      </p:ext>
+    </p:extLst>
+  </p:cSld>
+  <p:clrMapOvr>
+    <a:masterClrMapping/>
+  </p:clrMapOvr>
+</p:sld>
+</file>
+
+<file path=ppt/slides/slide7.xml><?xml version="1.0" encoding="utf-8"?>
+<p:sld xmlns:a="http://schemas.openxmlformats.org/drawingml/2006/main" xmlns:r="http://schemas.openxmlformats.org/officeDocument/2006/relationships" xmlns:p="http://schemas.openxmlformats.org/presentationml/2006/main">
+  <p:cSld>
+    <p:spTree>
+      <p:nvGrpSpPr>
+        <p:cNvPr id="1" name="">
+          <a:extLst>
+            <a:ext uri="{FF2B5EF4-FFF2-40B4-BE49-F238E27FC236}">
+              <a16:creationId xmlns:a16="http://schemas.microsoft.com/office/drawing/2014/main" id="{D9EB46B5-8E8C-80F3-DDCD-01839778E477}"/>
+            </a:ext>
+          </a:extLst>
+        </p:cNvPr>
+        <p:cNvGrpSpPr/>
+        <p:nvPr/>
+      </p:nvGrpSpPr>
+      <p:grpSpPr>
+        <a:xfrm>
+          <a:off x="0" y="0"/>
+          <a:ext cx="0" cy="0"/>
+          <a:chOff x="0" y="0"/>
+          <a:chExt cx="0" cy="0"/>
+        </a:xfrm>
+      </p:grpSpPr>
+      <p:sp>
+        <p:nvSpPr>
+          <p:cNvPr id="2" name="Title 1">
+            <a:extLst>
+              <a:ext uri="{FF2B5EF4-FFF2-40B4-BE49-F238E27FC236}">
+                <a16:creationId xmlns:a16="http://schemas.microsoft.com/office/drawing/2014/main" id="{9DE6C09F-7785-7CF4-A2CD-610FEBF0316B}"/>
+              </a:ext>
+            </a:extLst>
+          </p:cNvPr>
+          <p:cNvSpPr>
+            <a:spLocks noGrp="1"/>
+          </p:cNvSpPr>
+          <p:nvPr>
+            <p:ph type="title"/>
+          </p:nvPr>
+        </p:nvSpPr>
+        <p:spPr/>
+        <p:txBody>
+          <a:bodyPr/>
+          <a:lstStyle/>
+          <a:p>
+            <a:r>
+              <a:rPr lang="en-GB" dirty="0"/>
+              <a:t>Retrieval Augmented Generation</a:t>
+            </a:r>
+          </a:p>
+        </p:txBody>
+      </p:sp>
+      <p:sp>
+        <p:nvSpPr>
+          <p:cNvPr id="3" name="Content Placeholder 2">
+            <a:extLst>
+              <a:ext uri="{FF2B5EF4-FFF2-40B4-BE49-F238E27FC236}">
+                <a16:creationId xmlns:a16="http://schemas.microsoft.com/office/drawing/2014/main" id="{A6EBC4D8-8DCE-0F46-D95A-92A4BFCEAFB8}"/>
+              </a:ext>
+            </a:extLst>
+          </p:cNvPr>
+          <p:cNvSpPr>
+            <a:spLocks noGrp="1"/>
+          </p:cNvSpPr>
+          <p:nvPr>
+            <p:ph idx="1"/>
+          </p:nvPr>
+        </p:nvSpPr>
+        <p:spPr/>
+        <p:txBody>
+          <a:bodyPr vert="horz" lIns="91440" tIns="45720" rIns="91440" bIns="45720" rtlCol="0" anchor="t">
+            <a:normAutofit/>
+          </a:bodyPr>
+          <a:lstStyle/>
+          <a:p>
+            <a:pPr>
+              <a:buNone/>
+            </a:pPr>
+            <a:endParaRPr lang="en-GB" sz="1800" dirty="0">
+              <a:solidFill>
+                <a:srgbClr val="0B7743"/>
+              </a:solidFill>
+              <a:latin typeface="Source Code Pro"/>
+              <a:ea typeface="Source Code Pro"/>
+            </a:endParaRPr>
+          </a:p>
+          <a:p>
+            <a:pPr>
+              <a:buNone/>
+            </a:pPr>
+            <a:endParaRPr lang="en-GB" sz="1800" dirty="0">
+              <a:solidFill>
+                <a:srgbClr val="0B7743"/>
+              </a:solidFill>
+              <a:latin typeface="Source Code Pro"/>
+              <a:ea typeface="Source Code Pro"/>
+            </a:endParaRPr>
+          </a:p>
+          <a:p>
+            <a:pPr>
+              <a:buNone/>
+            </a:pPr>
+            <a:r>
+              <a:rPr lang="en-GB" sz="1800" dirty="0">
+                <a:solidFill>
+                  <a:srgbClr val="0B7743"/>
+                </a:solidFill>
+                <a:latin typeface="Source Code Pro"/>
+                <a:ea typeface="Source Code Pro"/>
+              </a:rPr>
+              <a:t>‘system’</a:t>
+            </a:r>
+            <a:r>
+              <a:rPr lang="en-GB" sz="1800" dirty="0">
+                <a:solidFill>
+                  <a:srgbClr val="666666"/>
+                </a:solidFill>
+                <a:latin typeface="Source Code Pro"/>
+                <a:ea typeface="Source Code Pro"/>
+              </a:rPr>
+              <a:t>    : </a:t>
+            </a:r>
+            <a:r>
+              <a:rPr lang="en-GB" sz="1800" dirty="0">
+                <a:solidFill>
+                  <a:srgbClr val="9325A5"/>
+                </a:solidFill>
+                <a:latin typeface="Source Code Pro"/>
+                <a:ea typeface="Source Code Pro"/>
+              </a:rPr>
+              <a:t>“You are an expert in baking.”</a:t>
+            </a:r>
+            <a:endParaRPr lang="en-GB"/>
+          </a:p>
+          <a:p>
+            <a:pPr>
+              <a:buNone/>
+            </a:pPr>
+            <a:r>
+              <a:rPr lang="en-GB" sz="1800" dirty="0">
+                <a:solidFill>
+                  <a:srgbClr val="0B7743"/>
+                </a:solidFill>
+                <a:latin typeface="Source Code Pro"/>
+                <a:ea typeface="Source Code Pro"/>
+              </a:rPr>
+              <a:t>‘knowledge’</a:t>
+            </a:r>
+            <a:r>
+              <a:rPr lang="en-GB" sz="1800" dirty="0">
+                <a:solidFill>
+                  <a:srgbClr val="666666"/>
+                </a:solidFill>
+                <a:latin typeface="Source Code Pro"/>
+                <a:ea typeface="Source Code Pro"/>
+              </a:rPr>
+              <a:t> : </a:t>
+            </a:r>
+            <a:r>
+              <a:rPr lang="en-GB" sz="1800" dirty="0">
+                <a:solidFill>
+                  <a:srgbClr val="9325A5"/>
+                </a:solidFill>
+                <a:latin typeface="Source Code Pro"/>
+                <a:ea typeface="Source Code Pro"/>
+              </a:rPr>
+              <a:t>“Recipe 1, Recipe 2, … Recipe 1000”</a:t>
+            </a:r>
+            <a:endParaRPr lang="en-GB" dirty="0"/>
+          </a:p>
+          <a:p>
+            <a:pPr>
+              <a:buNone/>
+            </a:pPr>
+            <a:r>
+              <a:rPr lang="en-GB" sz="1800" dirty="0">
+                <a:solidFill>
+                  <a:srgbClr val="0B7743"/>
+                </a:solidFill>
+                <a:latin typeface="Source Code Pro"/>
+                <a:ea typeface="Source Code Pro"/>
+              </a:rPr>
+              <a:t>‘user’</a:t>
+            </a:r>
+            <a:r>
+              <a:rPr lang="en-GB" sz="1800" dirty="0">
+                <a:solidFill>
+                  <a:srgbClr val="666666"/>
+                </a:solidFill>
+                <a:latin typeface="Source Code Pro"/>
+                <a:ea typeface="Source Code Pro"/>
+              </a:rPr>
+              <a:t>      : </a:t>
+            </a:r>
+            <a:r>
+              <a:rPr lang="en-GB" sz="1800" dirty="0">
+                <a:solidFill>
+                  <a:srgbClr val="9325A5"/>
+                </a:solidFill>
+                <a:latin typeface="Source Code Pro"/>
+                <a:ea typeface="Source Code Pro"/>
+              </a:rPr>
+              <a:t>“Provide me a recipe for macarons.”</a:t>
+            </a:r>
+            <a:endParaRPr lang="en-GB"/>
+          </a:p>
+          <a:p>
+            <a:pPr marL="0" indent="0">
+              <a:buNone/>
+            </a:pPr>
+            <a:r>
+              <a:rPr lang="en-GB" sz="1800" dirty="0">
+                <a:solidFill>
+                  <a:srgbClr val="0B7743"/>
+                </a:solidFill>
+                <a:latin typeface="Source Code Pro"/>
+                <a:ea typeface="Source Code Pro"/>
+              </a:rPr>
+              <a:t>‘assistant’</a:t>
+            </a:r>
+            <a:r>
+              <a:rPr lang="en-GB" sz="1800" dirty="0">
+                <a:solidFill>
+                  <a:srgbClr val="666666"/>
+                </a:solidFill>
+                <a:latin typeface="Source Code Pro"/>
+                <a:ea typeface="Source Code Pro"/>
+              </a:rPr>
+              <a:t> : </a:t>
+            </a:r>
+            <a:r>
+              <a:rPr lang="en-GB" sz="1800" dirty="0">
+                <a:solidFill>
+                  <a:srgbClr val="9325A5"/>
+                </a:solidFill>
+                <a:latin typeface="Source Code Pro"/>
+                <a:ea typeface="Source Code Pro"/>
+              </a:rPr>
+              <a:t>“Certainly! Here is a recipe for macarons …”</a:t>
+            </a:r>
+            <a:endParaRPr lang="en-GB" dirty="0"/>
+          </a:p>
+        </p:txBody>
+      </p:sp>
+    </p:spTree>
+    <p:extLst>
+      <p:ext uri="{BB962C8B-B14F-4D97-AF65-F5344CB8AC3E}">
+        <p14:creationId xmlns:p14="http://schemas.microsoft.com/office/powerpoint/2010/main" val="1300834096"/>
+      </p:ext>
+    </p:extLst>
+  </p:cSld>
+  <p:clrMapOvr>
+    <a:masterClrMapping/>
+  </p:clrMapOvr>
+</p:sld>
+</file>
+
+<file path=ppt/slides/slide8.xml><?xml version="1.0" encoding="utf-8"?>
+<p:sld xmlns:a="http://schemas.openxmlformats.org/drawingml/2006/main" xmlns:r="http://schemas.openxmlformats.org/officeDocument/2006/relationships" xmlns:p="http://schemas.openxmlformats.org/presentationml/2006/main">
+  <p:cSld>
+    <p:spTree>
+      <p:nvGrpSpPr>
+        <p:cNvPr id="1" name="">
+          <a:extLst>
+            <a:ext uri="{FF2B5EF4-FFF2-40B4-BE49-F238E27FC236}">
+              <a16:creationId xmlns:a16="http://schemas.microsoft.com/office/drawing/2014/main" id="{B7606A0E-A2E0-97D3-91DC-A3F6BB85A147}"/>
+            </a:ext>
+          </a:extLst>
+        </p:cNvPr>
+        <p:cNvGrpSpPr/>
+        <p:nvPr/>
+      </p:nvGrpSpPr>
+      <p:grpSpPr>
+        <a:xfrm>
+          <a:off x="0" y="0"/>
+          <a:ext cx="0" cy="0"/>
+          <a:chOff x="0" y="0"/>
+          <a:chExt cx="0" cy="0"/>
+        </a:xfrm>
+      </p:grpSpPr>
+      <p:sp>
+        <p:nvSpPr>
+          <p:cNvPr id="5" name="Oval 4">
+            <a:extLst>
+              <a:ext uri="{FF2B5EF4-FFF2-40B4-BE49-F238E27FC236}">
+                <a16:creationId xmlns:a16="http://schemas.microsoft.com/office/drawing/2014/main" id="{16C9448F-C867-8A29-B3F7-1D1BF3E5705D}"/>
+              </a:ext>
+            </a:extLst>
+          </p:cNvPr>
+          <p:cNvSpPr/>
+          <p:nvPr/>
+        </p:nvSpPr>
+        <p:spPr>
+          <a:xfrm rot="1680000">
+            <a:off x="8014413" y="4438111"/>
+            <a:ext cx="723893" cy="1120287"/>
+          </a:xfrm>
+          <a:custGeom>
+            <a:avLst/>
+            <a:gdLst>
+              <a:gd name="csX0" fmla="*/ 0 w 723893"/>
+              <a:gd name="csY0" fmla="*/ 560144 h 1120287"/>
+              <a:gd name="csX1" fmla="*/ 361947 w 723893"/>
+              <a:gd name="csY1" fmla="*/ 0 h 1120287"/>
+              <a:gd name="csX2" fmla="*/ 723894 w 723893"/>
+              <a:gd name="csY2" fmla="*/ 560144 h 1120287"/>
+              <a:gd name="csX3" fmla="*/ 361947 w 723893"/>
+              <a:gd name="csY3" fmla="*/ 1120288 h 1120287"/>
+              <a:gd name="csX4" fmla="*/ 0 w 723893"/>
+              <a:gd name="csY4" fmla="*/ 560144 h 1120287"/>
+            </a:gdLst>
+            <a:ahLst/>
+            <a:cxnLst>
+              <a:cxn ang="0">
+                <a:pos x="csX0" y="csY0"/>
+              </a:cxn>
+              <a:cxn ang="0">
+                <a:pos x="csX1" y="csY1"/>
+              </a:cxn>
+              <a:cxn ang="0">
+                <a:pos x="csX2" y="csY2"/>
+              </a:cxn>
+              <a:cxn ang="0">
+                <a:pos x="csX3" y="csY3"/>
+              </a:cxn>
+              <a:cxn ang="0">
+                <a:pos x="csX4" y="csY4"/>
+              </a:cxn>
+            </a:cxnLst>
+            <a:rect l="l" t="t" r="r" b="b"/>
+            <a:pathLst>
+              <a:path w="723893" h="1120287" fill="none" extrusionOk="0">
+                <a:moveTo>
+                  <a:pt x="0" y="560144"/>
+                </a:moveTo>
+                <a:cubicBezTo>
+                  <a:pt x="-4275" y="218006"/>
+                  <a:pt x="161241" y="6306"/>
+                  <a:pt x="361947" y="0"/>
+                </a:cubicBezTo>
+                <a:cubicBezTo>
+                  <a:pt x="545784" y="-28608"/>
+                  <a:pt x="747236" y="289015"/>
+                  <a:pt x="723894" y="560144"/>
+                </a:cubicBezTo>
+                <a:cubicBezTo>
+                  <a:pt x="742226" y="903357"/>
+                  <a:pt x="557931" y="1110911"/>
+                  <a:pt x="361947" y="1120288"/>
+                </a:cubicBezTo>
+                <a:cubicBezTo>
+                  <a:pt x="135482" y="1116640"/>
+                  <a:pt x="-30271" y="877625"/>
+                  <a:pt x="0" y="560144"/>
+                </a:cubicBezTo>
+                <a:close/>
+              </a:path>
+              <a:path w="723893" h="1120287" stroke="0" extrusionOk="0">
+                <a:moveTo>
+                  <a:pt x="0" y="560144"/>
+                </a:moveTo>
+                <a:cubicBezTo>
+                  <a:pt x="-1766" y="230629"/>
+                  <a:pt x="125361" y="-31262"/>
+                  <a:pt x="361947" y="0"/>
+                </a:cubicBezTo>
+                <a:cubicBezTo>
+                  <a:pt x="567197" y="-19255"/>
+                  <a:pt x="706624" y="228558"/>
+                  <a:pt x="723894" y="560144"/>
+                </a:cubicBezTo>
+                <a:cubicBezTo>
+                  <a:pt x="715492" y="892647"/>
+                  <a:pt x="600618" y="1110536"/>
+                  <a:pt x="361947" y="1120288"/>
+                </a:cubicBezTo>
+                <a:cubicBezTo>
+                  <a:pt x="202916" y="1070941"/>
+                  <a:pt x="-30498" y="849575"/>
+                  <a:pt x="0" y="560144"/>
+                </a:cubicBezTo>
+                <a:close/>
+              </a:path>
+            </a:pathLst>
+          </a:custGeom>
+          <a:solidFill>
+            <a:schemeClr val="accent2">
+              <a:lumMod val="20000"/>
+              <a:lumOff val="80000"/>
+            </a:schemeClr>
+          </a:solidFill>
+          <a:ln w="28575">
+            <a:solidFill>
+              <a:srgbClr val="C00000"/>
+            </a:solidFill>
+            <a:prstDash val="dash"/>
+            <a:extLst>
+              <a:ext uri="{C807C97D-BFC1-408E-A445-0C87EB9F89A2}">
+                <ask:lineSketchStyleProps xmlns:ask="http://schemas.microsoft.com/office/drawing/2018/sketchyshapes" sd="726005481">
+                  <a:prstGeom prst="ellipse">
+                    <a:avLst/>
+                  </a:prstGeom>
+                  <ask:type>
+                    <ask:lineSketchFreehand/>
+                  </ask:type>
+                </ask:lineSketchStyleProps>
+              </a:ext>
+            </a:extLst>
+          </a:ln>
+        </p:spPr>
+        <p:style>
+          <a:lnRef idx="2">
+            <a:schemeClr val="accent1">
+              <a:shade val="15000"/>
+            </a:schemeClr>
+          </a:lnRef>
+          <a:fillRef idx="1">
+            <a:schemeClr val="accent1"/>
+          </a:fillRef>
+          <a:effectRef idx="0">
+            <a:schemeClr val="accent1"/>
+          </a:effectRef>
+          <a:fontRef idx="minor">
+            <a:schemeClr val="lt1"/>
+          </a:fontRef>
+        </p:style>
+        <p:txBody>
+          <a:bodyPr rtlCol="0" anchor="ctr"/>
+          <a:lstStyle/>
+          <a:p>
+            <a:pPr algn="ctr"/>
+            <a:endParaRPr lang="en-GB"/>
+          </a:p>
+        </p:txBody>
+      </p:sp>
+      <p:sp>
+        <p:nvSpPr>
+          <p:cNvPr id="4" name="Oval 3">
+            <a:extLst>
+              <a:ext uri="{FF2B5EF4-FFF2-40B4-BE49-F238E27FC236}">
+                <a16:creationId xmlns:a16="http://schemas.microsoft.com/office/drawing/2014/main" id="{BA74D062-1FE6-92DF-D3BD-E6ECC325FD79}"/>
+              </a:ext>
+            </a:extLst>
+          </p:cNvPr>
+          <p:cNvSpPr/>
+          <p:nvPr/>
+        </p:nvSpPr>
+        <p:spPr>
+          <a:xfrm rot="-2040000">
+            <a:off x="7249675" y="2714395"/>
+            <a:ext cx="670289" cy="1432288"/>
+          </a:xfrm>
+          <a:custGeom>
+            <a:avLst/>
+            <a:gdLst>
+              <a:gd name="csX0" fmla="*/ 0 w 670289"/>
+              <a:gd name="csY0" fmla="*/ 716144 h 1432288"/>
+              <a:gd name="csX1" fmla="*/ 335145 w 670289"/>
+              <a:gd name="csY1" fmla="*/ 0 h 1432288"/>
+              <a:gd name="csX2" fmla="*/ 670290 w 670289"/>
+              <a:gd name="csY2" fmla="*/ 716144 h 1432288"/>
+              <a:gd name="csX3" fmla="*/ 335145 w 670289"/>
+              <a:gd name="csY3" fmla="*/ 1432288 h 1432288"/>
+              <a:gd name="csX4" fmla="*/ 0 w 670289"/>
+              <a:gd name="csY4" fmla="*/ 716144 h 1432288"/>
+            </a:gdLst>
+            <a:ahLst/>
+            <a:cxnLst>
+              <a:cxn ang="0">
+                <a:pos x="csX0" y="csY0"/>
+              </a:cxn>
+              <a:cxn ang="0">
+                <a:pos x="csX1" y="csY1"/>
+              </a:cxn>
+              <a:cxn ang="0">
+                <a:pos x="csX2" y="csY2"/>
+              </a:cxn>
+              <a:cxn ang="0">
+                <a:pos x="csX3" y="csY3"/>
+              </a:cxn>
+              <a:cxn ang="0">
+                <a:pos x="csX4" y="csY4"/>
+              </a:cxn>
+            </a:cxnLst>
+            <a:rect l="l" t="t" r="r" b="b"/>
+            <a:pathLst>
+              <a:path w="670289" h="1432288" fill="none" extrusionOk="0">
+                <a:moveTo>
+                  <a:pt x="0" y="716144"/>
+                </a:moveTo>
+                <a:cubicBezTo>
+                  <a:pt x="-4909" y="282989"/>
+                  <a:pt x="149451" y="4671"/>
+                  <a:pt x="335145" y="0"/>
+                </a:cubicBezTo>
+                <a:cubicBezTo>
+                  <a:pt x="479156" y="-73179"/>
+                  <a:pt x="715206" y="394194"/>
+                  <a:pt x="670290" y="716144"/>
+                </a:cubicBezTo>
+                <a:cubicBezTo>
+                  <a:pt x="676417" y="1122974"/>
+                  <a:pt x="509915" y="1407553"/>
+                  <a:pt x="335145" y="1432288"/>
+                </a:cubicBezTo>
+                <a:cubicBezTo>
+                  <a:pt x="137397" y="1430551"/>
+                  <a:pt x="-44516" y="1123603"/>
+                  <a:pt x="0" y="716144"/>
+                </a:cubicBezTo>
+                <a:close/>
+              </a:path>
+              <a:path w="670289" h="1432288" stroke="0" extrusionOk="0">
+                <a:moveTo>
+                  <a:pt x="0" y="716144"/>
+                </a:moveTo>
+                <a:cubicBezTo>
+                  <a:pt x="-1593" y="302446"/>
+                  <a:pt x="130692" y="-16495"/>
+                  <a:pt x="335145" y="0"/>
+                </a:cubicBezTo>
+                <a:cubicBezTo>
+                  <a:pt x="536846" y="-59747"/>
+                  <a:pt x="621202" y="257453"/>
+                  <a:pt x="670290" y="716144"/>
+                </a:cubicBezTo>
+                <a:cubicBezTo>
+                  <a:pt x="657248" y="1147583"/>
+                  <a:pt x="535028" y="1428569"/>
+                  <a:pt x="335145" y="1432288"/>
+                </a:cubicBezTo>
+                <a:cubicBezTo>
+                  <a:pt x="177178" y="1399531"/>
+                  <a:pt x="-42805" y="1083690"/>
+                  <a:pt x="0" y="716144"/>
+                </a:cubicBezTo>
+                <a:close/>
+              </a:path>
+            </a:pathLst>
+          </a:custGeom>
+          <a:solidFill>
+            <a:schemeClr val="tx2">
+              <a:lumMod val="10000"/>
+              <a:lumOff val="90000"/>
+            </a:schemeClr>
+          </a:solidFill>
+          <a:ln w="28575">
+            <a:prstDash val="dash"/>
+            <a:extLst>
+              <a:ext uri="{C807C97D-BFC1-408E-A445-0C87EB9F89A2}">
+                <ask:lineSketchStyleProps xmlns:ask="http://schemas.microsoft.com/office/drawing/2018/sketchyshapes" sd="726005481">
+                  <a:prstGeom prst="ellipse">
+                    <a:avLst/>
+                  </a:prstGeom>
+                  <ask:type>
+                    <ask:lineSketchFreehand/>
+                  </ask:type>
+                </ask:lineSketchStyleProps>
+              </a:ext>
+            </a:extLst>
+          </a:ln>
+        </p:spPr>
+        <p:style>
+          <a:lnRef idx="2">
+            <a:schemeClr val="accent1">
+              <a:shade val="15000"/>
+            </a:schemeClr>
+          </a:lnRef>
+          <a:fillRef idx="1">
+            <a:schemeClr val="accent1"/>
+          </a:fillRef>
+          <a:effectRef idx="0">
+            <a:schemeClr val="accent1"/>
+          </a:effectRef>
+          <a:fontRef idx="minor">
+            <a:schemeClr val="lt1"/>
+          </a:fontRef>
+        </p:style>
+        <p:txBody>
+          <a:bodyPr rtlCol="0" anchor="ctr"/>
+          <a:lstStyle/>
+          <a:p>
+            <a:pPr algn="ctr"/>
+            <a:endParaRPr lang="en-GB"/>
+          </a:p>
+        </p:txBody>
+      </p:sp>
+      <p:sp>
+        <p:nvSpPr>
+          <p:cNvPr id="2" name="Title 1">
+            <a:extLst>
+              <a:ext uri="{FF2B5EF4-FFF2-40B4-BE49-F238E27FC236}">
+                <a16:creationId xmlns:a16="http://schemas.microsoft.com/office/drawing/2014/main" id="{A2BF1E60-03A5-E1A8-FBAA-FC4213825409}"/>
+              </a:ext>
+            </a:extLst>
+          </p:cNvPr>
+          <p:cNvSpPr>
+            <a:spLocks noGrp="1"/>
+          </p:cNvSpPr>
+          <p:nvPr>
+            <p:ph type="title"/>
+          </p:nvPr>
+        </p:nvSpPr>
+        <p:spPr/>
+        <p:txBody>
+          <a:bodyPr/>
+          <a:lstStyle/>
+          <a:p>
+            <a:r>
+              <a:rPr lang="en-GB" dirty="0"/>
+              <a:t>Back to Vectors</a:t>
+            </a:r>
+          </a:p>
+        </p:txBody>
+      </p:sp>
+      <p:sp>
+        <p:nvSpPr>
+          <p:cNvPr id="3" name="Content Placeholder 2">
+            <a:extLst>
+              <a:ext uri="{FF2B5EF4-FFF2-40B4-BE49-F238E27FC236}">
+                <a16:creationId xmlns:a16="http://schemas.microsoft.com/office/drawing/2014/main" id="{B9FA9FBE-45F7-53A0-E885-B88F844166BA}"/>
+              </a:ext>
+            </a:extLst>
+          </p:cNvPr>
+          <p:cNvSpPr>
+            <a:spLocks noGrp="1"/>
+          </p:cNvSpPr>
+          <p:nvPr>
+            <p:ph idx="1"/>
+          </p:nvPr>
+        </p:nvSpPr>
+        <p:spPr>
+          <a:xfrm>
+            <a:off x="838200" y="1825625"/>
+            <a:ext cx="4868636" cy="4351338"/>
+          </a:xfrm>
+        </p:spPr>
+        <p:txBody>
+          <a:bodyPr vert="horz" lIns="91440" tIns="45720" rIns="91440" bIns="45720" rtlCol="0" anchor="t">
+            <a:normAutofit/>
+          </a:bodyPr>
+          <a:lstStyle/>
+          <a:p>
+            <a:pPr marL="0" indent="0">
+              <a:buNone/>
+            </a:pPr>
+            <a:endParaRPr lang="en-GB" dirty="0"/>
+          </a:p>
+          <a:p>
+            <a:pPr marL="0" indent="0">
+              <a:buNone/>
+            </a:pPr>
+            <a:endParaRPr lang="en-GB" dirty="0"/>
+          </a:p>
+          <a:p>
+            <a:pPr marL="0" indent="0">
+              <a:buNone/>
+            </a:pPr>
+            <a:endParaRPr lang="en-GB" dirty="0"/>
+          </a:p>
+          <a:p>
+            <a:pPr marL="0" indent="0">
+              <a:buNone/>
+            </a:pPr>
+            <a:r>
+              <a:rPr lang="en-GB" dirty="0"/>
+              <a:t>Wouldn't it be nice if we vectorize our recipes...?</a:t>
+            </a:r>
+          </a:p>
+        </p:txBody>
+      </p:sp>
+      <p:cxnSp>
+        <p:nvCxnSpPr>
+          <p:cNvPr id="8" name="Google Shape;103;p16">
+            <a:extLst>
+              <a:ext uri="{FF2B5EF4-FFF2-40B4-BE49-F238E27FC236}">
+                <a16:creationId xmlns:a16="http://schemas.microsoft.com/office/drawing/2014/main" id="{D18BF232-B32E-9CC0-1082-6F54661EF8B8}"/>
+              </a:ext>
+            </a:extLst>
+          </p:cNvPr>
+          <p:cNvCxnSpPr/>
+          <p:nvPr/>
+        </p:nvCxnSpPr>
+        <p:spPr>
+          <a:xfrm rot="10800000">
+            <a:off x="6558676" y="1309400"/>
+            <a:ext cx="0" cy="4422426"/>
+          </a:xfrm>
+          <a:prstGeom prst="straightConnector1">
+            <a:avLst/>
+          </a:prstGeom>
+          <a:noFill/>
+          <a:ln w="28575" cap="flat" cmpd="sng">
+            <a:solidFill>
+              <a:schemeClr val="dk2"/>
+            </a:solidFill>
+            <a:prstDash val="solid"/>
+            <a:round/>
+            <a:headEnd type="none" w="med" len="med"/>
+            <a:tailEnd type="triangle" w="med" len="med"/>
+          </a:ln>
+        </p:spPr>
+      </p:cxnSp>
+      <p:sp>
+        <p:nvSpPr>
+          <p:cNvPr id="9" name="Google Shape;105;p16">
+            <a:extLst>
+              <a:ext uri="{FF2B5EF4-FFF2-40B4-BE49-F238E27FC236}">
+                <a16:creationId xmlns:a16="http://schemas.microsoft.com/office/drawing/2014/main" id="{D48CA7B3-2A6C-3070-F1A7-2FB90B311B4B}"/>
+              </a:ext>
+            </a:extLst>
+          </p:cNvPr>
+          <p:cNvSpPr txBox="1"/>
+          <p:nvPr/>
+        </p:nvSpPr>
+        <p:spPr>
+          <a:xfrm>
+            <a:off x="11011276" y="5548849"/>
+            <a:ext cx="314700" cy="274428"/>
+          </a:xfrm>
+          <a:prstGeom prst="rect">
+            <a:avLst/>
+          </a:prstGeom>
+          <a:noFill/>
+          <a:ln>
+            <a:noFill/>
+          </a:ln>
+        </p:spPr>
+        <p:txBody>
+          <a:bodyPr spcFirstLastPara="1" wrap="square" lIns="121900" tIns="121900" rIns="121900" bIns="121900" anchor="t" anchorCtr="0">
+            <a:noAutofit/>
+          </a:bodyPr>
+          <a:lstStyle>
+            <a:defPPr marR="0" lvl="0" algn="l" rtl="0">
+              <a:lnSpc>
+                <a:spcPct val="100000"/>
+              </a:lnSpc>
+              <a:spcBef>
+                <a:spcPts val="0"/>
+              </a:spcBef>
+              <a:spcAft>
+                <a:spcPts val="0"/>
+              </a:spcAft>
+            </a:defPPr>
+            <a:lvl1pPr marR="0" lvl="0" algn="l" rtl="0">
+              <a:lnSpc>
+                <a:spcPct val="100000"/>
+              </a:lnSpc>
+              <a:spcBef>
+                <a:spcPts val="0"/>
+              </a:spcBef>
+              <a:spcAft>
+                <a:spcPts val="0"/>
+              </a:spcAft>
+              <a:buClr>
+                <a:srgbClr val="000000"/>
+              </a:buClr>
+              <a:buFont typeface="Arial"/>
+              <a:defRPr sz="1867" b="0" i="0" u="none" strike="noStrike" cap="none">
+                <a:solidFill>
+                  <a:srgbClr val="000000"/>
+                </a:solidFill>
+                <a:latin typeface="Arial"/>
+                <a:ea typeface="Arial"/>
+                <a:cs typeface="Arial"/>
+                <a:sym typeface="Arial"/>
+              </a:defRPr>
+            </a:lvl1pPr>
+            <a:lvl2pPr marR="0" lvl="1" algn="l" rtl="0">
+              <a:lnSpc>
+                <a:spcPct val="100000"/>
+              </a:lnSpc>
+              <a:spcBef>
+                <a:spcPts val="0"/>
+              </a:spcBef>
+              <a:spcAft>
+                <a:spcPts val="0"/>
+              </a:spcAft>
+              <a:buClr>
+                <a:srgbClr val="000000"/>
+              </a:buClr>
+              <a:buFont typeface="Arial"/>
+              <a:defRPr sz="1867" b="0" i="0" u="none" strike="noStrike" cap="none">
+                <a:solidFill>
+                  <a:srgbClr val="000000"/>
+                </a:solidFill>
+                <a:latin typeface="Arial"/>
+                <a:ea typeface="Arial"/>
+                <a:cs typeface="Arial"/>
+                <a:sym typeface="Arial"/>
+              </a:defRPr>
+            </a:lvl2pPr>
+            <a:lvl3pPr marR="0" lvl="2" algn="l" rtl="0">
+              <a:lnSpc>
+                <a:spcPct val="100000"/>
+              </a:lnSpc>
+              <a:spcBef>
+                <a:spcPts val="0"/>
+              </a:spcBef>
+              <a:spcAft>
+                <a:spcPts val="0"/>
+              </a:spcAft>
+              <a:buClr>
+                <a:srgbClr val="000000"/>
+              </a:buClr>
+              <a:buFont typeface="Arial"/>
+              <a:defRPr sz="1867" b="0" i="0" u="none" strike="noStrike" cap="none">
+                <a:solidFill>
+                  <a:srgbClr val="000000"/>
+                </a:solidFill>
+                <a:latin typeface="Arial"/>
+                <a:ea typeface="Arial"/>
+                <a:cs typeface="Arial"/>
+                <a:sym typeface="Arial"/>
+              </a:defRPr>
+            </a:lvl3pPr>
+            <a:lvl4pPr marR="0" lvl="3" algn="l" rtl="0">
+              <a:lnSpc>
+                <a:spcPct val="100000"/>
+              </a:lnSpc>
+              <a:spcBef>
+                <a:spcPts val="0"/>
+              </a:spcBef>
+              <a:spcAft>
+                <a:spcPts val="0"/>
+              </a:spcAft>
+              <a:buClr>
+                <a:srgbClr val="000000"/>
+              </a:buClr>
+              <a:buFont typeface="Arial"/>
+              <a:defRPr sz="1867" b="0" i="0" u="none" strike="noStrike" cap="none">
+                <a:solidFill>
+                  <a:srgbClr val="000000"/>
+                </a:solidFill>
+                <a:latin typeface="Arial"/>
+                <a:ea typeface="Arial"/>
+                <a:cs typeface="Arial"/>
+                <a:sym typeface="Arial"/>
+              </a:defRPr>
+            </a:lvl4pPr>
+            <a:lvl5pPr marR="0" lvl="4" algn="l" rtl="0">
+              <a:lnSpc>
+                <a:spcPct val="100000"/>
+              </a:lnSpc>
+              <a:spcBef>
+                <a:spcPts val="0"/>
+              </a:spcBef>
+              <a:spcAft>
+                <a:spcPts val="0"/>
+              </a:spcAft>
+              <a:buClr>
+                <a:srgbClr val="000000"/>
+              </a:buClr>
+              <a:buFont typeface="Arial"/>
+              <a:defRPr sz="1867" b="0" i="0" u="none" strike="noStrike" cap="none">
+                <a:solidFill>
+                  <a:srgbClr val="000000"/>
+                </a:solidFill>
+                <a:latin typeface="Arial"/>
+                <a:ea typeface="Arial"/>
+                <a:cs typeface="Arial"/>
+                <a:sym typeface="Arial"/>
+              </a:defRPr>
+            </a:lvl5pPr>
+            <a:lvl6pPr marR="0" lvl="5" algn="l" rtl="0">
+              <a:lnSpc>
+                <a:spcPct val="100000"/>
+              </a:lnSpc>
+              <a:spcBef>
+                <a:spcPts val="0"/>
+              </a:spcBef>
+              <a:spcAft>
+                <a:spcPts val="0"/>
+              </a:spcAft>
+              <a:buClr>
+                <a:srgbClr val="000000"/>
+              </a:buClr>
+              <a:buFont typeface="Arial"/>
+              <a:defRPr sz="1867" b="0" i="0" u="none" strike="noStrike" cap="none">
+                <a:solidFill>
+                  <a:srgbClr val="000000"/>
+                </a:solidFill>
+                <a:latin typeface="Arial"/>
+                <a:ea typeface="Arial"/>
+                <a:cs typeface="Arial"/>
+                <a:sym typeface="Arial"/>
+              </a:defRPr>
+            </a:lvl6pPr>
+            <a:lvl7pPr marR="0" lvl="6" algn="l" rtl="0">
+              <a:lnSpc>
+                <a:spcPct val="100000"/>
+              </a:lnSpc>
+              <a:spcBef>
+                <a:spcPts val="0"/>
+              </a:spcBef>
+              <a:spcAft>
+                <a:spcPts val="0"/>
+              </a:spcAft>
+              <a:buClr>
+                <a:srgbClr val="000000"/>
+              </a:buClr>
+              <a:buFont typeface="Arial"/>
+              <a:defRPr sz="1867" b="0" i="0" u="none" strike="noStrike" cap="none">
+                <a:solidFill>
+                  <a:srgbClr val="000000"/>
+                </a:solidFill>
+                <a:latin typeface="Arial"/>
+                <a:ea typeface="Arial"/>
+                <a:cs typeface="Arial"/>
+                <a:sym typeface="Arial"/>
+              </a:defRPr>
+            </a:lvl7pPr>
+            <a:lvl8pPr marR="0" lvl="7" algn="l" rtl="0">
+              <a:lnSpc>
+                <a:spcPct val="100000"/>
+              </a:lnSpc>
+              <a:spcBef>
+                <a:spcPts val="0"/>
+              </a:spcBef>
+              <a:spcAft>
+                <a:spcPts val="0"/>
+              </a:spcAft>
+              <a:buClr>
+                <a:srgbClr val="000000"/>
+              </a:buClr>
+              <a:buFont typeface="Arial"/>
+              <a:defRPr sz="1867" b="0" i="0" u="none" strike="noStrike" cap="none">
+                <a:solidFill>
+                  <a:srgbClr val="000000"/>
+                </a:solidFill>
+                <a:latin typeface="Arial"/>
+                <a:ea typeface="Arial"/>
+                <a:cs typeface="Arial"/>
+                <a:sym typeface="Arial"/>
+              </a:defRPr>
+            </a:lvl8pPr>
+            <a:lvl9pPr marR="0" lvl="8" algn="l" rtl="0">
+              <a:lnSpc>
+                <a:spcPct val="100000"/>
+              </a:lnSpc>
+              <a:spcBef>
+                <a:spcPts val="0"/>
+              </a:spcBef>
+              <a:spcAft>
+                <a:spcPts val="0"/>
+              </a:spcAft>
+              <a:buClr>
+                <a:srgbClr val="000000"/>
+              </a:buClr>
+              <a:buFont typeface="Arial"/>
+              <a:defRPr sz="1867" b="0" i="0" u="none" strike="noStrike" cap="none">
+                <a:solidFill>
+                  <a:srgbClr val="000000"/>
+                </a:solidFill>
+                <a:latin typeface="Arial"/>
+                <a:ea typeface="Arial"/>
+                <a:cs typeface="Arial"/>
+                <a:sym typeface="Arial"/>
+              </a:defRPr>
+            </a:lvl9pPr>
+          </a:lstStyle>
+          <a:p>
+            <a:pPr marL="0" lvl="0" indent="0" algn="l" rtl="0">
+              <a:spcBef>
+                <a:spcPts val="0"/>
+              </a:spcBef>
+              <a:spcAft>
+                <a:spcPts val="0"/>
+              </a:spcAft>
+              <a:buNone/>
+            </a:pPr>
+            <a:r>
+              <a:rPr lang="en-GB" sz="2400" i="1">
+                <a:solidFill>
+                  <a:schemeClr val="dk2"/>
+                </a:solidFill>
+                <a:latin typeface="Constantia"/>
+                <a:ea typeface="Roboto Serif"/>
+                <a:cs typeface="Roboto Serif"/>
+                <a:sym typeface="Roboto Serif"/>
+              </a:rPr>
+              <a:t>x</a:t>
+            </a:r>
+            <a:endParaRPr sz="2400" i="1">
+              <a:solidFill>
+                <a:schemeClr val="dk2"/>
+              </a:solidFill>
+              <a:latin typeface="Constantia"/>
+              <a:ea typeface="Roboto Serif"/>
+              <a:cs typeface="Roboto Serif"/>
+              <a:sym typeface="Roboto Serif"/>
+            </a:endParaRPr>
+          </a:p>
+        </p:txBody>
+      </p:sp>
+      <p:sp>
+        <p:nvSpPr>
+          <p:cNvPr id="10" name="Google Shape;106;p16">
+            <a:extLst>
+              <a:ext uri="{FF2B5EF4-FFF2-40B4-BE49-F238E27FC236}">
+                <a16:creationId xmlns:a16="http://schemas.microsoft.com/office/drawing/2014/main" id="{CD9A5DDD-0853-A42E-9CF0-D80BFAC0A201}"/>
+              </a:ext>
+            </a:extLst>
+          </p:cNvPr>
+          <p:cNvSpPr txBox="1"/>
+          <p:nvPr/>
+        </p:nvSpPr>
+        <p:spPr>
+          <a:xfrm>
+            <a:off x="6093083" y="1034972"/>
+            <a:ext cx="314700" cy="274428"/>
+          </a:xfrm>
+          <a:prstGeom prst="rect">
+            <a:avLst/>
+          </a:prstGeom>
+          <a:noFill/>
+          <a:ln>
+            <a:noFill/>
+          </a:ln>
+        </p:spPr>
+        <p:txBody>
+          <a:bodyPr spcFirstLastPara="1" wrap="square" lIns="121900" tIns="121900" rIns="121900" bIns="121900" anchor="t" anchorCtr="0">
+            <a:noAutofit/>
+          </a:bodyPr>
+          <a:lstStyle>
+            <a:defPPr marR="0" lvl="0" algn="l" rtl="0">
+              <a:lnSpc>
+                <a:spcPct val="100000"/>
+              </a:lnSpc>
+              <a:spcBef>
+                <a:spcPts val="0"/>
+              </a:spcBef>
+              <a:spcAft>
+                <a:spcPts val="0"/>
+              </a:spcAft>
+            </a:defPPr>
+            <a:lvl1pPr marR="0" lvl="0" algn="l" rtl="0">
+              <a:lnSpc>
+                <a:spcPct val="100000"/>
+              </a:lnSpc>
+              <a:spcBef>
+                <a:spcPts val="0"/>
+              </a:spcBef>
+              <a:spcAft>
+                <a:spcPts val="0"/>
+              </a:spcAft>
+              <a:buClr>
+                <a:srgbClr val="000000"/>
+              </a:buClr>
+              <a:buFont typeface="Arial"/>
+              <a:defRPr sz="1867" b="0" i="0" u="none" strike="noStrike" cap="none">
+                <a:solidFill>
+                  <a:srgbClr val="000000"/>
+                </a:solidFill>
+                <a:latin typeface="Arial"/>
+                <a:ea typeface="Arial"/>
+                <a:cs typeface="Arial"/>
+                <a:sym typeface="Arial"/>
+              </a:defRPr>
+            </a:lvl1pPr>
+            <a:lvl2pPr marR="0" lvl="1" algn="l" rtl="0">
+              <a:lnSpc>
+                <a:spcPct val="100000"/>
+              </a:lnSpc>
+              <a:spcBef>
+                <a:spcPts val="0"/>
+              </a:spcBef>
+              <a:spcAft>
+                <a:spcPts val="0"/>
+              </a:spcAft>
+              <a:buClr>
+                <a:srgbClr val="000000"/>
+              </a:buClr>
+              <a:buFont typeface="Arial"/>
+              <a:defRPr sz="1867" b="0" i="0" u="none" strike="noStrike" cap="none">
+                <a:solidFill>
+                  <a:srgbClr val="000000"/>
+                </a:solidFill>
+                <a:latin typeface="Arial"/>
+                <a:ea typeface="Arial"/>
+                <a:cs typeface="Arial"/>
+                <a:sym typeface="Arial"/>
+              </a:defRPr>
+            </a:lvl2pPr>
+            <a:lvl3pPr marR="0" lvl="2" algn="l" rtl="0">
+              <a:lnSpc>
+                <a:spcPct val="100000"/>
+              </a:lnSpc>
+              <a:spcBef>
+                <a:spcPts val="0"/>
+              </a:spcBef>
+              <a:spcAft>
+                <a:spcPts val="0"/>
+              </a:spcAft>
+              <a:buClr>
+                <a:srgbClr val="000000"/>
+              </a:buClr>
+              <a:buFont typeface="Arial"/>
+              <a:defRPr sz="1867" b="0" i="0" u="none" strike="noStrike" cap="none">
+                <a:solidFill>
+                  <a:srgbClr val="000000"/>
+                </a:solidFill>
+                <a:latin typeface="Arial"/>
+                <a:ea typeface="Arial"/>
+                <a:cs typeface="Arial"/>
+                <a:sym typeface="Arial"/>
+              </a:defRPr>
+            </a:lvl3pPr>
+            <a:lvl4pPr marR="0" lvl="3" algn="l" rtl="0">
+              <a:lnSpc>
+                <a:spcPct val="100000"/>
+              </a:lnSpc>
+              <a:spcBef>
+                <a:spcPts val="0"/>
+              </a:spcBef>
+              <a:spcAft>
+                <a:spcPts val="0"/>
+              </a:spcAft>
+              <a:buClr>
+                <a:srgbClr val="000000"/>
+              </a:buClr>
+              <a:buFont typeface="Arial"/>
+              <a:defRPr sz="1867" b="0" i="0" u="none" strike="noStrike" cap="none">
+                <a:solidFill>
+                  <a:srgbClr val="000000"/>
+                </a:solidFill>
+                <a:latin typeface="Arial"/>
+                <a:ea typeface="Arial"/>
+                <a:cs typeface="Arial"/>
+                <a:sym typeface="Arial"/>
+              </a:defRPr>
+            </a:lvl4pPr>
+            <a:lvl5pPr marR="0" lvl="4" algn="l" rtl="0">
+              <a:lnSpc>
+                <a:spcPct val="100000"/>
+              </a:lnSpc>
+              <a:spcBef>
+                <a:spcPts val="0"/>
+              </a:spcBef>
+              <a:spcAft>
+                <a:spcPts val="0"/>
+              </a:spcAft>
+              <a:buClr>
+                <a:srgbClr val="000000"/>
+              </a:buClr>
+              <a:buFont typeface="Arial"/>
+              <a:defRPr sz="1867" b="0" i="0" u="none" strike="noStrike" cap="none">
+                <a:solidFill>
+                  <a:srgbClr val="000000"/>
+                </a:solidFill>
+                <a:latin typeface="Arial"/>
+                <a:ea typeface="Arial"/>
+                <a:cs typeface="Arial"/>
+                <a:sym typeface="Arial"/>
+              </a:defRPr>
+            </a:lvl5pPr>
+            <a:lvl6pPr marR="0" lvl="5" algn="l" rtl="0">
+              <a:lnSpc>
+                <a:spcPct val="100000"/>
+              </a:lnSpc>
+              <a:spcBef>
+                <a:spcPts val="0"/>
+              </a:spcBef>
+              <a:spcAft>
+                <a:spcPts val="0"/>
+              </a:spcAft>
+              <a:buClr>
+                <a:srgbClr val="000000"/>
+              </a:buClr>
+              <a:buFont typeface="Arial"/>
+              <a:defRPr sz="1867" b="0" i="0" u="none" strike="noStrike" cap="none">
+                <a:solidFill>
+                  <a:srgbClr val="000000"/>
+                </a:solidFill>
+                <a:latin typeface="Arial"/>
+                <a:ea typeface="Arial"/>
+                <a:cs typeface="Arial"/>
+                <a:sym typeface="Arial"/>
+              </a:defRPr>
+            </a:lvl6pPr>
+            <a:lvl7pPr marR="0" lvl="6" algn="l" rtl="0">
+              <a:lnSpc>
+                <a:spcPct val="100000"/>
+              </a:lnSpc>
+              <a:spcBef>
+                <a:spcPts val="0"/>
+              </a:spcBef>
+              <a:spcAft>
+                <a:spcPts val="0"/>
+              </a:spcAft>
+              <a:buClr>
+                <a:srgbClr val="000000"/>
+              </a:buClr>
+              <a:buFont typeface="Arial"/>
+              <a:defRPr sz="1867" b="0" i="0" u="none" strike="noStrike" cap="none">
+                <a:solidFill>
+                  <a:srgbClr val="000000"/>
+                </a:solidFill>
+                <a:latin typeface="Arial"/>
+                <a:ea typeface="Arial"/>
+                <a:cs typeface="Arial"/>
+                <a:sym typeface="Arial"/>
+              </a:defRPr>
+            </a:lvl7pPr>
+            <a:lvl8pPr marR="0" lvl="7" algn="l" rtl="0">
+              <a:lnSpc>
+                <a:spcPct val="100000"/>
+              </a:lnSpc>
+              <a:spcBef>
+                <a:spcPts val="0"/>
+              </a:spcBef>
+              <a:spcAft>
+                <a:spcPts val="0"/>
+              </a:spcAft>
+              <a:buClr>
+                <a:srgbClr val="000000"/>
+              </a:buClr>
+              <a:buFont typeface="Arial"/>
+              <a:defRPr sz="1867" b="0" i="0" u="none" strike="noStrike" cap="none">
+                <a:solidFill>
+                  <a:srgbClr val="000000"/>
+                </a:solidFill>
+                <a:latin typeface="Arial"/>
+                <a:ea typeface="Arial"/>
+                <a:cs typeface="Arial"/>
+                <a:sym typeface="Arial"/>
+              </a:defRPr>
+            </a:lvl8pPr>
+            <a:lvl9pPr marR="0" lvl="8" algn="l" rtl="0">
+              <a:lnSpc>
+                <a:spcPct val="100000"/>
+              </a:lnSpc>
+              <a:spcBef>
+                <a:spcPts val="0"/>
+              </a:spcBef>
+              <a:spcAft>
+                <a:spcPts val="0"/>
+              </a:spcAft>
+              <a:buClr>
+                <a:srgbClr val="000000"/>
+              </a:buClr>
+              <a:buFont typeface="Arial"/>
+              <a:defRPr sz="1867" b="0" i="0" u="none" strike="noStrike" cap="none">
+                <a:solidFill>
+                  <a:srgbClr val="000000"/>
+                </a:solidFill>
+                <a:latin typeface="Arial"/>
+                <a:ea typeface="Arial"/>
+                <a:cs typeface="Arial"/>
+                <a:sym typeface="Arial"/>
+              </a:defRPr>
+            </a:lvl9pPr>
+          </a:lstStyle>
+          <a:p>
+            <a:pPr marL="0" lvl="0" indent="0" algn="l" rtl="0">
+              <a:spcBef>
+                <a:spcPts val="0"/>
+              </a:spcBef>
+              <a:spcAft>
+                <a:spcPts val="0"/>
+              </a:spcAft>
+              <a:buNone/>
+            </a:pPr>
+            <a:r>
+              <a:rPr lang="en-GB" sz="2400" i="1">
+                <a:solidFill>
+                  <a:schemeClr val="dk2"/>
+                </a:solidFill>
+                <a:latin typeface="Constantia"/>
+                <a:ea typeface="Roboto Serif"/>
+                <a:cs typeface="Roboto Serif"/>
+                <a:sym typeface="Roboto Serif"/>
+              </a:rPr>
+              <a:t>y</a:t>
+            </a:r>
+            <a:endParaRPr sz="2400" i="1">
+              <a:solidFill>
+                <a:schemeClr val="dk2"/>
+              </a:solidFill>
+              <a:latin typeface="Constantia"/>
+              <a:ea typeface="Roboto Serif"/>
+              <a:cs typeface="Roboto Serif"/>
+              <a:sym typeface="Roboto Serif"/>
+            </a:endParaRPr>
+          </a:p>
+        </p:txBody>
+      </p:sp>
+      <p:cxnSp>
+        <p:nvCxnSpPr>
+          <p:cNvPr id="11" name="Google Shape;107;p16">
+            <a:extLst>
+              <a:ext uri="{FF2B5EF4-FFF2-40B4-BE49-F238E27FC236}">
+                <a16:creationId xmlns:a16="http://schemas.microsoft.com/office/drawing/2014/main" id="{B44A7692-78D6-2188-F80A-265BF0C75BF3}"/>
+              </a:ext>
+            </a:extLst>
+          </p:cNvPr>
+          <p:cNvCxnSpPr/>
+          <p:nvPr/>
+        </p:nvCxnSpPr>
+        <p:spPr>
+          <a:xfrm rot="10800000" flipH="1">
+            <a:off x="6558676" y="3749451"/>
+            <a:ext cx="1412700" cy="1982375"/>
+          </a:xfrm>
+          <a:prstGeom prst="straightConnector1">
+            <a:avLst/>
+          </a:prstGeom>
+          <a:noFill/>
+          <a:ln w="28575" cap="flat" cmpd="sng">
+            <a:solidFill>
+              <a:schemeClr val="accent1"/>
+            </a:solidFill>
+            <a:prstDash val="solid"/>
+            <a:round/>
+            <a:headEnd type="none" w="med" len="med"/>
+            <a:tailEnd type="triangle" w="med" len="med"/>
+          </a:ln>
+        </p:spPr>
+      </p:cxnSp>
+      <p:cxnSp>
+        <p:nvCxnSpPr>
+          <p:cNvPr id="12" name="Google Shape;108;p16">
+            <a:extLst>
+              <a:ext uri="{FF2B5EF4-FFF2-40B4-BE49-F238E27FC236}">
+                <a16:creationId xmlns:a16="http://schemas.microsoft.com/office/drawing/2014/main" id="{F88CD167-94C8-49E3-0301-F340C14D3E46}"/>
+              </a:ext>
+            </a:extLst>
+          </p:cNvPr>
+          <p:cNvCxnSpPr/>
+          <p:nvPr/>
+        </p:nvCxnSpPr>
+        <p:spPr>
+          <a:xfrm rot="10800000" flipH="1">
+            <a:off x="6558676" y="4733041"/>
+            <a:ext cx="2164800" cy="998785"/>
+          </a:xfrm>
+          <a:prstGeom prst="straightConnector1">
+            <a:avLst/>
+          </a:prstGeom>
+          <a:noFill/>
+          <a:ln w="28575" cap="flat" cmpd="sng">
+            <a:solidFill>
+              <a:srgbClr val="980000"/>
+            </a:solidFill>
+            <a:prstDash val="solid"/>
+            <a:round/>
+            <a:headEnd type="none" w="med" len="med"/>
+            <a:tailEnd type="triangle" w="med" len="med"/>
+          </a:ln>
+        </p:spPr>
+      </p:cxnSp>
+      <p:sp>
+        <p:nvSpPr>
+          <p:cNvPr id="13" name="Google Shape;109;p16">
+            <a:extLst>
+              <a:ext uri="{FF2B5EF4-FFF2-40B4-BE49-F238E27FC236}">
+                <a16:creationId xmlns:a16="http://schemas.microsoft.com/office/drawing/2014/main" id="{246852EB-8D2A-EE56-D709-8F27103EEBEF}"/>
+              </a:ext>
+            </a:extLst>
+          </p:cNvPr>
+          <p:cNvSpPr txBox="1"/>
+          <p:nvPr/>
+        </p:nvSpPr>
+        <p:spPr>
+          <a:xfrm>
+            <a:off x="7987826" y="3432907"/>
+            <a:ext cx="2355122" cy="546788"/>
+          </a:xfrm>
+          <a:prstGeom prst="rect">
+            <a:avLst/>
+          </a:prstGeom>
+          <a:noFill/>
+          <a:ln>
+            <a:noFill/>
+          </a:ln>
+        </p:spPr>
+        <p:txBody>
+          <a:bodyPr spcFirstLastPara="1" wrap="square" lIns="121900" tIns="121900" rIns="121900" bIns="121900" anchor="t" anchorCtr="0">
+            <a:noAutofit/>
+          </a:bodyPr>
+          <a:lstStyle>
+            <a:defPPr marR="0" lvl="0" algn="l" rtl="0">
+              <a:lnSpc>
+                <a:spcPct val="100000"/>
+              </a:lnSpc>
+              <a:spcBef>
+                <a:spcPts val="0"/>
+              </a:spcBef>
+              <a:spcAft>
+                <a:spcPts val="0"/>
+              </a:spcAft>
+            </a:defPPr>
+            <a:lvl1pPr marR="0" lvl="0" algn="l" rtl="0">
+              <a:lnSpc>
+                <a:spcPct val="100000"/>
+              </a:lnSpc>
+              <a:spcBef>
+                <a:spcPts val="0"/>
+              </a:spcBef>
+              <a:spcAft>
+                <a:spcPts val="0"/>
+              </a:spcAft>
+              <a:buClr>
+                <a:srgbClr val="000000"/>
+              </a:buClr>
+              <a:buFont typeface="Arial"/>
+              <a:defRPr sz="1867" b="0" i="0" u="none" strike="noStrike" cap="none">
+                <a:solidFill>
+                  <a:srgbClr val="000000"/>
+                </a:solidFill>
+                <a:latin typeface="Arial"/>
+                <a:ea typeface="Arial"/>
+                <a:cs typeface="Arial"/>
+                <a:sym typeface="Arial"/>
+              </a:defRPr>
+            </a:lvl1pPr>
+            <a:lvl2pPr marR="0" lvl="1" algn="l" rtl="0">
+              <a:lnSpc>
+                <a:spcPct val="100000"/>
+              </a:lnSpc>
+              <a:spcBef>
+                <a:spcPts val="0"/>
+              </a:spcBef>
+              <a:spcAft>
+                <a:spcPts val="0"/>
+              </a:spcAft>
+              <a:buClr>
+                <a:srgbClr val="000000"/>
+              </a:buClr>
+              <a:buFont typeface="Arial"/>
+              <a:defRPr sz="1867" b="0" i="0" u="none" strike="noStrike" cap="none">
+                <a:solidFill>
+                  <a:srgbClr val="000000"/>
+                </a:solidFill>
+                <a:latin typeface="Arial"/>
+                <a:ea typeface="Arial"/>
+                <a:cs typeface="Arial"/>
+                <a:sym typeface="Arial"/>
+              </a:defRPr>
+            </a:lvl2pPr>
+            <a:lvl3pPr marR="0" lvl="2" algn="l" rtl="0">
+              <a:lnSpc>
+                <a:spcPct val="100000"/>
+              </a:lnSpc>
+              <a:spcBef>
+                <a:spcPts val="0"/>
+              </a:spcBef>
+              <a:spcAft>
+                <a:spcPts val="0"/>
+              </a:spcAft>
+              <a:buClr>
+                <a:srgbClr val="000000"/>
+              </a:buClr>
+              <a:buFont typeface="Arial"/>
+              <a:defRPr sz="1867" b="0" i="0" u="none" strike="noStrike" cap="none">
+                <a:solidFill>
+                  <a:srgbClr val="000000"/>
+                </a:solidFill>
+                <a:latin typeface="Arial"/>
+                <a:ea typeface="Arial"/>
+                <a:cs typeface="Arial"/>
+                <a:sym typeface="Arial"/>
+              </a:defRPr>
+            </a:lvl3pPr>
+            <a:lvl4pPr marR="0" lvl="3" algn="l" rtl="0">
+              <a:lnSpc>
+                <a:spcPct val="100000"/>
+              </a:lnSpc>
+              <a:spcBef>
+                <a:spcPts val="0"/>
+              </a:spcBef>
+              <a:spcAft>
+                <a:spcPts val="0"/>
+              </a:spcAft>
+              <a:buClr>
+                <a:srgbClr val="000000"/>
+              </a:buClr>
+              <a:buFont typeface="Arial"/>
+              <a:defRPr sz="1867" b="0" i="0" u="none" strike="noStrike" cap="none">
+                <a:solidFill>
+                  <a:srgbClr val="000000"/>
+                </a:solidFill>
+                <a:latin typeface="Arial"/>
+                <a:ea typeface="Arial"/>
+                <a:cs typeface="Arial"/>
+                <a:sym typeface="Arial"/>
+              </a:defRPr>
+            </a:lvl4pPr>
+            <a:lvl5pPr marR="0" lvl="4" algn="l" rtl="0">
+              <a:lnSpc>
+                <a:spcPct val="100000"/>
+              </a:lnSpc>
+              <a:spcBef>
+                <a:spcPts val="0"/>
+              </a:spcBef>
+              <a:spcAft>
+                <a:spcPts val="0"/>
+              </a:spcAft>
+              <a:buClr>
+                <a:srgbClr val="000000"/>
+              </a:buClr>
+              <a:buFont typeface="Arial"/>
+              <a:defRPr sz="1867" b="0" i="0" u="none" strike="noStrike" cap="none">
+                <a:solidFill>
+                  <a:srgbClr val="000000"/>
+                </a:solidFill>
+                <a:latin typeface="Arial"/>
+                <a:ea typeface="Arial"/>
+                <a:cs typeface="Arial"/>
+                <a:sym typeface="Arial"/>
+              </a:defRPr>
+            </a:lvl5pPr>
+            <a:lvl6pPr marR="0" lvl="5" algn="l" rtl="0">
+              <a:lnSpc>
+                <a:spcPct val="100000"/>
+              </a:lnSpc>
+              <a:spcBef>
+                <a:spcPts val="0"/>
+              </a:spcBef>
+              <a:spcAft>
+                <a:spcPts val="0"/>
+              </a:spcAft>
+              <a:buClr>
+                <a:srgbClr val="000000"/>
+              </a:buClr>
+              <a:buFont typeface="Arial"/>
+              <a:defRPr sz="1867" b="0" i="0" u="none" strike="noStrike" cap="none">
+                <a:solidFill>
+                  <a:srgbClr val="000000"/>
+                </a:solidFill>
+                <a:latin typeface="Arial"/>
+                <a:ea typeface="Arial"/>
+                <a:cs typeface="Arial"/>
+                <a:sym typeface="Arial"/>
+              </a:defRPr>
+            </a:lvl6pPr>
+            <a:lvl7pPr marR="0" lvl="6" algn="l" rtl="0">
+              <a:lnSpc>
+                <a:spcPct val="100000"/>
+              </a:lnSpc>
+              <a:spcBef>
+                <a:spcPts val="0"/>
+              </a:spcBef>
+              <a:spcAft>
+                <a:spcPts val="0"/>
+              </a:spcAft>
+              <a:buClr>
+                <a:srgbClr val="000000"/>
+              </a:buClr>
+              <a:buFont typeface="Arial"/>
+              <a:defRPr sz="1867" b="0" i="0" u="none" strike="noStrike" cap="none">
+                <a:solidFill>
+                  <a:srgbClr val="000000"/>
+                </a:solidFill>
+                <a:latin typeface="Arial"/>
+                <a:ea typeface="Arial"/>
+                <a:cs typeface="Arial"/>
+                <a:sym typeface="Arial"/>
+              </a:defRPr>
+            </a:lvl7pPr>
+            <a:lvl8pPr marR="0" lvl="7" algn="l" rtl="0">
+              <a:lnSpc>
+                <a:spcPct val="100000"/>
+              </a:lnSpc>
+              <a:spcBef>
+                <a:spcPts val="0"/>
+              </a:spcBef>
+              <a:spcAft>
+                <a:spcPts val="0"/>
+              </a:spcAft>
+              <a:buClr>
+                <a:srgbClr val="000000"/>
+              </a:buClr>
+              <a:buFont typeface="Arial"/>
+              <a:defRPr sz="1867" b="0" i="0" u="none" strike="noStrike" cap="none">
+                <a:solidFill>
+                  <a:srgbClr val="000000"/>
+                </a:solidFill>
+                <a:latin typeface="Arial"/>
+                <a:ea typeface="Arial"/>
+                <a:cs typeface="Arial"/>
+                <a:sym typeface="Arial"/>
+              </a:defRPr>
+            </a:lvl8pPr>
+            <a:lvl9pPr marR="0" lvl="8" algn="l" rtl="0">
+              <a:lnSpc>
+                <a:spcPct val="100000"/>
+              </a:lnSpc>
+              <a:spcBef>
+                <a:spcPts val="0"/>
+              </a:spcBef>
+              <a:spcAft>
+                <a:spcPts val="0"/>
+              </a:spcAft>
+              <a:buClr>
+                <a:srgbClr val="000000"/>
+              </a:buClr>
+              <a:buFont typeface="Arial"/>
+              <a:defRPr sz="1867" b="0" i="0" u="none" strike="noStrike" cap="none">
+                <a:solidFill>
+                  <a:srgbClr val="000000"/>
+                </a:solidFill>
+                <a:latin typeface="Arial"/>
+                <a:ea typeface="Arial"/>
+                <a:cs typeface="Arial"/>
+                <a:sym typeface="Arial"/>
+              </a:defRPr>
+            </a:lvl9pPr>
+          </a:lstStyle>
+          <a:p>
+            <a:r>
+              <a:rPr lang="en-GB" sz="2400" i="1" dirty="0">
+                <a:solidFill>
+                  <a:schemeClr val="accent1"/>
+                </a:solidFill>
+                <a:latin typeface="Constantia"/>
+                <a:ea typeface="Roboto Serif"/>
+                <a:cs typeface="Roboto Serif"/>
+                <a:sym typeface="Roboto Serif"/>
+              </a:rPr>
+              <a:t>French macaron</a:t>
+            </a:r>
+            <a:endParaRPr lang="en-GB" sz="2400" dirty="0">
+              <a:solidFill>
+                <a:schemeClr val="accent1"/>
+              </a:solidFill>
+              <a:latin typeface="Constantia"/>
+              <a:ea typeface="Roboto Serif"/>
+              <a:cs typeface="Roboto Serif"/>
+            </a:endParaRPr>
+          </a:p>
+        </p:txBody>
+      </p:sp>
+      <p:sp>
+        <p:nvSpPr>
+          <p:cNvPr id="14" name="Google Shape;110;p16">
+            <a:extLst>
+              <a:ext uri="{FF2B5EF4-FFF2-40B4-BE49-F238E27FC236}">
+                <a16:creationId xmlns:a16="http://schemas.microsoft.com/office/drawing/2014/main" id="{57B90F29-AED9-3218-795E-537CD90AC971}"/>
+              </a:ext>
+            </a:extLst>
+          </p:cNvPr>
+          <p:cNvSpPr txBox="1"/>
+          <p:nvPr/>
+        </p:nvSpPr>
+        <p:spPr>
+          <a:xfrm>
+            <a:off x="8724409" y="4425227"/>
+            <a:ext cx="3248488" cy="443375"/>
+          </a:xfrm>
+          <a:prstGeom prst="rect">
+            <a:avLst/>
+          </a:prstGeom>
+          <a:noFill/>
+          <a:ln>
+            <a:noFill/>
+          </a:ln>
+        </p:spPr>
+        <p:txBody>
+          <a:bodyPr spcFirstLastPara="1" wrap="square" lIns="121900" tIns="121900" rIns="121900" bIns="121900" anchor="t" anchorCtr="0">
+            <a:noAutofit/>
+          </a:bodyPr>
+          <a:lstStyle>
+            <a:defPPr marR="0" lvl="0" algn="l" rtl="0">
+              <a:lnSpc>
+                <a:spcPct val="100000"/>
+              </a:lnSpc>
+              <a:spcBef>
+                <a:spcPts val="0"/>
+              </a:spcBef>
+              <a:spcAft>
+                <a:spcPts val="0"/>
+              </a:spcAft>
+            </a:defPPr>
+            <a:lvl1pPr marR="0" lvl="0" algn="l" rtl="0">
+              <a:lnSpc>
+                <a:spcPct val="100000"/>
+              </a:lnSpc>
+              <a:spcBef>
+                <a:spcPts val="0"/>
+              </a:spcBef>
+              <a:spcAft>
+                <a:spcPts val="0"/>
+              </a:spcAft>
+              <a:buClr>
+                <a:srgbClr val="000000"/>
+              </a:buClr>
+              <a:buFont typeface="Arial"/>
+              <a:defRPr sz="1867" b="0" i="0" u="none" strike="noStrike" cap="none">
+                <a:solidFill>
+                  <a:srgbClr val="000000"/>
+                </a:solidFill>
+                <a:latin typeface="Arial"/>
+                <a:ea typeface="Arial"/>
+                <a:cs typeface="Arial"/>
+                <a:sym typeface="Arial"/>
+              </a:defRPr>
+            </a:lvl1pPr>
+            <a:lvl2pPr marR="0" lvl="1" algn="l" rtl="0">
+              <a:lnSpc>
+                <a:spcPct val="100000"/>
+              </a:lnSpc>
+              <a:spcBef>
+                <a:spcPts val="0"/>
+              </a:spcBef>
+              <a:spcAft>
+                <a:spcPts val="0"/>
+              </a:spcAft>
+              <a:buClr>
+                <a:srgbClr val="000000"/>
+              </a:buClr>
+              <a:buFont typeface="Arial"/>
+              <a:defRPr sz="1867" b="0" i="0" u="none" strike="noStrike" cap="none">
+                <a:solidFill>
+                  <a:srgbClr val="000000"/>
+                </a:solidFill>
+                <a:latin typeface="Arial"/>
+                <a:ea typeface="Arial"/>
+                <a:cs typeface="Arial"/>
+                <a:sym typeface="Arial"/>
+              </a:defRPr>
+            </a:lvl2pPr>
+            <a:lvl3pPr marR="0" lvl="2" algn="l" rtl="0">
+              <a:lnSpc>
+                <a:spcPct val="100000"/>
+              </a:lnSpc>
+              <a:spcBef>
+                <a:spcPts val="0"/>
+              </a:spcBef>
+              <a:spcAft>
+                <a:spcPts val="0"/>
+              </a:spcAft>
+              <a:buClr>
+                <a:srgbClr val="000000"/>
+              </a:buClr>
+              <a:buFont typeface="Arial"/>
+              <a:defRPr sz="1867" b="0" i="0" u="none" strike="noStrike" cap="none">
+                <a:solidFill>
+                  <a:srgbClr val="000000"/>
+                </a:solidFill>
+                <a:latin typeface="Arial"/>
+                <a:ea typeface="Arial"/>
+                <a:cs typeface="Arial"/>
+                <a:sym typeface="Arial"/>
+              </a:defRPr>
+            </a:lvl3pPr>
+            <a:lvl4pPr marR="0" lvl="3" algn="l" rtl="0">
+              <a:lnSpc>
+                <a:spcPct val="100000"/>
+              </a:lnSpc>
+              <a:spcBef>
+                <a:spcPts val="0"/>
+              </a:spcBef>
+              <a:spcAft>
+                <a:spcPts val="0"/>
+              </a:spcAft>
+              <a:buClr>
+                <a:srgbClr val="000000"/>
+              </a:buClr>
+              <a:buFont typeface="Arial"/>
+              <a:defRPr sz="1867" b="0" i="0" u="none" strike="noStrike" cap="none">
+                <a:solidFill>
+                  <a:srgbClr val="000000"/>
+                </a:solidFill>
+                <a:latin typeface="Arial"/>
+                <a:ea typeface="Arial"/>
+                <a:cs typeface="Arial"/>
+                <a:sym typeface="Arial"/>
+              </a:defRPr>
+            </a:lvl4pPr>
+            <a:lvl5pPr marR="0" lvl="4" algn="l" rtl="0">
+              <a:lnSpc>
+                <a:spcPct val="100000"/>
+              </a:lnSpc>
+              <a:spcBef>
+                <a:spcPts val="0"/>
+              </a:spcBef>
+              <a:spcAft>
+                <a:spcPts val="0"/>
+              </a:spcAft>
+              <a:buClr>
+                <a:srgbClr val="000000"/>
+              </a:buClr>
+              <a:buFont typeface="Arial"/>
+              <a:defRPr sz="1867" b="0" i="0" u="none" strike="noStrike" cap="none">
+                <a:solidFill>
+                  <a:srgbClr val="000000"/>
+                </a:solidFill>
+                <a:latin typeface="Arial"/>
+                <a:ea typeface="Arial"/>
+                <a:cs typeface="Arial"/>
+                <a:sym typeface="Arial"/>
+              </a:defRPr>
+            </a:lvl5pPr>
+            <a:lvl6pPr marR="0" lvl="5" algn="l" rtl="0">
+              <a:lnSpc>
+                <a:spcPct val="100000"/>
+              </a:lnSpc>
+              <a:spcBef>
+                <a:spcPts val="0"/>
+              </a:spcBef>
+              <a:spcAft>
+                <a:spcPts val="0"/>
+              </a:spcAft>
+              <a:buClr>
+                <a:srgbClr val="000000"/>
+              </a:buClr>
+              <a:buFont typeface="Arial"/>
+              <a:defRPr sz="1867" b="0" i="0" u="none" strike="noStrike" cap="none">
+                <a:solidFill>
+                  <a:srgbClr val="000000"/>
+                </a:solidFill>
+                <a:latin typeface="Arial"/>
+                <a:ea typeface="Arial"/>
+                <a:cs typeface="Arial"/>
+                <a:sym typeface="Arial"/>
+              </a:defRPr>
+            </a:lvl6pPr>
+            <a:lvl7pPr marR="0" lvl="6" algn="l" rtl="0">
+              <a:lnSpc>
+                <a:spcPct val="100000"/>
+              </a:lnSpc>
+              <a:spcBef>
+                <a:spcPts val="0"/>
+              </a:spcBef>
+              <a:spcAft>
+                <a:spcPts val="0"/>
+              </a:spcAft>
+              <a:buClr>
+                <a:srgbClr val="000000"/>
+              </a:buClr>
+              <a:buFont typeface="Arial"/>
+              <a:defRPr sz="1867" b="0" i="0" u="none" strike="noStrike" cap="none">
+                <a:solidFill>
+                  <a:srgbClr val="000000"/>
+                </a:solidFill>
+                <a:latin typeface="Arial"/>
+                <a:ea typeface="Arial"/>
+                <a:cs typeface="Arial"/>
+                <a:sym typeface="Arial"/>
+              </a:defRPr>
+            </a:lvl7pPr>
+            <a:lvl8pPr marR="0" lvl="7" algn="l" rtl="0">
+              <a:lnSpc>
+                <a:spcPct val="100000"/>
+              </a:lnSpc>
+              <a:spcBef>
+                <a:spcPts val="0"/>
+              </a:spcBef>
+              <a:spcAft>
+                <a:spcPts val="0"/>
+              </a:spcAft>
+              <a:buClr>
+                <a:srgbClr val="000000"/>
+              </a:buClr>
+              <a:buFont typeface="Arial"/>
+              <a:defRPr sz="1867" b="0" i="0" u="none" strike="noStrike" cap="none">
+                <a:solidFill>
+                  <a:srgbClr val="000000"/>
+                </a:solidFill>
+                <a:latin typeface="Arial"/>
+                <a:ea typeface="Arial"/>
+                <a:cs typeface="Arial"/>
+                <a:sym typeface="Arial"/>
+              </a:defRPr>
+            </a:lvl8pPr>
+            <a:lvl9pPr marR="0" lvl="8" algn="l" rtl="0">
+              <a:lnSpc>
+                <a:spcPct val="100000"/>
+              </a:lnSpc>
+              <a:spcBef>
+                <a:spcPts val="0"/>
+              </a:spcBef>
+              <a:spcAft>
+                <a:spcPts val="0"/>
+              </a:spcAft>
+              <a:buClr>
+                <a:srgbClr val="000000"/>
+              </a:buClr>
+              <a:buFont typeface="Arial"/>
+              <a:defRPr sz="1867" b="0" i="0" u="none" strike="noStrike" cap="none">
+                <a:solidFill>
+                  <a:srgbClr val="000000"/>
+                </a:solidFill>
+                <a:latin typeface="Arial"/>
+                <a:ea typeface="Arial"/>
+                <a:cs typeface="Arial"/>
+                <a:sym typeface="Arial"/>
+              </a:defRPr>
+            </a:lvl9pPr>
+          </a:lstStyle>
+          <a:p>
+            <a:r>
+              <a:rPr lang="en-GB" sz="2400" i="1" dirty="0">
+                <a:solidFill>
+                  <a:srgbClr val="980000"/>
+                </a:solidFill>
+                <a:latin typeface="Constantia"/>
+                <a:ea typeface="Roboto Serif"/>
+                <a:cs typeface="Roboto Serif"/>
+                <a:sym typeface="Roboto Serif"/>
+              </a:rPr>
+              <a:t>apple pie</a:t>
+            </a:r>
+            <a:endParaRPr lang="en-GB" sz="2400" dirty="0">
+              <a:solidFill>
+                <a:srgbClr val="980000"/>
+              </a:solidFill>
+              <a:latin typeface="Constantia"/>
+              <a:ea typeface="Roboto Serif"/>
+              <a:cs typeface="Roboto Serif"/>
+            </a:endParaRPr>
+          </a:p>
+        </p:txBody>
+      </p:sp>
+      <p:cxnSp>
+        <p:nvCxnSpPr>
+          <p:cNvPr id="23" name="Google Shape;55;p13">
+            <a:extLst>
+              <a:ext uri="{FF2B5EF4-FFF2-40B4-BE49-F238E27FC236}">
+                <a16:creationId xmlns:a16="http://schemas.microsoft.com/office/drawing/2014/main" id="{1A03887B-DC57-B954-059E-784A1B19A718}"/>
+              </a:ext>
+            </a:extLst>
+          </p:cNvPr>
+          <p:cNvCxnSpPr/>
+          <p:nvPr/>
+        </p:nvCxnSpPr>
+        <p:spPr>
+          <a:xfrm flipV="1">
+            <a:off x="6546601" y="5729629"/>
+            <a:ext cx="4533898" cy="4395"/>
+          </a:xfrm>
+          <a:prstGeom prst="straightConnector1">
+            <a:avLst/>
+          </a:prstGeom>
+          <a:noFill/>
+          <a:ln w="28575" cap="flat" cmpd="sng">
+            <a:solidFill>
+              <a:schemeClr val="dk2"/>
+            </a:solidFill>
+            <a:prstDash val="solid"/>
+            <a:round/>
+            <a:headEnd type="none" w="med" len="med"/>
+            <a:tailEnd type="triangle" w="med" len="med"/>
+          </a:ln>
+        </p:spPr>
+      </p:cxnSp>
+      <p:sp>
+        <p:nvSpPr>
+          <p:cNvPr id="6" name="TextBox 5">
+            <a:extLst>
+              <a:ext uri="{FF2B5EF4-FFF2-40B4-BE49-F238E27FC236}">
+                <a16:creationId xmlns:a16="http://schemas.microsoft.com/office/drawing/2014/main" id="{BEB5F659-D94B-DAFA-9574-B1AAE0E9D1E6}"/>
+              </a:ext>
+            </a:extLst>
+          </p:cNvPr>
+          <p:cNvSpPr txBox="1"/>
+          <p:nvPr/>
+        </p:nvSpPr>
+        <p:spPr>
+          <a:xfrm>
+            <a:off x="7530192" y="2596242"/>
+            <a:ext cx="3122839" cy="369332"/>
+          </a:xfrm>
+          <a:prstGeom prst="rect">
+            <a:avLst/>
+          </a:prstGeom>
+          <a:noFill/>
+        </p:spPr>
+        <p:txBody>
+          <a:bodyPr rot="0" spcFirstLastPara="0" vertOverflow="overflow" horzOverflow="overflow" vert="horz" wrap="square" lIns="91440" tIns="45720" rIns="91440" bIns="45720" numCol="1" spcCol="0" rtlCol="0" fromWordArt="0" anchor="t" anchorCtr="0" forceAA="0" compatLnSpc="1">
+            <a:prstTxWarp prst="textNoShape">
+              <a:avLst/>
+            </a:prstTxWarp>
+            <a:spAutoFit/>
+          </a:bodyPr>
+          <a:lstStyle/>
+          <a:p>
+            <a:r>
+              <a:rPr lang="en-GB" dirty="0">
+                <a:latin typeface="Comic Sans MS"/>
+              </a:rPr>
+              <a:t>almond-based deserts</a:t>
+            </a:r>
+            <a:endParaRPr lang="en-US" dirty="0"/>
+          </a:p>
+        </p:txBody>
+      </p:sp>
+      <p:sp>
+        <p:nvSpPr>
+          <p:cNvPr id="25" name="TextBox 24">
+            <a:extLst>
+              <a:ext uri="{FF2B5EF4-FFF2-40B4-BE49-F238E27FC236}">
+                <a16:creationId xmlns:a16="http://schemas.microsoft.com/office/drawing/2014/main" id="{832AFF85-DB34-785E-C44E-5D92A6C40068}"/>
+              </a:ext>
+            </a:extLst>
+          </p:cNvPr>
+          <p:cNvSpPr txBox="1"/>
+          <p:nvPr/>
+        </p:nvSpPr>
+        <p:spPr>
+          <a:xfrm>
+            <a:off x="8573323" y="5294070"/>
+            <a:ext cx="2918731" cy="369332"/>
+          </a:xfrm>
+          <a:prstGeom prst="rect">
+            <a:avLst/>
+          </a:prstGeom>
+          <a:noFill/>
+        </p:spPr>
+        <p:txBody>
+          <a:bodyPr rot="0" spcFirstLastPara="0" vertOverflow="overflow" horzOverflow="overflow" vert="horz" wrap="square" lIns="91440" tIns="45720" rIns="91440" bIns="45720" numCol="1" spcCol="0" rtlCol="0" fromWordArt="0" anchor="t" anchorCtr="0" forceAA="0" compatLnSpc="1">
+            <a:prstTxWarp prst="textNoShape">
+              <a:avLst/>
+            </a:prstTxWarp>
+            <a:spAutoFit/>
+          </a:bodyPr>
+          <a:lstStyle/>
+          <a:p>
+            <a:r>
+              <a:rPr lang="en-GB" dirty="0">
+                <a:latin typeface="Comic Sans MS"/>
+              </a:rPr>
+              <a:t>apple-based deserts</a:t>
+            </a:r>
+            <a:endParaRPr lang="en-US" dirty="0">
+              <a:latin typeface="Comic Sans MS"/>
+            </a:endParaRPr>
+          </a:p>
+        </p:txBody>
+      </p:sp>
+      <p:cxnSp>
+        <p:nvCxnSpPr>
+          <p:cNvPr id="27" name="Google Shape;79;p14">
+            <a:extLst>
+              <a:ext uri="{FF2B5EF4-FFF2-40B4-BE49-F238E27FC236}">
+                <a16:creationId xmlns:a16="http://schemas.microsoft.com/office/drawing/2014/main" id="{F147015C-DF63-5286-B5AD-519586E406EA}"/>
+              </a:ext>
+            </a:extLst>
+          </p:cNvPr>
+          <p:cNvCxnSpPr/>
+          <p:nvPr/>
+        </p:nvCxnSpPr>
+        <p:spPr>
+          <a:xfrm flipV="1">
+            <a:off x="6579303" y="3698660"/>
+            <a:ext cx="1304550" cy="2014874"/>
+          </a:xfrm>
+          <a:prstGeom prst="straightConnector1">
+            <a:avLst/>
+          </a:prstGeom>
+          <a:noFill/>
+          <a:ln w="57150" cap="flat" cmpd="sng">
+            <a:solidFill>
+              <a:srgbClr val="FF9900"/>
+            </a:solidFill>
+            <a:prstDash val="solid"/>
+            <a:round/>
+            <a:headEnd type="none" w="med" len="med"/>
+            <a:tailEnd type="triangle" w="med" len="med"/>
+          </a:ln>
+        </p:spPr>
+      </p:cxnSp>
+      <p:cxnSp>
+        <p:nvCxnSpPr>
+          <p:cNvPr id="15" name="Google Shape;107;p16">
+            <a:extLst>
+              <a:ext uri="{FF2B5EF4-FFF2-40B4-BE49-F238E27FC236}">
+                <a16:creationId xmlns:a16="http://schemas.microsoft.com/office/drawing/2014/main" id="{F04E060A-4BED-EA3E-AF36-D6BEFBF6C8D6}"/>
+              </a:ext>
+            </a:extLst>
+          </p:cNvPr>
+          <p:cNvCxnSpPr/>
+          <p:nvPr/>
+        </p:nvCxnSpPr>
+        <p:spPr>
+          <a:xfrm flipV="1">
+            <a:off x="6555420" y="3502728"/>
+            <a:ext cx="1330150" cy="2217325"/>
+          </a:xfrm>
+          <a:prstGeom prst="straightConnector1">
+            <a:avLst/>
+          </a:prstGeom>
+          <a:noFill/>
+          <a:ln w="28575" cap="flat" cmpd="sng">
+            <a:solidFill>
+              <a:schemeClr val="accent1"/>
+            </a:solidFill>
+            <a:prstDash val="solid"/>
+            <a:round/>
+            <a:headEnd type="none" w="med" len="med"/>
+            <a:tailEnd type="triangle" w="med" len="med"/>
+          </a:ln>
+        </p:spPr>
+      </p:cxnSp>
+      <p:sp>
+        <p:nvSpPr>
+          <p:cNvPr id="17" name="Google Shape;109;p16">
+            <a:extLst>
+              <a:ext uri="{FF2B5EF4-FFF2-40B4-BE49-F238E27FC236}">
+                <a16:creationId xmlns:a16="http://schemas.microsoft.com/office/drawing/2014/main" id="{5D528281-797E-E91A-D3AA-929C708B96BA}"/>
+              </a:ext>
+            </a:extLst>
+          </p:cNvPr>
+          <p:cNvSpPr txBox="1"/>
+          <p:nvPr/>
+        </p:nvSpPr>
+        <p:spPr>
+          <a:xfrm>
+            <a:off x="7911626" y="2963007"/>
+            <a:ext cx="2355122" cy="546788"/>
+          </a:xfrm>
+          <a:prstGeom prst="rect">
+            <a:avLst/>
+          </a:prstGeom>
+          <a:noFill/>
+          <a:ln>
+            <a:noFill/>
+          </a:ln>
+        </p:spPr>
+        <p:txBody>
+          <a:bodyPr spcFirstLastPara="1" wrap="square" lIns="121900" tIns="121900" rIns="121900" bIns="121900" anchor="t" anchorCtr="0">
+            <a:noAutofit/>
+          </a:bodyPr>
+          <a:lstStyle>
+            <a:defPPr marR="0" lvl="0" algn="l" rtl="0">
+              <a:lnSpc>
+                <a:spcPct val="100000"/>
+              </a:lnSpc>
+              <a:spcBef>
+                <a:spcPts val="0"/>
+              </a:spcBef>
+              <a:spcAft>
+                <a:spcPts val="0"/>
+              </a:spcAft>
+            </a:defPPr>
+            <a:lvl1pPr marR="0" lvl="0" algn="l" rtl="0">
+              <a:lnSpc>
+                <a:spcPct val="100000"/>
+              </a:lnSpc>
+              <a:spcBef>
+                <a:spcPts val="0"/>
+              </a:spcBef>
+              <a:spcAft>
+                <a:spcPts val="0"/>
+              </a:spcAft>
+              <a:buClr>
+                <a:srgbClr val="000000"/>
+              </a:buClr>
+              <a:buFont typeface="Arial"/>
+              <a:defRPr sz="1867" b="0" i="0" u="none" strike="noStrike" cap="none">
+                <a:solidFill>
+                  <a:srgbClr val="000000"/>
+                </a:solidFill>
+                <a:latin typeface="Arial"/>
+                <a:ea typeface="Arial"/>
+                <a:cs typeface="Arial"/>
+                <a:sym typeface="Arial"/>
+              </a:defRPr>
+            </a:lvl1pPr>
+            <a:lvl2pPr marR="0" lvl="1" algn="l" rtl="0">
+              <a:lnSpc>
+                <a:spcPct val="100000"/>
+              </a:lnSpc>
+              <a:spcBef>
+                <a:spcPts val="0"/>
+              </a:spcBef>
+              <a:spcAft>
+                <a:spcPts val="0"/>
+              </a:spcAft>
+              <a:buClr>
+                <a:srgbClr val="000000"/>
+              </a:buClr>
+              <a:buFont typeface="Arial"/>
+              <a:defRPr sz="1867" b="0" i="0" u="none" strike="noStrike" cap="none">
+                <a:solidFill>
+                  <a:srgbClr val="000000"/>
+                </a:solidFill>
+                <a:latin typeface="Arial"/>
+                <a:ea typeface="Arial"/>
+                <a:cs typeface="Arial"/>
+                <a:sym typeface="Arial"/>
+              </a:defRPr>
+            </a:lvl2pPr>
+            <a:lvl3pPr marR="0" lvl="2" algn="l" rtl="0">
+              <a:lnSpc>
+                <a:spcPct val="100000"/>
+              </a:lnSpc>
+              <a:spcBef>
+                <a:spcPts val="0"/>
+              </a:spcBef>
+              <a:spcAft>
+                <a:spcPts val="0"/>
+              </a:spcAft>
+              <a:buClr>
+                <a:srgbClr val="000000"/>
+              </a:buClr>
+              <a:buFont typeface="Arial"/>
+              <a:defRPr sz="1867" b="0" i="0" u="none" strike="noStrike" cap="none">
+                <a:solidFill>
+                  <a:srgbClr val="000000"/>
+                </a:solidFill>
+                <a:latin typeface="Arial"/>
+                <a:ea typeface="Arial"/>
+                <a:cs typeface="Arial"/>
+                <a:sym typeface="Arial"/>
+              </a:defRPr>
+            </a:lvl3pPr>
+            <a:lvl4pPr marR="0" lvl="3" algn="l" rtl="0">
+              <a:lnSpc>
+                <a:spcPct val="100000"/>
+              </a:lnSpc>
+              <a:spcBef>
+                <a:spcPts val="0"/>
+              </a:spcBef>
+              <a:spcAft>
+                <a:spcPts val="0"/>
+              </a:spcAft>
+              <a:buClr>
+                <a:srgbClr val="000000"/>
+              </a:buClr>
+              <a:buFont typeface="Arial"/>
+              <a:defRPr sz="1867" b="0" i="0" u="none" strike="noStrike" cap="none">
+                <a:solidFill>
+                  <a:srgbClr val="000000"/>
+                </a:solidFill>
+                <a:latin typeface="Arial"/>
+                <a:ea typeface="Arial"/>
+                <a:cs typeface="Arial"/>
+                <a:sym typeface="Arial"/>
+              </a:defRPr>
+            </a:lvl4pPr>
+            <a:lvl5pPr marR="0" lvl="4" algn="l" rtl="0">
+              <a:lnSpc>
+                <a:spcPct val="100000"/>
+              </a:lnSpc>
+              <a:spcBef>
+                <a:spcPts val="0"/>
+              </a:spcBef>
+              <a:spcAft>
+                <a:spcPts val="0"/>
+              </a:spcAft>
+              <a:buClr>
+                <a:srgbClr val="000000"/>
+              </a:buClr>
+              <a:buFont typeface="Arial"/>
+              <a:defRPr sz="1867" b="0" i="0" u="none" strike="noStrike" cap="none">
+                <a:solidFill>
+                  <a:srgbClr val="000000"/>
+                </a:solidFill>
+                <a:latin typeface="Arial"/>
+                <a:ea typeface="Arial"/>
+                <a:cs typeface="Arial"/>
+                <a:sym typeface="Arial"/>
+              </a:defRPr>
+            </a:lvl5pPr>
+            <a:lvl6pPr marR="0" lvl="5" algn="l" rtl="0">
+              <a:lnSpc>
+                <a:spcPct val="100000"/>
+              </a:lnSpc>
+              <a:spcBef>
+                <a:spcPts val="0"/>
+              </a:spcBef>
+              <a:spcAft>
+                <a:spcPts val="0"/>
+              </a:spcAft>
+              <a:buClr>
+                <a:srgbClr val="000000"/>
+              </a:buClr>
+              <a:buFont typeface="Arial"/>
+              <a:defRPr sz="1867" b="0" i="0" u="none" strike="noStrike" cap="none">
+                <a:solidFill>
+                  <a:srgbClr val="000000"/>
+                </a:solidFill>
+                <a:latin typeface="Arial"/>
+                <a:ea typeface="Arial"/>
+                <a:cs typeface="Arial"/>
+                <a:sym typeface="Arial"/>
+              </a:defRPr>
+            </a:lvl6pPr>
+            <a:lvl7pPr marR="0" lvl="6" algn="l" rtl="0">
+              <a:lnSpc>
+                <a:spcPct val="100000"/>
+              </a:lnSpc>
+              <a:spcBef>
+                <a:spcPts val="0"/>
+              </a:spcBef>
+              <a:spcAft>
+                <a:spcPts val="0"/>
+              </a:spcAft>
+              <a:buClr>
+                <a:srgbClr val="000000"/>
+              </a:buClr>
+              <a:buFont typeface="Arial"/>
+              <a:defRPr sz="1867" b="0" i="0" u="none" strike="noStrike" cap="none">
+                <a:solidFill>
+                  <a:srgbClr val="000000"/>
+                </a:solidFill>
+                <a:latin typeface="Arial"/>
+                <a:ea typeface="Arial"/>
+                <a:cs typeface="Arial"/>
+                <a:sym typeface="Arial"/>
+              </a:defRPr>
+            </a:lvl7pPr>
+            <a:lvl8pPr marR="0" lvl="7" algn="l" rtl="0">
+              <a:lnSpc>
+                <a:spcPct val="100000"/>
+              </a:lnSpc>
+              <a:spcBef>
+                <a:spcPts val="0"/>
+              </a:spcBef>
+              <a:spcAft>
+                <a:spcPts val="0"/>
+              </a:spcAft>
+              <a:buClr>
+                <a:srgbClr val="000000"/>
+              </a:buClr>
+              <a:buFont typeface="Arial"/>
+              <a:defRPr sz="1867" b="0" i="0" u="none" strike="noStrike" cap="none">
+                <a:solidFill>
+                  <a:srgbClr val="000000"/>
+                </a:solidFill>
+                <a:latin typeface="Arial"/>
+                <a:ea typeface="Arial"/>
+                <a:cs typeface="Arial"/>
+                <a:sym typeface="Arial"/>
+              </a:defRPr>
+            </a:lvl8pPr>
+            <a:lvl9pPr marR="0" lvl="8" algn="l" rtl="0">
+              <a:lnSpc>
+                <a:spcPct val="100000"/>
+              </a:lnSpc>
+              <a:spcBef>
+                <a:spcPts val="0"/>
+              </a:spcBef>
+              <a:spcAft>
+                <a:spcPts val="0"/>
+              </a:spcAft>
+              <a:buClr>
+                <a:srgbClr val="000000"/>
+              </a:buClr>
+              <a:buFont typeface="Arial"/>
+              <a:defRPr sz="1867" b="0" i="0" u="none" strike="noStrike" cap="none">
+                <a:solidFill>
+                  <a:srgbClr val="000000"/>
+                </a:solidFill>
+                <a:latin typeface="Arial"/>
+                <a:ea typeface="Arial"/>
+                <a:cs typeface="Arial"/>
+                <a:sym typeface="Arial"/>
+              </a:defRPr>
+            </a:lvl9pPr>
+          </a:lstStyle>
+          <a:p>
+            <a:r>
+              <a:rPr lang="en-GB" sz="2400" i="1" dirty="0">
+                <a:solidFill>
+                  <a:schemeClr val="accent1"/>
+                </a:solidFill>
+                <a:latin typeface="Constantia"/>
+                <a:ea typeface="Roboto Serif"/>
+                <a:cs typeface="Roboto Serif"/>
+                <a:sym typeface="Roboto Serif"/>
+              </a:rPr>
+              <a:t>Italian macaron</a:t>
+            </a:r>
+            <a:endParaRPr lang="en-GB" sz="2400" dirty="0">
+              <a:solidFill>
+                <a:schemeClr val="accent1"/>
+              </a:solidFill>
+              <a:latin typeface="Constantia"/>
+              <a:ea typeface="Roboto Serif"/>
+              <a:cs typeface="Roboto Serif"/>
+            </a:endParaRPr>
+          </a:p>
+        </p:txBody>
+      </p:sp>
+    </p:spTree>
+    <p:extLst>
+      <p:ext uri="{BB962C8B-B14F-4D97-AF65-F5344CB8AC3E}">
+        <p14:creationId xmlns:p14="http://schemas.microsoft.com/office/powerpoint/2010/main" val="208803299"/>
+      </p:ext>
+    </p:extLst>
+  </p:cSld>
+  <p:clrMapOvr>
+    <a:masterClrMapping/>
+  </p:clrMapOvr>
+  <p:timing>
+    <p:tnLst>
+      <p:par>
+        <p:cTn id="1" dur="indefinite" restart="never" nodeType="tmRoot">
+          <p:childTnLst>
+            <p:seq concurrent="1" nextAc="seek">
+              <p:cTn id="2" dur="indefinite" nodeType="mainSeq">
+                <p:childTnLst>
+                  <p:par>
+                    <p:cTn id="3" fill="hold">
+                      <p:stCondLst>
+                        <p:cond delay="indefinite"/>
+                      </p:stCondLst>
+                      <p:childTnLst>
+                        <p:par>
+                          <p:cTn id="4" fill="hold">
+                            <p:stCondLst>
+                              <p:cond delay="0"/>
+                            </p:stCondLst>
+                            <p:childTnLst>
+                              <p:par>
+                                <p:cTn id="5" presetID="1" presetClass="entr" presetSubtype="0" fill="hold" grpId="0" nodeType="clickEffect">
+                                  <p:stCondLst>
+                                    <p:cond delay="0"/>
+                                  </p:stCondLst>
+                                  <p:childTnLst>
+                                    <p:set>
+                                      <p:cBhvr>
+                                        <p:cTn id="6" dur="1" fill="hold">
+                                          <p:stCondLst>
+                                            <p:cond delay="0"/>
+                                          </p:stCondLst>
+                                        </p:cTn>
+                                        <p:tgtEl>
+                                          <p:spTgt spid="6"/>
+                                        </p:tgtEl>
+                                        <p:attrNameLst>
+                                          <p:attrName>style.visibility</p:attrName>
+                                        </p:attrNameLst>
+                                      </p:cBhvr>
+                                      <p:to>
+                                        <p:strVal val="visible"/>
+                                      </p:to>
+                                    </p:set>
+                                  </p:childTnLst>
+                                </p:cTn>
+                              </p:par>
+                              <p:par>
+                                <p:cTn id="7" presetID="1" presetClass="entr" presetSubtype="0" fill="hold" grpId="0" nodeType="withEffect">
+                                  <p:stCondLst>
+                                    <p:cond delay="0"/>
+                                  </p:stCondLst>
+                                  <p:childTnLst>
+                                    <p:set>
+                                      <p:cBhvr>
+                                        <p:cTn id="8" dur="1" fill="hold">
+                                          <p:stCondLst>
+                                            <p:cond delay="0"/>
+                                          </p:stCondLst>
+                                        </p:cTn>
+                                        <p:tgtEl>
+                                          <p:spTgt spid="4"/>
+                                        </p:tgtEl>
+                                        <p:attrNameLst>
+                                          <p:attrName>style.visibility</p:attrName>
+                                        </p:attrNameLst>
+                                      </p:cBhvr>
+                                      <p:to>
+                                        <p:strVal val="visible"/>
+                                      </p:to>
+                                    </p:set>
+                                  </p:childTnLst>
+                                </p:cTn>
+                              </p:par>
+                            </p:childTnLst>
+                          </p:cTn>
+                        </p:par>
+                      </p:childTnLst>
+                    </p:cTn>
+                  </p:par>
+                  <p:par>
+                    <p:cTn id="9" fill="hold">
+                      <p:stCondLst>
+                        <p:cond delay="indefinite"/>
+                      </p:stCondLst>
+                      <p:childTnLst>
+                        <p:par>
+                          <p:cTn id="10" fill="hold">
+                            <p:stCondLst>
+                              <p:cond delay="0"/>
+                            </p:stCondLst>
+                            <p:childTnLst>
+                              <p:par>
+                                <p:cTn id="11" presetID="1" presetClass="entr" presetSubtype="0" fill="hold" grpId="0" nodeType="clickEffect">
+                                  <p:stCondLst>
+                                    <p:cond delay="0"/>
+                                  </p:stCondLst>
+                                  <p:childTnLst>
+                                    <p:set>
+                                      <p:cBhvr>
+                                        <p:cTn id="12" dur="1" fill="hold">
+                                          <p:stCondLst>
+                                            <p:cond delay="0"/>
+                                          </p:stCondLst>
+                                        </p:cTn>
+                                        <p:tgtEl>
+                                          <p:spTgt spid="5"/>
+                                        </p:tgtEl>
+                                        <p:attrNameLst>
+                                          <p:attrName>style.visibility</p:attrName>
+                                        </p:attrNameLst>
+                                      </p:cBhvr>
+                                      <p:to>
+                                        <p:strVal val="visible"/>
+                                      </p:to>
+                                    </p:set>
+                                  </p:childTnLst>
+                                </p:cTn>
+                              </p:par>
+                              <p:par>
+                                <p:cTn id="13" presetID="1" presetClass="entr" presetSubtype="0" fill="hold" grpId="0" nodeType="withEffect">
+                                  <p:stCondLst>
+                                    <p:cond delay="0"/>
+                                  </p:stCondLst>
+                                  <p:childTnLst>
+                                    <p:set>
+                                      <p:cBhvr>
+                                        <p:cTn id="14" dur="1" fill="hold">
+                                          <p:stCondLst>
+                                            <p:cond delay="0"/>
+                                          </p:stCondLst>
+                                        </p:cTn>
+                                        <p:tgtEl>
+                                          <p:spTgt spid="25"/>
+                                        </p:tgtEl>
+                                        <p:attrNameLst>
+                                          <p:attrName>style.visibility</p:attrName>
+                                        </p:attrNameLst>
+                                      </p:cBhvr>
+                                      <p:to>
+                                        <p:strVal val="visible"/>
+                                      </p:to>
+                                    </p:set>
+                                  </p:childTnLst>
+                                </p:cTn>
+                              </p:par>
+                            </p:childTnLst>
+                          </p:cTn>
+                        </p:par>
+                      </p:childTnLst>
+                    </p:cTn>
+                  </p:par>
+                  <p:par>
+                    <p:cTn id="15" fill="hold">
+                      <p:stCondLst>
+                        <p:cond delay="indefinite"/>
+                      </p:stCondLst>
+                      <p:childTnLst>
+                        <p:par>
+                          <p:cTn id="16" fill="hold">
+                            <p:stCondLst>
+                              <p:cond delay="0"/>
+                            </p:stCondLst>
+                            <p:childTnLst>
+                              <p:par>
+                                <p:cTn id="17" presetID="1" presetClass="entr" presetSubtype="0" fill="hold" grpId="0" nodeType="clickEffect">
+                                  <p:stCondLst>
+                                    <p:cond delay="0"/>
+                                  </p:stCondLst>
+                                  <p:childTnLst>
+                                    <p:set>
+                                      <p:cBhvr>
+                                        <p:cTn id="18" dur="1" fill="hold">
+                                          <p:stCondLst>
+                                            <p:cond delay="0"/>
+                                          </p:stCondLst>
+                                        </p:cTn>
+                                        <p:tgtEl>
+                                          <p:spTgt spid="13"/>
+                                        </p:tgtEl>
+                                        <p:attrNameLst>
+                                          <p:attrName>style.visibility</p:attrName>
+                                        </p:attrNameLst>
+                                      </p:cBhvr>
+                                      <p:to>
+                                        <p:strVal val="visible"/>
+                                      </p:to>
+                                    </p:set>
+                                  </p:childTnLst>
+                                </p:cTn>
+                              </p:par>
+                              <p:par>
+                                <p:cTn id="19" presetID="1" presetClass="entr" presetSubtype="0" fill="hold" nodeType="withEffect">
+                                  <p:stCondLst>
+                                    <p:cond delay="0"/>
+                                  </p:stCondLst>
+                                  <p:childTnLst>
+                                    <p:set>
+                                      <p:cBhvr>
+                                        <p:cTn id="20" dur="1" fill="hold">
+                                          <p:stCondLst>
+                                            <p:cond delay="0"/>
+                                          </p:stCondLst>
+                                        </p:cTn>
+                                        <p:tgtEl>
+                                          <p:spTgt spid="11"/>
+                                        </p:tgtEl>
+                                        <p:attrNameLst>
+                                          <p:attrName>style.visibility</p:attrName>
+                                        </p:attrNameLst>
+                                      </p:cBhvr>
+                                      <p:to>
+                                        <p:strVal val="visible"/>
+                                      </p:to>
+                                    </p:set>
+                                  </p:childTnLst>
+                                </p:cTn>
+                              </p:par>
+                            </p:childTnLst>
+                          </p:cTn>
+                        </p:par>
+                      </p:childTnLst>
+                    </p:cTn>
+                  </p:par>
+                  <p:par>
+                    <p:cTn id="21" fill="hold">
+                      <p:stCondLst>
+                        <p:cond delay="indefinite"/>
+                      </p:stCondLst>
+                      <p:childTnLst>
+                        <p:par>
+                          <p:cTn id="22" fill="hold">
+                            <p:stCondLst>
+                              <p:cond delay="0"/>
+                            </p:stCondLst>
+                            <p:childTnLst>
+                              <p:par>
+                                <p:cTn id="23" presetID="1" presetClass="entr" presetSubtype="0" fill="hold" grpId="0" nodeType="clickEffect">
+                                  <p:stCondLst>
+                                    <p:cond delay="0"/>
+                                  </p:stCondLst>
+                                  <p:childTnLst>
+                                    <p:set>
+                                      <p:cBhvr>
+                                        <p:cTn id="24" dur="1" fill="hold">
+                                          <p:stCondLst>
+                                            <p:cond delay="0"/>
+                                          </p:stCondLst>
+                                        </p:cTn>
+                                        <p:tgtEl>
+                                          <p:spTgt spid="17"/>
+                                        </p:tgtEl>
+                                        <p:attrNameLst>
+                                          <p:attrName>style.visibility</p:attrName>
+                                        </p:attrNameLst>
+                                      </p:cBhvr>
+                                      <p:to>
+                                        <p:strVal val="visible"/>
+                                      </p:to>
+                                    </p:set>
+                                  </p:childTnLst>
+                                </p:cTn>
+                              </p:par>
+                              <p:par>
+                                <p:cTn id="25" presetID="1" presetClass="entr" presetSubtype="0" fill="hold" nodeType="withEffect">
+                                  <p:stCondLst>
+                                    <p:cond delay="0"/>
+                                  </p:stCondLst>
+                                  <p:childTnLst>
+                                    <p:set>
+                                      <p:cBhvr>
+                                        <p:cTn id="26" dur="1" fill="hold">
+                                          <p:stCondLst>
+                                            <p:cond delay="0"/>
+                                          </p:stCondLst>
+                                        </p:cTn>
+                                        <p:tgtEl>
+                                          <p:spTgt spid="15"/>
+                                        </p:tgtEl>
+                                        <p:attrNameLst>
+                                          <p:attrName>style.visibility</p:attrName>
+                                        </p:attrNameLst>
+                                      </p:cBhvr>
+                                      <p:to>
+                                        <p:strVal val="visible"/>
+                                      </p:to>
+                                    </p:set>
+                                  </p:childTnLst>
+                                </p:cTn>
+                              </p:par>
+                            </p:childTnLst>
+                          </p:cTn>
+                        </p:par>
+                      </p:childTnLst>
+                    </p:cTn>
+                  </p:par>
+                  <p:par>
+                    <p:cTn id="27" fill="hold">
+                      <p:stCondLst>
+                        <p:cond delay="indefinite"/>
+                      </p:stCondLst>
+                      <p:childTnLst>
+                        <p:par>
+                          <p:cTn id="28" fill="hold">
+                            <p:stCondLst>
+                              <p:cond delay="0"/>
+                            </p:stCondLst>
+                            <p:childTnLst>
+                              <p:par>
+                                <p:cTn id="29" presetID="1" presetClass="entr" presetSubtype="0" fill="hold" nodeType="clickEffect">
+                                  <p:stCondLst>
+                                    <p:cond delay="0"/>
+                                  </p:stCondLst>
+                                  <p:childTnLst>
+                                    <p:set>
+                                      <p:cBhvr>
+                                        <p:cTn id="30" dur="1" fill="hold">
+                                          <p:stCondLst>
+                                            <p:cond delay="0"/>
+                                          </p:stCondLst>
+                                        </p:cTn>
+                                        <p:tgtEl>
+                                          <p:spTgt spid="12"/>
+                                        </p:tgtEl>
+                                        <p:attrNameLst>
+                                          <p:attrName>style.visibility</p:attrName>
+                                        </p:attrNameLst>
+                                      </p:cBhvr>
+                                      <p:to>
+                                        <p:strVal val="visible"/>
+                                      </p:to>
+                                    </p:set>
+                                  </p:childTnLst>
+                                </p:cTn>
+                              </p:par>
+                              <p:par>
+                                <p:cTn id="31" presetID="1" presetClass="entr" presetSubtype="0" fill="hold" grpId="0" nodeType="withEffect">
+                                  <p:stCondLst>
+                                    <p:cond delay="0"/>
+                                  </p:stCondLst>
+                                  <p:childTnLst>
+                                    <p:set>
+                                      <p:cBhvr>
+                                        <p:cTn id="32" dur="1" fill="hold">
+                                          <p:stCondLst>
+                                            <p:cond delay="0"/>
+                                          </p:stCondLst>
+                                        </p:cTn>
+                                        <p:tgtEl>
+                                          <p:spTgt spid="14"/>
+                                        </p:tgtEl>
+                                        <p:attrNameLst>
+                                          <p:attrName>style.visibility</p:attrName>
+                                        </p:attrNameLst>
+                                      </p:cBhvr>
+                                      <p:to>
+                                        <p:strVal val="visible"/>
+                                      </p:to>
+                                    </p:set>
+                                  </p:childTnLst>
+                                </p:cTn>
+                              </p:par>
+                            </p:childTnLst>
+                          </p:cTn>
+                        </p:par>
+                      </p:childTnLst>
+                    </p:cTn>
+                  </p:par>
+                  <p:par>
+                    <p:cTn id="33" fill="hold">
+                      <p:stCondLst>
+                        <p:cond delay="indefinite"/>
+                      </p:stCondLst>
+                      <p:childTnLst>
+                        <p:par>
+                          <p:cTn id="34" fill="hold">
+                            <p:stCondLst>
+                              <p:cond delay="0"/>
+                            </p:stCondLst>
+                            <p:childTnLst>
+                              <p:par>
+                                <p:cTn id="35" presetID="1" presetClass="entr" presetSubtype="0" fill="hold" nodeType="clickEffect">
+                                  <p:stCondLst>
+                                    <p:cond delay="0"/>
+                                  </p:stCondLst>
+                                  <p:childTnLst>
+                                    <p:set>
+                                      <p:cBhvr>
+                                        <p:cTn id="36" dur="1" fill="hold">
+                                          <p:stCondLst>
+                                            <p:cond delay="0"/>
+                                          </p:stCondLst>
+                                        </p:cTn>
+                                        <p:tgtEl>
+                                          <p:spTgt spid="27"/>
+                                        </p:tgtEl>
+                                        <p:attrNameLst>
+                                          <p:attrName>style.visibility</p:attrName>
+                                        </p:attrNameLst>
+                                      </p:cBhvr>
+                                      <p:to>
+                                        <p:strVal val="visible"/>
+                                      </p:to>
+                                    </p:set>
+                                  </p:childTnLst>
+                                </p:cTn>
+                              </p:par>
+                            </p:childTnLst>
+                          </p:cTn>
+                        </p:par>
+                      </p:childTnLst>
+                    </p:cTn>
+                  </p:par>
+                </p:childTnLst>
+              </p:cTn>
+              <p:prevCondLst>
+                <p:cond evt="onPrev" delay="0">
+                  <p:tgtEl>
+                    <p:sldTgt/>
+                  </p:tgtEl>
+                </p:cond>
+              </p:prevCondLst>
+              <p:nextCondLst>
+                <p:cond evt="onNext" delay="0">
+                  <p:tgtEl>
+                    <p:sldTgt/>
+                  </p:tgtEl>
+                </p:cond>
+              </p:nextCondLst>
+            </p:seq>
+          </p:childTnLst>
+        </p:cTn>
+      </p:par>
+    </p:tnLst>
+    <p:bldLst>
+      <p:bldP spid="5" grpId="0" animBg="1"/>
+      <p:bldP spid="4" grpId="0" animBg="1"/>
+      <p:bldP spid="13" grpId="0"/>
+      <p:bldP spid="14" grpId="0"/>
+      <p:bldP spid="6" grpId="0"/>
+      <p:bldP spid="25" grpId="0"/>
+      <p:bldP spid="17" grpId="0"/>
+    </p:bldLst>
+  </p:timing>
+</p:sld>
+</file>
+
+<file path=ppt/slides/slide9.xml><?xml version="1.0" encoding="utf-8"?>
+<p:sld xmlns:a="http://schemas.openxmlformats.org/drawingml/2006/main" xmlns:r="http://schemas.openxmlformats.org/officeDocument/2006/relationships" xmlns:p="http://schemas.openxmlformats.org/presentationml/2006/main">
+  <p:cSld>
+    <p:spTree>
+      <p:nvGrpSpPr>
+        <p:cNvPr id="1" name="Shape 215"/>
+        <p:cNvGrpSpPr/>
+        <p:nvPr/>
+      </p:nvGrpSpPr>
+      <p:grpSpPr>
+        <a:xfrm>
+          <a:off x="0" y="0"/>
+          <a:ext cx="0" cy="0"/>
+          <a:chOff x="0" y="0"/>
+          <a:chExt cx="0" cy="0"/>
+        </a:xfrm>
+      </p:grpSpPr>
+      <p:sp>
+        <p:nvSpPr>
+          <p:cNvPr id="218" name="Google Shape;218;p34"/>
+          <p:cNvSpPr/>
+          <p:nvPr/>
+        </p:nvSpPr>
+        <p:spPr>
+          <a:xfrm>
+            <a:off x="5602566" y="2177140"/>
+            <a:ext cx="3251200" cy="3566000"/>
+          </a:xfrm>
+          <a:prstGeom prst="roundRect">
+            <a:avLst>
+              <a:gd name="adj" fmla="val 16667"/>
+            </a:avLst>
+          </a:prstGeom>
+          <a:solidFill>
+            <a:srgbClr val="DFE3E5"/>
+          </a:solidFill>
+          <a:ln w="9525" cap="flat" cmpd="sng">
+            <a:solidFill>
+              <a:srgbClr val="335B74"/>
+            </a:solidFill>
+            <a:prstDash val="solid"/>
+            <a:round/>
+            <a:headEnd type="none" w="sm" len="sm"/>
+            <a:tailEnd type="none" w="sm" len="sm"/>
+          </a:ln>
+        </p:spPr>
+        <p:txBody>
+          <a:bodyPr spcFirstLastPara="1" wrap="square" lIns="121900" tIns="121900" rIns="121900" bIns="121900" anchor="ctr" anchorCtr="0">
+            <a:noAutofit/>
+          </a:bodyPr>
+          <a:lstStyle>
+            <a:defPPr marR="0" lvl="0" algn="l" rtl="0">
+              <a:lnSpc>
+                <a:spcPct val="100000"/>
+              </a:lnSpc>
+              <a:spcBef>
+                <a:spcPts val="0"/>
+              </a:spcBef>
+              <a:spcAft>
+                <a:spcPts val="0"/>
+              </a:spcAft>
+            </a:defPPr>
+            <a:lvl1pPr marR="0" lvl="0" algn="l" rtl="0">
+              <a:lnSpc>
+                <a:spcPct val="100000"/>
+              </a:lnSpc>
+              <a:spcBef>
+                <a:spcPts val="0"/>
+              </a:spcBef>
+              <a:spcAft>
+                <a:spcPts val="0"/>
+              </a:spcAft>
+              <a:buClr>
+                <a:srgbClr val="000000"/>
+              </a:buClr>
+              <a:buFont typeface="Arial"/>
+              <a:defRPr sz="1867" b="0" i="0" u="none" strike="noStrike" cap="none">
+                <a:solidFill>
+                  <a:srgbClr val="000000"/>
+                </a:solidFill>
+                <a:latin typeface="Arial"/>
+                <a:ea typeface="Arial"/>
+                <a:cs typeface="Arial"/>
+                <a:sym typeface="Arial"/>
+              </a:defRPr>
+            </a:lvl1pPr>
+            <a:lvl2pPr marR="0" lvl="1" algn="l" rtl="0">
+              <a:lnSpc>
+                <a:spcPct val="100000"/>
+              </a:lnSpc>
+              <a:spcBef>
+                <a:spcPts val="0"/>
+              </a:spcBef>
+              <a:spcAft>
+                <a:spcPts val="0"/>
+              </a:spcAft>
+              <a:buClr>
+                <a:srgbClr val="000000"/>
+              </a:buClr>
+              <a:buFont typeface="Arial"/>
+              <a:defRPr sz="1867" b="0" i="0" u="none" strike="noStrike" cap="none">
+                <a:solidFill>
+                  <a:srgbClr val="000000"/>
+                </a:solidFill>
+                <a:latin typeface="Arial"/>
+                <a:ea typeface="Arial"/>
+                <a:cs typeface="Arial"/>
+                <a:sym typeface="Arial"/>
+              </a:defRPr>
+            </a:lvl2pPr>
+            <a:lvl3pPr marR="0" lvl="2" algn="l" rtl="0">
+              <a:lnSpc>
+                <a:spcPct val="100000"/>
+              </a:lnSpc>
+              <a:spcBef>
+                <a:spcPts val="0"/>
+              </a:spcBef>
+              <a:spcAft>
+                <a:spcPts val="0"/>
+              </a:spcAft>
+              <a:buClr>
+                <a:srgbClr val="000000"/>
+              </a:buClr>
+              <a:buFont typeface="Arial"/>
+              <a:defRPr sz="1867" b="0" i="0" u="none" strike="noStrike" cap="none">
+                <a:solidFill>
+                  <a:srgbClr val="000000"/>
+                </a:solidFill>
+                <a:latin typeface="Arial"/>
+                <a:ea typeface="Arial"/>
+                <a:cs typeface="Arial"/>
+                <a:sym typeface="Arial"/>
+              </a:defRPr>
+            </a:lvl3pPr>
+            <a:lvl4pPr marR="0" lvl="3" algn="l" rtl="0">
+              <a:lnSpc>
+                <a:spcPct val="100000"/>
+              </a:lnSpc>
+              <a:spcBef>
+                <a:spcPts val="0"/>
+              </a:spcBef>
+              <a:spcAft>
+                <a:spcPts val="0"/>
+              </a:spcAft>
+              <a:buClr>
+                <a:srgbClr val="000000"/>
+              </a:buClr>
+              <a:buFont typeface="Arial"/>
+              <a:defRPr sz="1867" b="0" i="0" u="none" strike="noStrike" cap="none">
+                <a:solidFill>
+                  <a:srgbClr val="000000"/>
+                </a:solidFill>
+                <a:latin typeface="Arial"/>
+                <a:ea typeface="Arial"/>
+                <a:cs typeface="Arial"/>
+                <a:sym typeface="Arial"/>
+              </a:defRPr>
+            </a:lvl4pPr>
+            <a:lvl5pPr marR="0" lvl="4" algn="l" rtl="0">
+              <a:lnSpc>
+                <a:spcPct val="100000"/>
+              </a:lnSpc>
+              <a:spcBef>
+                <a:spcPts val="0"/>
+              </a:spcBef>
+              <a:spcAft>
+                <a:spcPts val="0"/>
+              </a:spcAft>
+              <a:buClr>
+                <a:srgbClr val="000000"/>
+              </a:buClr>
+              <a:buFont typeface="Arial"/>
+              <a:defRPr sz="1867" b="0" i="0" u="none" strike="noStrike" cap="none">
+                <a:solidFill>
+                  <a:srgbClr val="000000"/>
+                </a:solidFill>
+                <a:latin typeface="Arial"/>
+                <a:ea typeface="Arial"/>
+                <a:cs typeface="Arial"/>
+                <a:sym typeface="Arial"/>
+              </a:defRPr>
+            </a:lvl5pPr>
+            <a:lvl6pPr marR="0" lvl="5" algn="l" rtl="0">
+              <a:lnSpc>
+                <a:spcPct val="100000"/>
+              </a:lnSpc>
+              <a:spcBef>
+                <a:spcPts val="0"/>
+              </a:spcBef>
+              <a:spcAft>
+                <a:spcPts val="0"/>
+              </a:spcAft>
+              <a:buClr>
+                <a:srgbClr val="000000"/>
+              </a:buClr>
+              <a:buFont typeface="Arial"/>
+              <a:defRPr sz="1867" b="0" i="0" u="none" strike="noStrike" cap="none">
+                <a:solidFill>
+                  <a:srgbClr val="000000"/>
+                </a:solidFill>
+                <a:latin typeface="Arial"/>
+                <a:ea typeface="Arial"/>
+                <a:cs typeface="Arial"/>
+                <a:sym typeface="Arial"/>
+              </a:defRPr>
+            </a:lvl6pPr>
+            <a:lvl7pPr marR="0" lvl="6" algn="l" rtl="0">
+              <a:lnSpc>
+                <a:spcPct val="100000"/>
+              </a:lnSpc>
+              <a:spcBef>
+                <a:spcPts val="0"/>
+              </a:spcBef>
+              <a:spcAft>
+                <a:spcPts val="0"/>
+              </a:spcAft>
+              <a:buClr>
+                <a:srgbClr val="000000"/>
+              </a:buClr>
+              <a:buFont typeface="Arial"/>
+              <a:defRPr sz="1867" b="0" i="0" u="none" strike="noStrike" cap="none">
+                <a:solidFill>
+                  <a:srgbClr val="000000"/>
+                </a:solidFill>
+                <a:latin typeface="Arial"/>
+                <a:ea typeface="Arial"/>
+                <a:cs typeface="Arial"/>
+                <a:sym typeface="Arial"/>
+              </a:defRPr>
+            </a:lvl7pPr>
+            <a:lvl8pPr marR="0" lvl="7" algn="l" rtl="0">
+              <a:lnSpc>
+                <a:spcPct val="100000"/>
+              </a:lnSpc>
+              <a:spcBef>
+                <a:spcPts val="0"/>
+              </a:spcBef>
+              <a:spcAft>
+                <a:spcPts val="0"/>
+              </a:spcAft>
+              <a:buClr>
+                <a:srgbClr val="000000"/>
+              </a:buClr>
+              <a:buFont typeface="Arial"/>
+              <a:defRPr sz="1867" b="0" i="0" u="none" strike="noStrike" cap="none">
+                <a:solidFill>
+                  <a:srgbClr val="000000"/>
+                </a:solidFill>
+                <a:latin typeface="Arial"/>
+                <a:ea typeface="Arial"/>
+                <a:cs typeface="Arial"/>
+                <a:sym typeface="Arial"/>
+              </a:defRPr>
+            </a:lvl8pPr>
+            <a:lvl9pPr marR="0" lvl="8" algn="l" rtl="0">
+              <a:lnSpc>
+                <a:spcPct val="100000"/>
+              </a:lnSpc>
+              <a:spcBef>
+                <a:spcPts val="0"/>
+              </a:spcBef>
+              <a:spcAft>
+                <a:spcPts val="0"/>
+              </a:spcAft>
+              <a:buClr>
+                <a:srgbClr val="000000"/>
+              </a:buClr>
+              <a:buFont typeface="Arial"/>
+              <a:defRPr sz="1867" b="0" i="0" u="none" strike="noStrike" cap="none">
+                <a:solidFill>
+                  <a:srgbClr val="000000"/>
+                </a:solidFill>
+                <a:latin typeface="Arial"/>
+                <a:ea typeface="Arial"/>
+                <a:cs typeface="Arial"/>
+                <a:sym typeface="Arial"/>
+              </a:defRPr>
+            </a:lvl9pPr>
+          </a:lstStyle>
+          <a:p>
+            <a:pPr marL="0" lvl="0" indent="0" algn="ctr" rtl="0">
+              <a:spcBef>
+                <a:spcPts val="0"/>
+              </a:spcBef>
+              <a:spcAft>
+                <a:spcPts val="0"/>
+              </a:spcAft>
+              <a:buNone/>
+            </a:pPr>
+            <a:endParaRPr sz="2489">
+              <a:latin typeface="Calibri"/>
+              <a:ea typeface="Calibri"/>
+              <a:cs typeface="Calibri"/>
+              <a:sym typeface="Calibri"/>
+            </a:endParaRPr>
+          </a:p>
+        </p:txBody>
+      </p:sp>
+      <p:graphicFrame>
+        <p:nvGraphicFramePr>
+          <p:cNvPr id="219" name="Google Shape;219;p34"/>
+          <p:cNvGraphicFramePr/>
+          <p:nvPr/>
+        </p:nvGraphicFramePr>
+        <p:xfrm>
+          <a:off x="382638" y="2375340"/>
+          <a:ext cx="825800" cy="3200160"/>
+        </p:xfrm>
+        <a:graphic>
+          <a:graphicData uri="http://schemas.openxmlformats.org/drawingml/2006/table">
+            <a:tbl>
+              <a:tblPr>
+                <a:noFill/>
+              </a:tblPr>
+              <a:tblGrid>
+                <a:gridCol w="825800">
+                  <a:extLst>
+                    <a:ext uri="{9D8B030D-6E8A-4147-A177-3AD203B41FA5}">
+                      <a16:colId xmlns:a16="http://schemas.microsoft.com/office/drawing/2014/main" val="20000"/>
+                    </a:ext>
+                  </a:extLst>
+                </a:gridCol>
+              </a:tblGrid>
+              <a:tr h="528280">
+                <a:tc>
+                  <a:txBody>
+                    <a:bodyPr/>
+                    <a:lstStyle/>
+                    <a:p>
+                      <a:pPr marL="0" lvl="0" indent="0" algn="ctr" rtl="0">
+                        <a:spcBef>
+                          <a:spcPts val="0"/>
+                        </a:spcBef>
+                        <a:spcAft>
+                          <a:spcPts val="0"/>
+                        </a:spcAft>
+                        <a:buNone/>
+                      </a:pPr>
+                      <a:r>
+                        <a:rPr lang="en-GB" sz="1900"/>
+                        <a:t>‘the’</a:t>
+                      </a:r>
+                      <a:endParaRPr sz="1900"/>
+                    </a:p>
+                  </a:txBody>
+                  <a:tcPr marL="121900" marR="121900" marT="121900" marB="121900"/>
+                </a:tc>
+                <a:extLst>
+                  <a:ext uri="{0D108BD9-81ED-4DB2-BD59-A6C34878D82A}">
+                    <a16:rowId xmlns:a16="http://schemas.microsoft.com/office/drawing/2014/main" val="10000"/>
+                  </a:ext>
+                </a:extLst>
+              </a:tr>
+              <a:tr h="528280">
+                <a:tc>
+                  <a:txBody>
+                    <a:bodyPr/>
+                    <a:lstStyle/>
+                    <a:p>
+                      <a:pPr marL="0" lvl="0" indent="0" algn="ctr" rtl="0">
+                        <a:spcBef>
+                          <a:spcPts val="0"/>
+                        </a:spcBef>
+                        <a:spcAft>
+                          <a:spcPts val="0"/>
+                        </a:spcAft>
+                        <a:buNone/>
+                      </a:pPr>
+                      <a:r>
+                        <a:rPr lang="en-GB" sz="1900"/>
+                        <a:t>‘cat’</a:t>
+                      </a:r>
+                      <a:endParaRPr sz="1900"/>
+                    </a:p>
+                  </a:txBody>
+                  <a:tcPr marL="121900" marR="121900" marT="121900" marB="121900"/>
+                </a:tc>
+                <a:extLst>
+                  <a:ext uri="{0D108BD9-81ED-4DB2-BD59-A6C34878D82A}">
+                    <a16:rowId xmlns:a16="http://schemas.microsoft.com/office/drawing/2014/main" val="10001"/>
+                  </a:ext>
+                </a:extLst>
+              </a:tr>
+              <a:tr h="528280">
+                <a:tc>
+                  <a:txBody>
+                    <a:bodyPr/>
+                    <a:lstStyle/>
+                    <a:p>
+                      <a:pPr marL="0" lvl="0" indent="0" algn="ctr" rtl="0">
+                        <a:spcBef>
+                          <a:spcPts val="0"/>
+                        </a:spcBef>
+                        <a:spcAft>
+                          <a:spcPts val="0"/>
+                        </a:spcAft>
+                        <a:buNone/>
+                      </a:pPr>
+                      <a:r>
+                        <a:rPr lang="en-GB" sz="1900"/>
+                        <a:t>‘sat’</a:t>
+                      </a:r>
+                      <a:endParaRPr sz="1900"/>
+                    </a:p>
+                  </a:txBody>
+                  <a:tcPr marL="121900" marR="121900" marT="121900" marB="121900"/>
+                </a:tc>
+                <a:extLst>
+                  <a:ext uri="{0D108BD9-81ED-4DB2-BD59-A6C34878D82A}">
+                    <a16:rowId xmlns:a16="http://schemas.microsoft.com/office/drawing/2014/main" val="10002"/>
+                  </a:ext>
+                </a:extLst>
+              </a:tr>
+              <a:tr h="528280">
+                <a:tc>
+                  <a:txBody>
+                    <a:bodyPr/>
+                    <a:lstStyle/>
+                    <a:p>
+                      <a:pPr marL="0" lvl="0" indent="0" algn="ctr" rtl="0">
+                        <a:spcBef>
+                          <a:spcPts val="0"/>
+                        </a:spcBef>
+                        <a:spcAft>
+                          <a:spcPts val="0"/>
+                        </a:spcAft>
+                        <a:buNone/>
+                      </a:pPr>
+                      <a:r>
+                        <a:rPr lang="en-GB" sz="1900"/>
+                        <a:t>‘on’</a:t>
+                      </a:r>
+                      <a:endParaRPr sz="1900"/>
+                    </a:p>
+                  </a:txBody>
+                  <a:tcPr marL="121900" marR="121900" marT="121900" marB="121900"/>
+                </a:tc>
+                <a:extLst>
+                  <a:ext uri="{0D108BD9-81ED-4DB2-BD59-A6C34878D82A}">
+                    <a16:rowId xmlns:a16="http://schemas.microsoft.com/office/drawing/2014/main" val="10003"/>
+                  </a:ext>
+                </a:extLst>
+              </a:tr>
+              <a:tr h="528280">
+                <a:tc>
+                  <a:txBody>
+                    <a:bodyPr/>
+                    <a:lstStyle/>
+                    <a:p>
+                      <a:pPr marL="0" lvl="0" indent="0" algn="ctr" rtl="0">
+                        <a:spcBef>
+                          <a:spcPts val="0"/>
+                        </a:spcBef>
+                        <a:spcAft>
+                          <a:spcPts val="0"/>
+                        </a:spcAft>
+                        <a:buNone/>
+                      </a:pPr>
+                      <a:r>
+                        <a:rPr lang="en-GB" sz="1900"/>
+                        <a:t>‘the’</a:t>
+                      </a:r>
+                      <a:endParaRPr sz="1900"/>
+                    </a:p>
+                  </a:txBody>
+                  <a:tcPr marL="121900" marR="121900" marT="121900" marB="121900"/>
+                </a:tc>
+                <a:extLst>
+                  <a:ext uri="{0D108BD9-81ED-4DB2-BD59-A6C34878D82A}">
+                    <a16:rowId xmlns:a16="http://schemas.microsoft.com/office/drawing/2014/main" val="10004"/>
+                  </a:ext>
+                </a:extLst>
+              </a:tr>
+              <a:tr h="528280">
+                <a:tc>
+                  <a:txBody>
+                    <a:bodyPr/>
+                    <a:lstStyle/>
+                    <a:p>
+                      <a:pPr marL="0" lvl="0" indent="0" algn="ctr" rtl="0">
+                        <a:spcBef>
+                          <a:spcPts val="0"/>
+                        </a:spcBef>
+                        <a:spcAft>
+                          <a:spcPts val="0"/>
+                        </a:spcAft>
+                        <a:buNone/>
+                      </a:pPr>
+                      <a:r>
+                        <a:rPr lang="en-GB" sz="1900"/>
+                        <a:t>‘mat’</a:t>
+                      </a:r>
+                      <a:endParaRPr sz="1900"/>
+                    </a:p>
+                  </a:txBody>
+                  <a:tcPr marL="121900" marR="121900" marT="121900" marB="121900"/>
+                </a:tc>
+                <a:extLst>
+                  <a:ext uri="{0D108BD9-81ED-4DB2-BD59-A6C34878D82A}">
+                    <a16:rowId xmlns:a16="http://schemas.microsoft.com/office/drawing/2014/main" val="10005"/>
+                  </a:ext>
+                </a:extLst>
+              </a:tr>
+            </a:tbl>
+          </a:graphicData>
+        </a:graphic>
+      </p:graphicFrame>
+      <p:graphicFrame>
+        <p:nvGraphicFramePr>
+          <p:cNvPr id="220" name="Google Shape;220;p34"/>
+          <p:cNvGraphicFramePr/>
+          <p:nvPr/>
+        </p:nvGraphicFramePr>
+        <p:xfrm>
+          <a:off x="2052972" y="1847074"/>
+          <a:ext cx="1158967" cy="4266880"/>
+        </p:xfrm>
+        <a:graphic>
+          <a:graphicData uri="http://schemas.openxmlformats.org/drawingml/2006/table">
+            <a:tbl>
+              <a:tblPr>
+                <a:noFill/>
+              </a:tblPr>
+              <a:tblGrid>
+                <a:gridCol w="1158967">
+                  <a:extLst>
+                    <a:ext uri="{9D8B030D-6E8A-4147-A177-3AD203B41FA5}">
+                      <a16:colId xmlns:a16="http://schemas.microsoft.com/office/drawing/2014/main" val="20000"/>
+                    </a:ext>
+                  </a:extLst>
+                </a:gridCol>
+              </a:tblGrid>
+              <a:tr h="528280">
+                <a:tc>
+                  <a:txBody>
+                    <a:bodyPr/>
+                    <a:lstStyle/>
+                    <a:p>
+                      <a:pPr marL="0" lvl="0" indent="0" algn="ctr" rtl="0">
+                        <a:spcBef>
+                          <a:spcPts val="0"/>
+                        </a:spcBef>
+                        <a:spcAft>
+                          <a:spcPts val="0"/>
+                        </a:spcAft>
+                        <a:buNone/>
+                      </a:pPr>
+                      <a:r>
+                        <a:rPr lang="en-GB" sz="1900"/>
+                        <a:t>‘[CLS]’</a:t>
+                      </a:r>
+                      <a:endParaRPr sz="1900"/>
+                    </a:p>
+                  </a:txBody>
+                  <a:tcPr marL="121900" marR="121900" marT="121900" marB="121900"/>
+                </a:tc>
+                <a:extLst>
+                  <a:ext uri="{0D108BD9-81ED-4DB2-BD59-A6C34878D82A}">
+                    <a16:rowId xmlns:a16="http://schemas.microsoft.com/office/drawing/2014/main" val="10000"/>
+                  </a:ext>
+                </a:extLst>
+              </a:tr>
+              <a:tr h="528280">
+                <a:tc>
+                  <a:txBody>
+                    <a:bodyPr/>
+                    <a:lstStyle/>
+                    <a:p>
+                      <a:pPr marL="0" lvl="0" indent="0" algn="ctr" rtl="0">
+                        <a:spcBef>
+                          <a:spcPts val="0"/>
+                        </a:spcBef>
+                        <a:spcAft>
+                          <a:spcPts val="0"/>
+                        </a:spcAft>
+                        <a:buNone/>
+                      </a:pPr>
+                      <a:r>
+                        <a:rPr lang="en-GB" sz="1900"/>
+                        <a:t>‘the’</a:t>
+                      </a:r>
+                      <a:endParaRPr sz="1900"/>
+                    </a:p>
+                  </a:txBody>
+                  <a:tcPr marL="121900" marR="121900" marT="121900" marB="121900"/>
+                </a:tc>
+                <a:extLst>
+                  <a:ext uri="{0D108BD9-81ED-4DB2-BD59-A6C34878D82A}">
+                    <a16:rowId xmlns:a16="http://schemas.microsoft.com/office/drawing/2014/main" val="10001"/>
+                  </a:ext>
+                </a:extLst>
+              </a:tr>
+              <a:tr h="528280">
+                <a:tc>
+                  <a:txBody>
+                    <a:bodyPr/>
+                    <a:lstStyle/>
+                    <a:p>
+                      <a:pPr marL="0" lvl="0" indent="0" algn="ctr" rtl="0">
+                        <a:spcBef>
+                          <a:spcPts val="0"/>
+                        </a:spcBef>
+                        <a:spcAft>
+                          <a:spcPts val="0"/>
+                        </a:spcAft>
+                        <a:buNone/>
+                      </a:pPr>
+                      <a:r>
+                        <a:rPr lang="en-GB" sz="1900"/>
+                        <a:t>‘cat’</a:t>
+                      </a:r>
+                      <a:endParaRPr sz="1900"/>
+                    </a:p>
+                  </a:txBody>
+                  <a:tcPr marL="121900" marR="121900" marT="121900" marB="121900"/>
+                </a:tc>
+                <a:extLst>
+                  <a:ext uri="{0D108BD9-81ED-4DB2-BD59-A6C34878D82A}">
+                    <a16:rowId xmlns:a16="http://schemas.microsoft.com/office/drawing/2014/main" val="10002"/>
+                  </a:ext>
+                </a:extLst>
+              </a:tr>
+              <a:tr h="528280">
+                <a:tc>
+                  <a:txBody>
+                    <a:bodyPr/>
+                    <a:lstStyle/>
+                    <a:p>
+                      <a:pPr marL="0" lvl="0" indent="0" algn="ctr" rtl="0">
+                        <a:spcBef>
+                          <a:spcPts val="0"/>
+                        </a:spcBef>
+                        <a:spcAft>
+                          <a:spcPts val="0"/>
+                        </a:spcAft>
+                        <a:buNone/>
+                      </a:pPr>
+                      <a:r>
+                        <a:rPr lang="en-GB" sz="1900"/>
+                        <a:t>‘[MASK]’</a:t>
+                      </a:r>
+                      <a:endParaRPr sz="1900"/>
+                    </a:p>
+                  </a:txBody>
+                  <a:tcPr marL="121900" marR="121900" marT="121900" marB="121900"/>
+                </a:tc>
+                <a:extLst>
+                  <a:ext uri="{0D108BD9-81ED-4DB2-BD59-A6C34878D82A}">
+                    <a16:rowId xmlns:a16="http://schemas.microsoft.com/office/drawing/2014/main" val="10003"/>
+                  </a:ext>
+                </a:extLst>
+              </a:tr>
+              <a:tr h="528280">
+                <a:tc>
+                  <a:txBody>
+                    <a:bodyPr/>
+                    <a:lstStyle/>
+                    <a:p>
+                      <a:pPr marL="0" lvl="0" indent="0" algn="ctr" rtl="0">
+                        <a:spcBef>
+                          <a:spcPts val="0"/>
+                        </a:spcBef>
+                        <a:spcAft>
+                          <a:spcPts val="0"/>
+                        </a:spcAft>
+                        <a:buNone/>
+                      </a:pPr>
+                      <a:r>
+                        <a:rPr lang="en-GB" sz="1900"/>
+                        <a:t>‘on’</a:t>
+                      </a:r>
+                      <a:endParaRPr sz="1900"/>
+                    </a:p>
+                  </a:txBody>
+                  <a:tcPr marL="121900" marR="121900" marT="121900" marB="121900"/>
+                </a:tc>
+                <a:extLst>
+                  <a:ext uri="{0D108BD9-81ED-4DB2-BD59-A6C34878D82A}">
+                    <a16:rowId xmlns:a16="http://schemas.microsoft.com/office/drawing/2014/main" val="10004"/>
+                  </a:ext>
+                </a:extLst>
+              </a:tr>
+              <a:tr h="528280">
+                <a:tc>
+                  <a:txBody>
+                    <a:bodyPr/>
+                    <a:lstStyle/>
+                    <a:p>
+                      <a:pPr marL="0" lvl="0" indent="0" algn="ctr" rtl="0">
+                        <a:spcBef>
+                          <a:spcPts val="0"/>
+                        </a:spcBef>
+                        <a:spcAft>
+                          <a:spcPts val="0"/>
+                        </a:spcAft>
+                        <a:buNone/>
+                      </a:pPr>
+                      <a:r>
+                        <a:rPr lang="en-GB" sz="1900"/>
+                        <a:t>‘the’</a:t>
+                      </a:r>
+                      <a:endParaRPr sz="1900"/>
+                    </a:p>
+                  </a:txBody>
+                  <a:tcPr marL="121900" marR="121900" marT="121900" marB="121900"/>
+                </a:tc>
+                <a:extLst>
+                  <a:ext uri="{0D108BD9-81ED-4DB2-BD59-A6C34878D82A}">
+                    <a16:rowId xmlns:a16="http://schemas.microsoft.com/office/drawing/2014/main" val="10005"/>
+                  </a:ext>
+                </a:extLst>
+              </a:tr>
+              <a:tr h="528280">
+                <a:tc>
+                  <a:txBody>
+                    <a:bodyPr/>
+                    <a:lstStyle/>
+                    <a:p>
+                      <a:pPr marL="0" lvl="0" indent="0" algn="ctr" rtl="0">
+                        <a:spcBef>
+                          <a:spcPts val="0"/>
+                        </a:spcBef>
+                        <a:spcAft>
+                          <a:spcPts val="0"/>
+                        </a:spcAft>
+                        <a:buNone/>
+                      </a:pPr>
+                      <a:r>
+                        <a:rPr lang="en-GB" sz="1900"/>
+                        <a:t>‘mat’</a:t>
+                      </a:r>
+                      <a:endParaRPr sz="1900"/>
+                    </a:p>
+                  </a:txBody>
+                  <a:tcPr marL="121900" marR="121900" marT="121900" marB="121900"/>
+                </a:tc>
+                <a:extLst>
+                  <a:ext uri="{0D108BD9-81ED-4DB2-BD59-A6C34878D82A}">
+                    <a16:rowId xmlns:a16="http://schemas.microsoft.com/office/drawing/2014/main" val="10006"/>
+                  </a:ext>
+                </a:extLst>
+              </a:tr>
+              <a:tr h="528280">
+                <a:tc>
+                  <a:txBody>
+                    <a:bodyPr/>
+                    <a:lstStyle/>
+                    <a:p>
+                      <a:pPr marL="0" lvl="0" indent="0" algn="ctr" rtl="0">
+                        <a:spcBef>
+                          <a:spcPts val="0"/>
+                        </a:spcBef>
+                        <a:spcAft>
+                          <a:spcPts val="0"/>
+                        </a:spcAft>
+                        <a:buNone/>
+                      </a:pPr>
+                      <a:r>
+                        <a:rPr lang="en-GB" sz="1900"/>
+                        <a:t>‘[SEP]’</a:t>
+                      </a:r>
+                      <a:endParaRPr sz="1900"/>
+                    </a:p>
+                  </a:txBody>
+                  <a:tcPr marL="121900" marR="121900" marT="121900" marB="121900"/>
+                </a:tc>
+                <a:extLst>
+                  <a:ext uri="{0D108BD9-81ED-4DB2-BD59-A6C34878D82A}">
+                    <a16:rowId xmlns:a16="http://schemas.microsoft.com/office/drawing/2014/main" val="10007"/>
+                  </a:ext>
+                </a:extLst>
+              </a:tr>
+            </a:tbl>
+          </a:graphicData>
+        </a:graphic>
+      </p:graphicFrame>
+      <p:graphicFrame>
+        <p:nvGraphicFramePr>
+          <p:cNvPr id="221" name="Google Shape;221;p34"/>
+          <p:cNvGraphicFramePr/>
+          <p:nvPr/>
+        </p:nvGraphicFramePr>
+        <p:xfrm>
+          <a:off x="4107705" y="1847074"/>
+          <a:ext cx="1062100" cy="4266880"/>
+        </p:xfrm>
+        <a:graphic>
+          <a:graphicData uri="http://schemas.openxmlformats.org/drawingml/2006/table">
+            <a:tbl>
+              <a:tblPr>
+                <a:noFill/>
+              </a:tblPr>
+              <a:tblGrid>
+                <a:gridCol w="1062100">
+                  <a:extLst>
+                    <a:ext uri="{9D8B030D-6E8A-4147-A177-3AD203B41FA5}">
+                      <a16:colId xmlns:a16="http://schemas.microsoft.com/office/drawing/2014/main" val="20000"/>
+                    </a:ext>
+                  </a:extLst>
+                </a:gridCol>
+              </a:tblGrid>
+              <a:tr h="528280">
+                <a:tc>
+                  <a:txBody>
+                    <a:bodyPr/>
+                    <a:lstStyle/>
+                    <a:p>
+                      <a:pPr marL="0" lvl="0" indent="0" algn="ctr" rtl="0">
+                        <a:spcBef>
+                          <a:spcPts val="0"/>
+                        </a:spcBef>
+                        <a:spcAft>
+                          <a:spcPts val="0"/>
+                        </a:spcAft>
+                        <a:buNone/>
+                      </a:pPr>
+                      <a:r>
+                        <a:rPr lang="en-GB" sz="1900"/>
+                        <a:t>101</a:t>
+                      </a:r>
+                      <a:endParaRPr sz="1900"/>
+                    </a:p>
+                  </a:txBody>
+                  <a:tcPr marL="121900" marR="121900" marT="121900" marB="121900"/>
+                </a:tc>
+                <a:extLst>
+                  <a:ext uri="{0D108BD9-81ED-4DB2-BD59-A6C34878D82A}">
+                    <a16:rowId xmlns:a16="http://schemas.microsoft.com/office/drawing/2014/main" val="10000"/>
+                  </a:ext>
+                </a:extLst>
+              </a:tr>
+              <a:tr h="528280">
+                <a:tc>
+                  <a:txBody>
+                    <a:bodyPr/>
+                    <a:lstStyle/>
+                    <a:p>
+                      <a:pPr marL="0" lvl="0" indent="0" algn="ctr" rtl="0">
+                        <a:spcBef>
+                          <a:spcPts val="0"/>
+                        </a:spcBef>
+                        <a:spcAft>
+                          <a:spcPts val="0"/>
+                        </a:spcAft>
+                        <a:buNone/>
+                      </a:pPr>
+                      <a:r>
+                        <a:rPr lang="en-GB" sz="1900"/>
+                        <a:t>1996</a:t>
+                      </a:r>
+                      <a:endParaRPr sz="1900"/>
+                    </a:p>
+                  </a:txBody>
+                  <a:tcPr marL="121900" marR="121900" marT="121900" marB="121900"/>
+                </a:tc>
+                <a:extLst>
+                  <a:ext uri="{0D108BD9-81ED-4DB2-BD59-A6C34878D82A}">
+                    <a16:rowId xmlns:a16="http://schemas.microsoft.com/office/drawing/2014/main" val="10001"/>
+                  </a:ext>
+                </a:extLst>
+              </a:tr>
+              <a:tr h="528280">
+                <a:tc>
+                  <a:txBody>
+                    <a:bodyPr/>
+                    <a:lstStyle/>
+                    <a:p>
+                      <a:pPr marL="0" lvl="0" indent="0" algn="ctr" rtl="0">
+                        <a:spcBef>
+                          <a:spcPts val="0"/>
+                        </a:spcBef>
+                        <a:spcAft>
+                          <a:spcPts val="0"/>
+                        </a:spcAft>
+                        <a:buNone/>
+                      </a:pPr>
+                      <a:r>
+                        <a:rPr lang="en-GB" sz="1900"/>
+                        <a:t>4937</a:t>
+                      </a:r>
+                      <a:endParaRPr sz="1900"/>
+                    </a:p>
+                  </a:txBody>
+                  <a:tcPr marL="121900" marR="121900" marT="121900" marB="121900"/>
+                </a:tc>
+                <a:extLst>
+                  <a:ext uri="{0D108BD9-81ED-4DB2-BD59-A6C34878D82A}">
+                    <a16:rowId xmlns:a16="http://schemas.microsoft.com/office/drawing/2014/main" val="10002"/>
+                  </a:ext>
+                </a:extLst>
+              </a:tr>
+              <a:tr h="528280">
+                <a:tc>
+                  <a:txBody>
+                    <a:bodyPr/>
+                    <a:lstStyle/>
+                    <a:p>
+                      <a:pPr marL="0" lvl="0" indent="0" algn="ctr" rtl="0">
+                        <a:spcBef>
+                          <a:spcPts val="0"/>
+                        </a:spcBef>
+                        <a:spcAft>
+                          <a:spcPts val="0"/>
+                        </a:spcAft>
+                        <a:buNone/>
+                      </a:pPr>
+                      <a:r>
+                        <a:rPr lang="en-GB" sz="1900"/>
+                        <a:t>103</a:t>
+                      </a:r>
+                      <a:endParaRPr sz="1900"/>
+                    </a:p>
+                  </a:txBody>
+                  <a:tcPr marL="121900" marR="121900" marT="121900" marB="121900"/>
+                </a:tc>
+                <a:extLst>
+                  <a:ext uri="{0D108BD9-81ED-4DB2-BD59-A6C34878D82A}">
+                    <a16:rowId xmlns:a16="http://schemas.microsoft.com/office/drawing/2014/main" val="10003"/>
+                  </a:ext>
+                </a:extLst>
+              </a:tr>
+              <a:tr h="528280">
+                <a:tc>
+                  <a:txBody>
+                    <a:bodyPr/>
+                    <a:lstStyle/>
+                    <a:p>
+                      <a:pPr marL="0" lvl="0" indent="0" algn="ctr" rtl="0">
+                        <a:spcBef>
+                          <a:spcPts val="0"/>
+                        </a:spcBef>
+                        <a:spcAft>
+                          <a:spcPts val="0"/>
+                        </a:spcAft>
+                        <a:buNone/>
+                      </a:pPr>
+                      <a:r>
+                        <a:rPr lang="en-GB" sz="1900"/>
+                        <a:t>2006</a:t>
+                      </a:r>
+                      <a:endParaRPr sz="1900"/>
+                    </a:p>
+                  </a:txBody>
+                  <a:tcPr marL="121900" marR="121900" marT="121900" marB="121900"/>
+                </a:tc>
+                <a:extLst>
+                  <a:ext uri="{0D108BD9-81ED-4DB2-BD59-A6C34878D82A}">
+                    <a16:rowId xmlns:a16="http://schemas.microsoft.com/office/drawing/2014/main" val="10004"/>
+                  </a:ext>
+                </a:extLst>
+              </a:tr>
+              <a:tr h="528280">
+                <a:tc>
+                  <a:txBody>
+                    <a:bodyPr/>
+                    <a:lstStyle/>
+                    <a:p>
+                      <a:pPr marL="0" lvl="0" indent="0" algn="ctr" rtl="0">
+                        <a:spcBef>
+                          <a:spcPts val="0"/>
+                        </a:spcBef>
+                        <a:spcAft>
+                          <a:spcPts val="0"/>
+                        </a:spcAft>
+                        <a:buNone/>
+                      </a:pPr>
+                      <a:r>
+                        <a:rPr lang="en-GB" sz="1900"/>
+                        <a:t>1996</a:t>
+                      </a:r>
+                      <a:endParaRPr sz="1900"/>
+                    </a:p>
+                  </a:txBody>
+                  <a:tcPr marL="121900" marR="121900" marT="121900" marB="121900"/>
+                </a:tc>
+                <a:extLst>
+                  <a:ext uri="{0D108BD9-81ED-4DB2-BD59-A6C34878D82A}">
+                    <a16:rowId xmlns:a16="http://schemas.microsoft.com/office/drawing/2014/main" val="10005"/>
+                  </a:ext>
+                </a:extLst>
+              </a:tr>
+              <a:tr h="528280">
+                <a:tc>
+                  <a:txBody>
+                    <a:bodyPr/>
+                    <a:lstStyle/>
+                    <a:p>
+                      <a:pPr marL="0" lvl="0" indent="0" algn="ctr" rtl="0">
+                        <a:spcBef>
+                          <a:spcPts val="0"/>
+                        </a:spcBef>
+                        <a:spcAft>
+                          <a:spcPts val="0"/>
+                        </a:spcAft>
+                        <a:buNone/>
+                      </a:pPr>
+                      <a:r>
+                        <a:rPr lang="en-GB" sz="1900"/>
+                        <a:t>13523</a:t>
+                      </a:r>
+                      <a:endParaRPr sz="1900"/>
+                    </a:p>
+                  </a:txBody>
+                  <a:tcPr marL="121900" marR="121900" marT="121900" marB="121900"/>
+                </a:tc>
+                <a:extLst>
+                  <a:ext uri="{0D108BD9-81ED-4DB2-BD59-A6C34878D82A}">
+                    <a16:rowId xmlns:a16="http://schemas.microsoft.com/office/drawing/2014/main" val="10006"/>
+                  </a:ext>
+                </a:extLst>
+              </a:tr>
+              <a:tr h="528280">
+                <a:tc>
+                  <a:txBody>
+                    <a:bodyPr/>
+                    <a:lstStyle/>
+                    <a:p>
+                      <a:pPr marL="0" lvl="0" indent="0" algn="ctr" rtl="0">
+                        <a:spcBef>
+                          <a:spcPts val="0"/>
+                        </a:spcBef>
+                        <a:spcAft>
+                          <a:spcPts val="0"/>
+                        </a:spcAft>
+                        <a:buNone/>
+                      </a:pPr>
+                      <a:r>
+                        <a:rPr lang="en-GB" sz="1900"/>
+                        <a:t>102</a:t>
+                      </a:r>
+                      <a:endParaRPr sz="1900"/>
+                    </a:p>
+                  </a:txBody>
+                  <a:tcPr marL="121900" marR="121900" marT="121900" marB="121900"/>
+                </a:tc>
+                <a:extLst>
+                  <a:ext uri="{0D108BD9-81ED-4DB2-BD59-A6C34878D82A}">
+                    <a16:rowId xmlns:a16="http://schemas.microsoft.com/office/drawing/2014/main" val="10007"/>
+                  </a:ext>
+                </a:extLst>
+              </a:tr>
+            </a:tbl>
+          </a:graphicData>
+        </a:graphic>
+      </p:graphicFrame>
+      <p:graphicFrame>
+        <p:nvGraphicFramePr>
+          <p:cNvPr id="222" name="Google Shape;222;p34"/>
+          <p:cNvGraphicFramePr/>
+          <p:nvPr/>
+        </p:nvGraphicFramePr>
+        <p:xfrm>
+          <a:off x="9131704" y="2363340"/>
+          <a:ext cx="2590266" cy="1600080"/>
+        </p:xfrm>
+        <a:graphic>
+          <a:graphicData uri="http://schemas.openxmlformats.org/drawingml/2006/table">
+            <a:tbl>
+              <a:tblPr>
+                <a:noFill/>
+              </a:tblPr>
+              <a:tblGrid>
+                <a:gridCol w="1295133">
+                  <a:extLst>
+                    <a:ext uri="{9D8B030D-6E8A-4147-A177-3AD203B41FA5}">
+                      <a16:colId xmlns:a16="http://schemas.microsoft.com/office/drawing/2014/main" val="20000"/>
+                    </a:ext>
+                  </a:extLst>
+                </a:gridCol>
+                <a:gridCol w="1295133">
+                  <a:extLst>
+                    <a:ext uri="{9D8B030D-6E8A-4147-A177-3AD203B41FA5}">
+                      <a16:colId xmlns:a16="http://schemas.microsoft.com/office/drawing/2014/main" val="20001"/>
+                    </a:ext>
+                  </a:extLst>
+                </a:gridCol>
+              </a:tblGrid>
+              <a:tr h="528280">
+                <a:tc>
+                  <a:txBody>
+                    <a:bodyPr/>
+                    <a:lstStyle/>
+                    <a:p>
+                      <a:pPr marL="0" lvl="0" indent="0" algn="ctr" rtl="0">
+                        <a:spcBef>
+                          <a:spcPts val="0"/>
+                        </a:spcBef>
+                        <a:spcAft>
+                          <a:spcPts val="0"/>
+                        </a:spcAft>
+                        <a:buNone/>
+                      </a:pPr>
+                      <a:r>
+                        <a:rPr lang="en-GB" sz="1900"/>
+                        <a:t>‘sat’</a:t>
+                      </a:r>
+                      <a:endParaRPr sz="1900"/>
+                    </a:p>
+                  </a:txBody>
+                  <a:tcPr marL="121900" marR="121900" marT="121900" marB="121900"/>
+                </a:tc>
+                <a:tc>
+                  <a:txBody>
+                    <a:bodyPr/>
+                    <a:lstStyle/>
+                    <a:p>
+                      <a:pPr marL="0" lvl="0" indent="0" algn="ctr" rtl="0">
+                        <a:spcBef>
+                          <a:spcPts val="0"/>
+                        </a:spcBef>
+                        <a:spcAft>
+                          <a:spcPts val="0"/>
+                        </a:spcAft>
+                        <a:buNone/>
+                      </a:pPr>
+                      <a:r>
+                        <a:rPr lang="en-GB" sz="1900"/>
+                        <a:t>0.19</a:t>
+                      </a:r>
+                      <a:endParaRPr sz="1900"/>
+                    </a:p>
+                  </a:txBody>
+                  <a:tcPr marL="121900" marR="121900" marT="121900" marB="121900"/>
+                </a:tc>
+                <a:extLst>
+                  <a:ext uri="{0D108BD9-81ED-4DB2-BD59-A6C34878D82A}">
+                    <a16:rowId xmlns:a16="http://schemas.microsoft.com/office/drawing/2014/main" val="10000"/>
+                  </a:ext>
+                </a:extLst>
+              </a:tr>
+              <a:tr h="528280">
+                <a:tc>
+                  <a:txBody>
+                    <a:bodyPr/>
+                    <a:lstStyle/>
+                    <a:p>
+                      <a:pPr marL="0" lvl="0" indent="0" algn="ctr" rtl="0">
+                        <a:spcBef>
+                          <a:spcPts val="0"/>
+                        </a:spcBef>
+                        <a:spcAft>
+                          <a:spcPts val="0"/>
+                        </a:spcAft>
+                        <a:buNone/>
+                      </a:pPr>
+                      <a:r>
+                        <a:rPr lang="en-GB" sz="1900"/>
+                        <a:t>‘was’</a:t>
+                      </a:r>
+                      <a:endParaRPr sz="1900"/>
+                    </a:p>
+                  </a:txBody>
+                  <a:tcPr marL="121900" marR="121900" marT="121900" marB="121900"/>
+                </a:tc>
+                <a:tc>
+                  <a:txBody>
+                    <a:bodyPr/>
+                    <a:lstStyle/>
+                    <a:p>
+                      <a:pPr marL="0" lvl="0" indent="0" algn="ctr" rtl="0">
+                        <a:spcBef>
+                          <a:spcPts val="0"/>
+                        </a:spcBef>
+                        <a:spcAft>
+                          <a:spcPts val="0"/>
+                        </a:spcAft>
+                        <a:buNone/>
+                      </a:pPr>
+                      <a:r>
+                        <a:rPr lang="en-GB" sz="1900"/>
+                        <a:t>0.14</a:t>
+                      </a:r>
+                      <a:endParaRPr sz="1900"/>
+                    </a:p>
+                  </a:txBody>
+                  <a:tcPr marL="121900" marR="121900" marT="121900" marB="121900"/>
+                </a:tc>
+                <a:extLst>
+                  <a:ext uri="{0D108BD9-81ED-4DB2-BD59-A6C34878D82A}">
+                    <a16:rowId xmlns:a16="http://schemas.microsoft.com/office/drawing/2014/main" val="10001"/>
+                  </a:ext>
+                </a:extLst>
+              </a:tr>
+              <a:tr h="528280">
+                <a:tc>
+                  <a:txBody>
+                    <a:bodyPr/>
+                    <a:lstStyle/>
+                    <a:p>
+                      <a:pPr marL="0" lvl="0" indent="0" algn="ctr" rtl="0">
+                        <a:spcBef>
+                          <a:spcPts val="0"/>
+                        </a:spcBef>
+                        <a:spcAft>
+                          <a:spcPts val="0"/>
+                        </a:spcAft>
+                        <a:buNone/>
+                      </a:pPr>
+                      <a:r>
+                        <a:rPr lang="en-GB" sz="1900"/>
+                        <a:t>‘lay’</a:t>
+                      </a:r>
+                      <a:endParaRPr sz="1900"/>
+                    </a:p>
+                  </a:txBody>
+                  <a:tcPr marL="121900" marR="121900" marT="121900" marB="121900"/>
+                </a:tc>
+                <a:tc>
+                  <a:txBody>
+                    <a:bodyPr/>
+                    <a:lstStyle/>
+                    <a:p>
+                      <a:pPr marL="0" lvl="0" indent="0" algn="ctr" rtl="0">
+                        <a:spcBef>
+                          <a:spcPts val="0"/>
+                        </a:spcBef>
+                        <a:spcAft>
+                          <a:spcPts val="0"/>
+                        </a:spcAft>
+                        <a:buNone/>
+                      </a:pPr>
+                      <a:r>
+                        <a:rPr lang="en-GB" sz="1900"/>
+                        <a:t>0.07</a:t>
+                      </a:r>
+                      <a:endParaRPr sz="1900"/>
+                    </a:p>
+                  </a:txBody>
+                  <a:tcPr marL="121900" marR="121900" marT="121900" marB="121900"/>
+                </a:tc>
+                <a:extLst>
+                  <a:ext uri="{0D108BD9-81ED-4DB2-BD59-A6C34878D82A}">
+                    <a16:rowId xmlns:a16="http://schemas.microsoft.com/office/drawing/2014/main" val="10002"/>
+                  </a:ext>
+                </a:extLst>
+              </a:tr>
+            </a:tbl>
+          </a:graphicData>
+        </a:graphic>
+      </p:graphicFrame>
+      <p:grpSp>
+        <p:nvGrpSpPr>
+          <p:cNvPr id="223" name="Google Shape;223;p34"/>
+          <p:cNvGrpSpPr/>
+          <p:nvPr/>
+        </p:nvGrpSpPr>
+        <p:grpSpPr>
+          <a:xfrm>
+            <a:off x="10384038" y="4175574"/>
+            <a:ext cx="85600" cy="625667"/>
+            <a:chOff x="9966150" y="4193875"/>
+            <a:chExt cx="64200" cy="469250"/>
+          </a:xfrm>
+        </p:grpSpPr>
+        <p:sp>
+          <p:nvSpPr>
+            <p:cNvPr id="224" name="Google Shape;224;p34"/>
+            <p:cNvSpPr/>
+            <p:nvPr/>
+          </p:nvSpPr>
+          <p:spPr>
+            <a:xfrm>
+              <a:off x="9966150" y="4193875"/>
+              <a:ext cx="64200" cy="75300"/>
+            </a:xfrm>
+            <a:prstGeom prst="ellipse">
+              <a:avLst/>
+            </a:prstGeom>
+            <a:solidFill>
+              <a:srgbClr val="DFE3E5"/>
+            </a:solidFill>
+            <a:ln w="9525" cap="flat" cmpd="sng">
+              <a:solidFill>
+                <a:srgbClr val="335B74"/>
+              </a:solidFill>
+              <a:prstDash val="solid"/>
+              <a:round/>
+              <a:headEnd type="none" w="sm" len="sm"/>
+              <a:tailEnd type="none" w="sm" len="sm"/>
+            </a:ln>
+          </p:spPr>
+          <p:txBody>
+            <a:bodyPr spcFirstLastPara="1" wrap="square" lIns="121900" tIns="121900" rIns="121900" bIns="121900" anchor="ctr" anchorCtr="0">
+              <a:noAutofit/>
+            </a:bodyPr>
+            <a:lstStyle>
+              <a:defPPr marR="0" lvl="0" algn="l" rtl="0">
+                <a:lnSpc>
+                  <a:spcPct val="100000"/>
+                </a:lnSpc>
+                <a:spcBef>
+                  <a:spcPts val="0"/>
+                </a:spcBef>
+                <a:spcAft>
+                  <a:spcPts val="0"/>
+                </a:spcAft>
+              </a:defPPr>
+              <a:lvl1pPr marR="0" lvl="0" algn="l" rtl="0">
+                <a:lnSpc>
+                  <a:spcPct val="100000"/>
+                </a:lnSpc>
+                <a:spcBef>
+                  <a:spcPts val="0"/>
+                </a:spcBef>
+                <a:spcAft>
+                  <a:spcPts val="0"/>
+                </a:spcAft>
+                <a:buClr>
+                  <a:srgbClr val="000000"/>
+                </a:buClr>
+                <a:buFont typeface="Arial"/>
+                <a:defRPr sz="1867" b="0" i="0" u="none" strike="noStrike" cap="none">
+                  <a:solidFill>
+                    <a:srgbClr val="000000"/>
+                  </a:solidFill>
+                  <a:latin typeface="Arial"/>
+                  <a:ea typeface="Arial"/>
+                  <a:cs typeface="Arial"/>
+                  <a:sym typeface="Arial"/>
+                </a:defRPr>
+              </a:lvl1pPr>
+              <a:lvl2pPr marR="0" lvl="1" algn="l" rtl="0">
+                <a:lnSpc>
+                  <a:spcPct val="100000"/>
+                </a:lnSpc>
+                <a:spcBef>
+                  <a:spcPts val="0"/>
+                </a:spcBef>
+                <a:spcAft>
+                  <a:spcPts val="0"/>
+                </a:spcAft>
+                <a:buClr>
+                  <a:srgbClr val="000000"/>
+                </a:buClr>
+                <a:buFont typeface="Arial"/>
+                <a:defRPr sz="1867" b="0" i="0" u="none" strike="noStrike" cap="none">
+                  <a:solidFill>
+                    <a:srgbClr val="000000"/>
+                  </a:solidFill>
+                  <a:latin typeface="Arial"/>
+                  <a:ea typeface="Arial"/>
+                  <a:cs typeface="Arial"/>
+                  <a:sym typeface="Arial"/>
+                </a:defRPr>
+              </a:lvl2pPr>
+              <a:lvl3pPr marR="0" lvl="2" algn="l" rtl="0">
+                <a:lnSpc>
+                  <a:spcPct val="100000"/>
+                </a:lnSpc>
+                <a:spcBef>
+                  <a:spcPts val="0"/>
+                </a:spcBef>
+                <a:spcAft>
+                  <a:spcPts val="0"/>
+                </a:spcAft>
+                <a:buClr>
+                  <a:srgbClr val="000000"/>
+                </a:buClr>
+                <a:buFont typeface="Arial"/>
+                <a:defRPr sz="1867" b="0" i="0" u="none" strike="noStrike" cap="none">
+                  <a:solidFill>
+                    <a:srgbClr val="000000"/>
+                  </a:solidFill>
+                  <a:latin typeface="Arial"/>
+                  <a:ea typeface="Arial"/>
+                  <a:cs typeface="Arial"/>
+                  <a:sym typeface="Arial"/>
+                </a:defRPr>
+              </a:lvl3pPr>
+              <a:lvl4pPr marR="0" lvl="3" algn="l" rtl="0">
+                <a:lnSpc>
+                  <a:spcPct val="100000"/>
+                </a:lnSpc>
+                <a:spcBef>
+                  <a:spcPts val="0"/>
+                </a:spcBef>
+                <a:spcAft>
+                  <a:spcPts val="0"/>
+                </a:spcAft>
+                <a:buClr>
+                  <a:srgbClr val="000000"/>
+                </a:buClr>
+                <a:buFont typeface="Arial"/>
+                <a:defRPr sz="1867" b="0" i="0" u="none" strike="noStrike" cap="none">
+                  <a:solidFill>
+                    <a:srgbClr val="000000"/>
+                  </a:solidFill>
+                  <a:latin typeface="Arial"/>
+                  <a:ea typeface="Arial"/>
+                  <a:cs typeface="Arial"/>
+                  <a:sym typeface="Arial"/>
+                </a:defRPr>
+              </a:lvl4pPr>
+              <a:lvl5pPr marR="0" lvl="4" algn="l" rtl="0">
+                <a:lnSpc>
+                  <a:spcPct val="100000"/>
+                </a:lnSpc>
+                <a:spcBef>
+                  <a:spcPts val="0"/>
+                </a:spcBef>
+                <a:spcAft>
+                  <a:spcPts val="0"/>
+                </a:spcAft>
+                <a:buClr>
+                  <a:srgbClr val="000000"/>
+                </a:buClr>
+                <a:buFont typeface="Arial"/>
+                <a:defRPr sz="1867" b="0" i="0" u="none" strike="noStrike" cap="none">
+                  <a:solidFill>
+                    <a:srgbClr val="000000"/>
+                  </a:solidFill>
+                  <a:latin typeface="Arial"/>
+                  <a:ea typeface="Arial"/>
+                  <a:cs typeface="Arial"/>
+                  <a:sym typeface="Arial"/>
+                </a:defRPr>
+              </a:lvl5pPr>
+              <a:lvl6pPr marR="0" lvl="5" algn="l" rtl="0">
+                <a:lnSpc>
+                  <a:spcPct val="100000"/>
+                </a:lnSpc>
+                <a:spcBef>
+                  <a:spcPts val="0"/>
+                </a:spcBef>
+                <a:spcAft>
+                  <a:spcPts val="0"/>
+                </a:spcAft>
+                <a:buClr>
+                  <a:srgbClr val="000000"/>
+                </a:buClr>
+                <a:buFont typeface="Arial"/>
+                <a:defRPr sz="1867" b="0" i="0" u="none" strike="noStrike" cap="none">
+                  <a:solidFill>
+                    <a:srgbClr val="000000"/>
+                  </a:solidFill>
+                  <a:latin typeface="Arial"/>
+                  <a:ea typeface="Arial"/>
+                  <a:cs typeface="Arial"/>
+                  <a:sym typeface="Arial"/>
+                </a:defRPr>
+              </a:lvl6pPr>
+              <a:lvl7pPr marR="0" lvl="6" algn="l" rtl="0">
+                <a:lnSpc>
+                  <a:spcPct val="100000"/>
+                </a:lnSpc>
+                <a:spcBef>
+                  <a:spcPts val="0"/>
+                </a:spcBef>
+                <a:spcAft>
+                  <a:spcPts val="0"/>
+                </a:spcAft>
+                <a:buClr>
+                  <a:srgbClr val="000000"/>
+                </a:buClr>
+                <a:buFont typeface="Arial"/>
+                <a:defRPr sz="1867" b="0" i="0" u="none" strike="noStrike" cap="none">
+                  <a:solidFill>
+                    <a:srgbClr val="000000"/>
+                  </a:solidFill>
+                  <a:latin typeface="Arial"/>
+                  <a:ea typeface="Arial"/>
+                  <a:cs typeface="Arial"/>
+                  <a:sym typeface="Arial"/>
+                </a:defRPr>
+              </a:lvl7pPr>
+              <a:lvl8pPr marR="0" lvl="7" algn="l" rtl="0">
+                <a:lnSpc>
+                  <a:spcPct val="100000"/>
+                </a:lnSpc>
+                <a:spcBef>
+                  <a:spcPts val="0"/>
+                </a:spcBef>
+                <a:spcAft>
+                  <a:spcPts val="0"/>
+                </a:spcAft>
+                <a:buClr>
+                  <a:srgbClr val="000000"/>
+                </a:buClr>
+                <a:buFont typeface="Arial"/>
+                <a:defRPr sz="1867" b="0" i="0" u="none" strike="noStrike" cap="none">
+                  <a:solidFill>
+                    <a:srgbClr val="000000"/>
+                  </a:solidFill>
+                  <a:latin typeface="Arial"/>
+                  <a:ea typeface="Arial"/>
+                  <a:cs typeface="Arial"/>
+                  <a:sym typeface="Arial"/>
+                </a:defRPr>
+              </a:lvl8pPr>
+              <a:lvl9pPr marR="0" lvl="8" algn="l" rtl="0">
+                <a:lnSpc>
+                  <a:spcPct val="100000"/>
+                </a:lnSpc>
+                <a:spcBef>
+                  <a:spcPts val="0"/>
+                </a:spcBef>
+                <a:spcAft>
+                  <a:spcPts val="0"/>
+                </a:spcAft>
+                <a:buClr>
+                  <a:srgbClr val="000000"/>
+                </a:buClr>
+                <a:buFont typeface="Arial"/>
+                <a:defRPr sz="1867" b="0" i="0" u="none" strike="noStrike" cap="none">
+                  <a:solidFill>
+                    <a:srgbClr val="000000"/>
+                  </a:solidFill>
+                  <a:latin typeface="Arial"/>
+                  <a:ea typeface="Arial"/>
+                  <a:cs typeface="Arial"/>
+                  <a:sym typeface="Arial"/>
+                </a:defRPr>
+              </a:lvl9pPr>
+            </a:lstStyle>
+            <a:p>
+              <a:pPr marL="0" lvl="0" indent="0" algn="ctr" rtl="0">
+                <a:spcBef>
+                  <a:spcPts val="0"/>
+                </a:spcBef>
+                <a:spcAft>
+                  <a:spcPts val="0"/>
+                </a:spcAft>
+                <a:buNone/>
+              </a:pPr>
+              <a:endParaRPr sz="2489">
+                <a:latin typeface="Calibri"/>
+                <a:ea typeface="Calibri"/>
+                <a:cs typeface="Calibri"/>
+                <a:sym typeface="Calibri"/>
+              </a:endParaRPr>
+            </a:p>
+          </p:txBody>
+        </p:sp>
+        <p:sp>
+          <p:nvSpPr>
+            <p:cNvPr id="225" name="Google Shape;225;p34"/>
+            <p:cNvSpPr/>
+            <p:nvPr/>
+          </p:nvSpPr>
+          <p:spPr>
+            <a:xfrm>
+              <a:off x="9966150" y="4390850"/>
+              <a:ext cx="64200" cy="75300"/>
+            </a:xfrm>
+            <a:prstGeom prst="ellipse">
+              <a:avLst/>
+            </a:prstGeom>
+            <a:solidFill>
+              <a:srgbClr val="DFE3E5"/>
+            </a:solidFill>
+            <a:ln w="9525" cap="flat" cmpd="sng">
+              <a:solidFill>
+                <a:srgbClr val="335B74"/>
+              </a:solidFill>
+              <a:prstDash val="solid"/>
+              <a:round/>
+              <a:headEnd type="none" w="sm" len="sm"/>
+              <a:tailEnd type="none" w="sm" len="sm"/>
+            </a:ln>
+          </p:spPr>
+          <p:txBody>
+            <a:bodyPr spcFirstLastPara="1" wrap="square" lIns="121900" tIns="121900" rIns="121900" bIns="121900" anchor="ctr" anchorCtr="0">
+              <a:noAutofit/>
+            </a:bodyPr>
+            <a:lstStyle>
+              <a:defPPr marR="0" lvl="0" algn="l" rtl="0">
+                <a:lnSpc>
+                  <a:spcPct val="100000"/>
+                </a:lnSpc>
+                <a:spcBef>
+                  <a:spcPts val="0"/>
+                </a:spcBef>
+                <a:spcAft>
+                  <a:spcPts val="0"/>
+                </a:spcAft>
+              </a:defPPr>
+              <a:lvl1pPr marR="0" lvl="0" algn="l" rtl="0">
+                <a:lnSpc>
+                  <a:spcPct val="100000"/>
+                </a:lnSpc>
+                <a:spcBef>
+                  <a:spcPts val="0"/>
+                </a:spcBef>
+                <a:spcAft>
+                  <a:spcPts val="0"/>
+                </a:spcAft>
+                <a:buClr>
+                  <a:srgbClr val="000000"/>
+                </a:buClr>
+                <a:buFont typeface="Arial"/>
+                <a:defRPr sz="1867" b="0" i="0" u="none" strike="noStrike" cap="none">
+                  <a:solidFill>
+                    <a:srgbClr val="000000"/>
+                  </a:solidFill>
+                  <a:latin typeface="Arial"/>
+                  <a:ea typeface="Arial"/>
+                  <a:cs typeface="Arial"/>
+                  <a:sym typeface="Arial"/>
+                </a:defRPr>
+              </a:lvl1pPr>
+              <a:lvl2pPr marR="0" lvl="1" algn="l" rtl="0">
+                <a:lnSpc>
+                  <a:spcPct val="100000"/>
+                </a:lnSpc>
+                <a:spcBef>
+                  <a:spcPts val="0"/>
+                </a:spcBef>
+                <a:spcAft>
+                  <a:spcPts val="0"/>
+                </a:spcAft>
+                <a:buClr>
+                  <a:srgbClr val="000000"/>
+                </a:buClr>
+                <a:buFont typeface="Arial"/>
+                <a:defRPr sz="1867" b="0" i="0" u="none" strike="noStrike" cap="none">
+                  <a:solidFill>
+                    <a:srgbClr val="000000"/>
+                  </a:solidFill>
+                  <a:latin typeface="Arial"/>
+                  <a:ea typeface="Arial"/>
+                  <a:cs typeface="Arial"/>
+                  <a:sym typeface="Arial"/>
+                </a:defRPr>
+              </a:lvl2pPr>
+              <a:lvl3pPr marR="0" lvl="2" algn="l" rtl="0">
+                <a:lnSpc>
+                  <a:spcPct val="100000"/>
+                </a:lnSpc>
+                <a:spcBef>
+                  <a:spcPts val="0"/>
+                </a:spcBef>
+                <a:spcAft>
+                  <a:spcPts val="0"/>
+                </a:spcAft>
+                <a:buClr>
+                  <a:srgbClr val="000000"/>
+                </a:buClr>
+                <a:buFont typeface="Arial"/>
+                <a:defRPr sz="1867" b="0" i="0" u="none" strike="noStrike" cap="none">
+                  <a:solidFill>
+                    <a:srgbClr val="000000"/>
+                  </a:solidFill>
+                  <a:latin typeface="Arial"/>
+                  <a:ea typeface="Arial"/>
+                  <a:cs typeface="Arial"/>
+                  <a:sym typeface="Arial"/>
+                </a:defRPr>
+              </a:lvl3pPr>
+              <a:lvl4pPr marR="0" lvl="3" algn="l" rtl="0">
+                <a:lnSpc>
+                  <a:spcPct val="100000"/>
+                </a:lnSpc>
+                <a:spcBef>
+                  <a:spcPts val="0"/>
+                </a:spcBef>
+                <a:spcAft>
+                  <a:spcPts val="0"/>
+                </a:spcAft>
+                <a:buClr>
+                  <a:srgbClr val="000000"/>
+                </a:buClr>
+                <a:buFont typeface="Arial"/>
+                <a:defRPr sz="1867" b="0" i="0" u="none" strike="noStrike" cap="none">
+                  <a:solidFill>
+                    <a:srgbClr val="000000"/>
+                  </a:solidFill>
+                  <a:latin typeface="Arial"/>
+                  <a:ea typeface="Arial"/>
+                  <a:cs typeface="Arial"/>
+                  <a:sym typeface="Arial"/>
+                </a:defRPr>
+              </a:lvl4pPr>
+              <a:lvl5pPr marR="0" lvl="4" algn="l" rtl="0">
+                <a:lnSpc>
+                  <a:spcPct val="100000"/>
+                </a:lnSpc>
+                <a:spcBef>
+                  <a:spcPts val="0"/>
+                </a:spcBef>
+                <a:spcAft>
+                  <a:spcPts val="0"/>
+                </a:spcAft>
+                <a:buClr>
+                  <a:srgbClr val="000000"/>
+                </a:buClr>
+                <a:buFont typeface="Arial"/>
+                <a:defRPr sz="1867" b="0" i="0" u="none" strike="noStrike" cap="none">
+                  <a:solidFill>
+                    <a:srgbClr val="000000"/>
+                  </a:solidFill>
+                  <a:latin typeface="Arial"/>
+                  <a:ea typeface="Arial"/>
+                  <a:cs typeface="Arial"/>
+                  <a:sym typeface="Arial"/>
+                </a:defRPr>
+              </a:lvl5pPr>
+              <a:lvl6pPr marR="0" lvl="5" algn="l" rtl="0">
+                <a:lnSpc>
+                  <a:spcPct val="100000"/>
+                </a:lnSpc>
+                <a:spcBef>
+                  <a:spcPts val="0"/>
+                </a:spcBef>
+                <a:spcAft>
+                  <a:spcPts val="0"/>
+                </a:spcAft>
+                <a:buClr>
+                  <a:srgbClr val="000000"/>
+                </a:buClr>
+                <a:buFont typeface="Arial"/>
+                <a:defRPr sz="1867" b="0" i="0" u="none" strike="noStrike" cap="none">
+                  <a:solidFill>
+                    <a:srgbClr val="000000"/>
+                  </a:solidFill>
+                  <a:latin typeface="Arial"/>
+                  <a:ea typeface="Arial"/>
+                  <a:cs typeface="Arial"/>
+                  <a:sym typeface="Arial"/>
+                </a:defRPr>
+              </a:lvl6pPr>
+              <a:lvl7pPr marR="0" lvl="6" algn="l" rtl="0">
+                <a:lnSpc>
+                  <a:spcPct val="100000"/>
+                </a:lnSpc>
+                <a:spcBef>
+                  <a:spcPts val="0"/>
+                </a:spcBef>
+                <a:spcAft>
+                  <a:spcPts val="0"/>
+                </a:spcAft>
+                <a:buClr>
+                  <a:srgbClr val="000000"/>
+                </a:buClr>
+                <a:buFont typeface="Arial"/>
+                <a:defRPr sz="1867" b="0" i="0" u="none" strike="noStrike" cap="none">
+                  <a:solidFill>
+                    <a:srgbClr val="000000"/>
+                  </a:solidFill>
+                  <a:latin typeface="Arial"/>
+                  <a:ea typeface="Arial"/>
+                  <a:cs typeface="Arial"/>
+                  <a:sym typeface="Arial"/>
+                </a:defRPr>
+              </a:lvl7pPr>
+              <a:lvl8pPr marR="0" lvl="7" algn="l" rtl="0">
+                <a:lnSpc>
+                  <a:spcPct val="100000"/>
+                </a:lnSpc>
+                <a:spcBef>
+                  <a:spcPts val="0"/>
+                </a:spcBef>
+                <a:spcAft>
+                  <a:spcPts val="0"/>
+                </a:spcAft>
+                <a:buClr>
+                  <a:srgbClr val="000000"/>
+                </a:buClr>
+                <a:buFont typeface="Arial"/>
+                <a:defRPr sz="1867" b="0" i="0" u="none" strike="noStrike" cap="none">
+                  <a:solidFill>
+                    <a:srgbClr val="000000"/>
+                  </a:solidFill>
+                  <a:latin typeface="Arial"/>
+                  <a:ea typeface="Arial"/>
+                  <a:cs typeface="Arial"/>
+                  <a:sym typeface="Arial"/>
+                </a:defRPr>
+              </a:lvl8pPr>
+              <a:lvl9pPr marR="0" lvl="8" algn="l" rtl="0">
+                <a:lnSpc>
+                  <a:spcPct val="100000"/>
+                </a:lnSpc>
+                <a:spcBef>
+                  <a:spcPts val="0"/>
+                </a:spcBef>
+                <a:spcAft>
+                  <a:spcPts val="0"/>
+                </a:spcAft>
+                <a:buClr>
+                  <a:srgbClr val="000000"/>
+                </a:buClr>
+                <a:buFont typeface="Arial"/>
+                <a:defRPr sz="1867" b="0" i="0" u="none" strike="noStrike" cap="none">
+                  <a:solidFill>
+                    <a:srgbClr val="000000"/>
+                  </a:solidFill>
+                  <a:latin typeface="Arial"/>
+                  <a:ea typeface="Arial"/>
+                  <a:cs typeface="Arial"/>
+                  <a:sym typeface="Arial"/>
+                </a:defRPr>
+              </a:lvl9pPr>
+            </a:lstStyle>
+            <a:p>
+              <a:pPr marL="0" lvl="0" indent="0" algn="ctr" rtl="0">
+                <a:spcBef>
+                  <a:spcPts val="0"/>
+                </a:spcBef>
+                <a:spcAft>
+                  <a:spcPts val="0"/>
+                </a:spcAft>
+                <a:buNone/>
+              </a:pPr>
+              <a:endParaRPr sz="2489">
+                <a:latin typeface="Calibri"/>
+                <a:ea typeface="Calibri"/>
+                <a:cs typeface="Calibri"/>
+                <a:sym typeface="Calibri"/>
+              </a:endParaRPr>
+            </a:p>
+          </p:txBody>
+        </p:sp>
+        <p:sp>
+          <p:nvSpPr>
+            <p:cNvPr id="226" name="Google Shape;226;p34"/>
+            <p:cNvSpPr/>
+            <p:nvPr/>
+          </p:nvSpPr>
+          <p:spPr>
+            <a:xfrm>
+              <a:off x="9966150" y="4587825"/>
+              <a:ext cx="64200" cy="75300"/>
+            </a:xfrm>
+            <a:prstGeom prst="ellipse">
+              <a:avLst/>
+            </a:prstGeom>
+            <a:solidFill>
+              <a:srgbClr val="DFE3E5"/>
+            </a:solidFill>
+            <a:ln w="9525" cap="flat" cmpd="sng">
+              <a:solidFill>
+                <a:srgbClr val="335B74"/>
+              </a:solidFill>
+              <a:prstDash val="solid"/>
+              <a:round/>
+              <a:headEnd type="none" w="sm" len="sm"/>
+              <a:tailEnd type="none" w="sm" len="sm"/>
+            </a:ln>
+          </p:spPr>
+          <p:txBody>
+            <a:bodyPr spcFirstLastPara="1" wrap="square" lIns="121900" tIns="121900" rIns="121900" bIns="121900" anchor="ctr" anchorCtr="0">
+              <a:noAutofit/>
+            </a:bodyPr>
+            <a:lstStyle>
+              <a:defPPr marR="0" lvl="0" algn="l" rtl="0">
+                <a:lnSpc>
+                  <a:spcPct val="100000"/>
+                </a:lnSpc>
+                <a:spcBef>
+                  <a:spcPts val="0"/>
+                </a:spcBef>
+                <a:spcAft>
+                  <a:spcPts val="0"/>
+                </a:spcAft>
+              </a:defPPr>
+              <a:lvl1pPr marR="0" lvl="0" algn="l" rtl="0">
+                <a:lnSpc>
+                  <a:spcPct val="100000"/>
+                </a:lnSpc>
+                <a:spcBef>
+                  <a:spcPts val="0"/>
+                </a:spcBef>
+                <a:spcAft>
+                  <a:spcPts val="0"/>
+                </a:spcAft>
+                <a:buClr>
+                  <a:srgbClr val="000000"/>
+                </a:buClr>
+                <a:buFont typeface="Arial"/>
+                <a:defRPr sz="1867" b="0" i="0" u="none" strike="noStrike" cap="none">
+                  <a:solidFill>
+                    <a:srgbClr val="000000"/>
+                  </a:solidFill>
+                  <a:latin typeface="Arial"/>
+                  <a:ea typeface="Arial"/>
+                  <a:cs typeface="Arial"/>
+                  <a:sym typeface="Arial"/>
+                </a:defRPr>
+              </a:lvl1pPr>
+              <a:lvl2pPr marR="0" lvl="1" algn="l" rtl="0">
+                <a:lnSpc>
+                  <a:spcPct val="100000"/>
+                </a:lnSpc>
+                <a:spcBef>
+                  <a:spcPts val="0"/>
+                </a:spcBef>
+                <a:spcAft>
+                  <a:spcPts val="0"/>
+                </a:spcAft>
+                <a:buClr>
+                  <a:srgbClr val="000000"/>
+                </a:buClr>
+                <a:buFont typeface="Arial"/>
+                <a:defRPr sz="1867" b="0" i="0" u="none" strike="noStrike" cap="none">
+                  <a:solidFill>
+                    <a:srgbClr val="000000"/>
+                  </a:solidFill>
+                  <a:latin typeface="Arial"/>
+                  <a:ea typeface="Arial"/>
+                  <a:cs typeface="Arial"/>
+                  <a:sym typeface="Arial"/>
+                </a:defRPr>
+              </a:lvl2pPr>
+              <a:lvl3pPr marR="0" lvl="2" algn="l" rtl="0">
+                <a:lnSpc>
+                  <a:spcPct val="100000"/>
+                </a:lnSpc>
+                <a:spcBef>
+                  <a:spcPts val="0"/>
+                </a:spcBef>
+                <a:spcAft>
+                  <a:spcPts val="0"/>
+                </a:spcAft>
+                <a:buClr>
+                  <a:srgbClr val="000000"/>
+                </a:buClr>
+                <a:buFont typeface="Arial"/>
+                <a:defRPr sz="1867" b="0" i="0" u="none" strike="noStrike" cap="none">
+                  <a:solidFill>
+                    <a:srgbClr val="000000"/>
+                  </a:solidFill>
+                  <a:latin typeface="Arial"/>
+                  <a:ea typeface="Arial"/>
+                  <a:cs typeface="Arial"/>
+                  <a:sym typeface="Arial"/>
+                </a:defRPr>
+              </a:lvl3pPr>
+              <a:lvl4pPr marR="0" lvl="3" algn="l" rtl="0">
+                <a:lnSpc>
+                  <a:spcPct val="100000"/>
+                </a:lnSpc>
+                <a:spcBef>
+                  <a:spcPts val="0"/>
+                </a:spcBef>
+                <a:spcAft>
+                  <a:spcPts val="0"/>
+                </a:spcAft>
+                <a:buClr>
+                  <a:srgbClr val="000000"/>
+                </a:buClr>
+                <a:buFont typeface="Arial"/>
+                <a:defRPr sz="1867" b="0" i="0" u="none" strike="noStrike" cap="none">
+                  <a:solidFill>
+                    <a:srgbClr val="000000"/>
+                  </a:solidFill>
+                  <a:latin typeface="Arial"/>
+                  <a:ea typeface="Arial"/>
+                  <a:cs typeface="Arial"/>
+                  <a:sym typeface="Arial"/>
+                </a:defRPr>
+              </a:lvl4pPr>
+              <a:lvl5pPr marR="0" lvl="4" algn="l" rtl="0">
+                <a:lnSpc>
+                  <a:spcPct val="100000"/>
+                </a:lnSpc>
+                <a:spcBef>
+                  <a:spcPts val="0"/>
+                </a:spcBef>
+                <a:spcAft>
+                  <a:spcPts val="0"/>
+                </a:spcAft>
+                <a:buClr>
+                  <a:srgbClr val="000000"/>
+                </a:buClr>
+                <a:buFont typeface="Arial"/>
+                <a:defRPr sz="1867" b="0" i="0" u="none" strike="noStrike" cap="none">
+                  <a:solidFill>
+                    <a:srgbClr val="000000"/>
+                  </a:solidFill>
+                  <a:latin typeface="Arial"/>
+                  <a:ea typeface="Arial"/>
+                  <a:cs typeface="Arial"/>
+                  <a:sym typeface="Arial"/>
+                </a:defRPr>
+              </a:lvl5pPr>
+              <a:lvl6pPr marR="0" lvl="5" algn="l" rtl="0">
+                <a:lnSpc>
+                  <a:spcPct val="100000"/>
+                </a:lnSpc>
+                <a:spcBef>
+                  <a:spcPts val="0"/>
+                </a:spcBef>
+                <a:spcAft>
+                  <a:spcPts val="0"/>
+                </a:spcAft>
+                <a:buClr>
+                  <a:srgbClr val="000000"/>
+                </a:buClr>
+                <a:buFont typeface="Arial"/>
+                <a:defRPr sz="1867" b="0" i="0" u="none" strike="noStrike" cap="none">
+                  <a:solidFill>
+                    <a:srgbClr val="000000"/>
+                  </a:solidFill>
+                  <a:latin typeface="Arial"/>
+                  <a:ea typeface="Arial"/>
+                  <a:cs typeface="Arial"/>
+                  <a:sym typeface="Arial"/>
+                </a:defRPr>
+              </a:lvl6pPr>
+              <a:lvl7pPr marR="0" lvl="6" algn="l" rtl="0">
+                <a:lnSpc>
+                  <a:spcPct val="100000"/>
+                </a:lnSpc>
+                <a:spcBef>
+                  <a:spcPts val="0"/>
+                </a:spcBef>
+                <a:spcAft>
+                  <a:spcPts val="0"/>
+                </a:spcAft>
+                <a:buClr>
+                  <a:srgbClr val="000000"/>
+                </a:buClr>
+                <a:buFont typeface="Arial"/>
+                <a:defRPr sz="1867" b="0" i="0" u="none" strike="noStrike" cap="none">
+                  <a:solidFill>
+                    <a:srgbClr val="000000"/>
+                  </a:solidFill>
+                  <a:latin typeface="Arial"/>
+                  <a:ea typeface="Arial"/>
+                  <a:cs typeface="Arial"/>
+                  <a:sym typeface="Arial"/>
+                </a:defRPr>
+              </a:lvl7pPr>
+              <a:lvl8pPr marR="0" lvl="7" algn="l" rtl="0">
+                <a:lnSpc>
+                  <a:spcPct val="100000"/>
+                </a:lnSpc>
+                <a:spcBef>
+                  <a:spcPts val="0"/>
+                </a:spcBef>
+                <a:spcAft>
+                  <a:spcPts val="0"/>
+                </a:spcAft>
+                <a:buClr>
+                  <a:srgbClr val="000000"/>
+                </a:buClr>
+                <a:buFont typeface="Arial"/>
+                <a:defRPr sz="1867" b="0" i="0" u="none" strike="noStrike" cap="none">
+                  <a:solidFill>
+                    <a:srgbClr val="000000"/>
+                  </a:solidFill>
+                  <a:latin typeface="Arial"/>
+                  <a:ea typeface="Arial"/>
+                  <a:cs typeface="Arial"/>
+                  <a:sym typeface="Arial"/>
+                </a:defRPr>
+              </a:lvl8pPr>
+              <a:lvl9pPr marR="0" lvl="8" algn="l" rtl="0">
+                <a:lnSpc>
+                  <a:spcPct val="100000"/>
+                </a:lnSpc>
+                <a:spcBef>
+                  <a:spcPts val="0"/>
+                </a:spcBef>
+                <a:spcAft>
+                  <a:spcPts val="0"/>
+                </a:spcAft>
+                <a:buClr>
+                  <a:srgbClr val="000000"/>
+                </a:buClr>
+                <a:buFont typeface="Arial"/>
+                <a:defRPr sz="1867" b="0" i="0" u="none" strike="noStrike" cap="none">
+                  <a:solidFill>
+                    <a:srgbClr val="000000"/>
+                  </a:solidFill>
+                  <a:latin typeface="Arial"/>
+                  <a:ea typeface="Arial"/>
+                  <a:cs typeface="Arial"/>
+                  <a:sym typeface="Arial"/>
+                </a:defRPr>
+              </a:lvl9pPr>
+            </a:lstStyle>
+            <a:p>
+              <a:pPr marL="0" lvl="0" indent="0" algn="ctr" rtl="0">
+                <a:spcBef>
+                  <a:spcPts val="0"/>
+                </a:spcBef>
+                <a:spcAft>
+                  <a:spcPts val="0"/>
+                </a:spcAft>
+                <a:buNone/>
+              </a:pPr>
+              <a:endParaRPr sz="2489">
+                <a:latin typeface="Calibri"/>
+                <a:ea typeface="Calibri"/>
+                <a:cs typeface="Calibri"/>
+                <a:sym typeface="Calibri"/>
+              </a:endParaRPr>
+            </a:p>
+          </p:txBody>
+        </p:sp>
+      </p:grpSp>
+      <p:graphicFrame>
+        <p:nvGraphicFramePr>
+          <p:cNvPr id="227" name="Google Shape;227;p34"/>
+          <p:cNvGraphicFramePr/>
+          <p:nvPr/>
+        </p:nvGraphicFramePr>
+        <p:xfrm>
+          <a:off x="9131704" y="5028674"/>
+          <a:ext cx="2590266" cy="533360"/>
+        </p:xfrm>
+        <a:graphic>
+          <a:graphicData uri="http://schemas.openxmlformats.org/drawingml/2006/table">
+            <a:tbl>
+              <a:tblPr>
+                <a:noFill/>
+              </a:tblPr>
+              <a:tblGrid>
+                <a:gridCol w="1295133">
+                  <a:extLst>
+                    <a:ext uri="{9D8B030D-6E8A-4147-A177-3AD203B41FA5}">
+                      <a16:colId xmlns:a16="http://schemas.microsoft.com/office/drawing/2014/main" val="20000"/>
+                    </a:ext>
+                  </a:extLst>
+                </a:gridCol>
+                <a:gridCol w="1295133">
+                  <a:extLst>
+                    <a:ext uri="{9D8B030D-6E8A-4147-A177-3AD203B41FA5}">
+                      <a16:colId xmlns:a16="http://schemas.microsoft.com/office/drawing/2014/main" val="20001"/>
+                    </a:ext>
+                  </a:extLst>
+                </a:gridCol>
+              </a:tblGrid>
+              <a:tr h="528280">
+                <a:tc>
+                  <a:txBody>
+                    <a:bodyPr/>
+                    <a:lstStyle/>
+                    <a:p>
+                      <a:pPr marL="0" lvl="0" indent="0" algn="ctr" rtl="0">
+                        <a:spcBef>
+                          <a:spcPts val="0"/>
+                        </a:spcBef>
+                        <a:spcAft>
+                          <a:spcPts val="0"/>
+                        </a:spcAft>
+                        <a:buNone/>
+                      </a:pPr>
+                      <a:r>
+                        <a:rPr lang="en-GB" sz="1900"/>
+                        <a:t>‘hippo’</a:t>
+                      </a:r>
+                      <a:endParaRPr sz="1900"/>
+                    </a:p>
+                  </a:txBody>
+                  <a:tcPr marL="121900" marR="121900" marT="121900" marB="121900"/>
+                </a:tc>
+                <a:tc>
+                  <a:txBody>
+                    <a:bodyPr/>
+                    <a:lstStyle/>
+                    <a:p>
+                      <a:pPr marL="0" lvl="0" indent="0" algn="ctr" rtl="0">
+                        <a:spcBef>
+                          <a:spcPts val="0"/>
+                        </a:spcBef>
+                        <a:spcAft>
+                          <a:spcPts val="0"/>
+                        </a:spcAft>
+                        <a:buNone/>
+                      </a:pPr>
+                      <a:r>
+                        <a:rPr lang="en-GB" sz="1900"/>
+                        <a:t>0.000001</a:t>
+                      </a:r>
+                      <a:endParaRPr sz="1900"/>
+                    </a:p>
+                  </a:txBody>
+                  <a:tcPr marL="121900" marR="121900" marT="121900" marB="121900"/>
+                </a:tc>
+                <a:extLst>
+                  <a:ext uri="{0D108BD9-81ED-4DB2-BD59-A6C34878D82A}">
+                    <a16:rowId xmlns:a16="http://schemas.microsoft.com/office/drawing/2014/main" val="10000"/>
+                  </a:ext>
+                </a:extLst>
+              </a:tr>
+            </a:tbl>
+          </a:graphicData>
+        </a:graphic>
+      </p:graphicFrame>
+      <p:sp>
+        <p:nvSpPr>
+          <p:cNvPr id="228" name="Google Shape;228;p34"/>
+          <p:cNvSpPr/>
+          <p:nvPr/>
+        </p:nvSpPr>
+        <p:spPr>
+          <a:xfrm>
+            <a:off x="1251504" y="3861740"/>
+            <a:ext cx="758400" cy="196800"/>
+          </a:xfrm>
+          <a:prstGeom prst="rightArrow">
+            <a:avLst>
+              <a:gd name="adj1" fmla="val 50000"/>
+              <a:gd name="adj2" fmla="val 50000"/>
+            </a:avLst>
+          </a:prstGeom>
+          <a:solidFill>
+            <a:srgbClr val="DFE3E5"/>
+          </a:solidFill>
+          <a:ln w="9525" cap="flat" cmpd="sng">
+            <a:solidFill>
+              <a:srgbClr val="335B74"/>
+            </a:solidFill>
+            <a:prstDash val="solid"/>
+            <a:round/>
+            <a:headEnd type="none" w="sm" len="sm"/>
+            <a:tailEnd type="none" w="sm" len="sm"/>
+          </a:ln>
+          <a:effectLst>
+            <a:outerShdw blurRad="57150" dist="19050" dir="5400000" algn="bl" rotWithShape="0">
+              <a:srgbClr val="000000">
+                <a:alpha val="50000"/>
+              </a:srgbClr>
+            </a:outerShdw>
+          </a:effectLst>
+        </p:spPr>
+        <p:txBody>
+          <a:bodyPr spcFirstLastPara="1" wrap="square" lIns="121900" tIns="121900" rIns="121900" bIns="121900" anchor="ctr" anchorCtr="0">
+            <a:noAutofit/>
+          </a:bodyPr>
+          <a:lstStyle>
+            <a:defPPr marR="0" lvl="0" algn="l" rtl="0">
+              <a:lnSpc>
+                <a:spcPct val="100000"/>
+              </a:lnSpc>
+              <a:spcBef>
+                <a:spcPts val="0"/>
+              </a:spcBef>
+              <a:spcAft>
+                <a:spcPts val="0"/>
+              </a:spcAft>
+            </a:defPPr>
+            <a:lvl1pPr marR="0" lvl="0" algn="l" rtl="0">
+              <a:lnSpc>
+                <a:spcPct val="100000"/>
+              </a:lnSpc>
+              <a:spcBef>
+                <a:spcPts val="0"/>
+              </a:spcBef>
+              <a:spcAft>
+                <a:spcPts val="0"/>
+              </a:spcAft>
+              <a:buClr>
+                <a:srgbClr val="000000"/>
+              </a:buClr>
+              <a:buFont typeface="Arial"/>
+              <a:defRPr sz="1867" b="0" i="0" u="none" strike="noStrike" cap="none">
+                <a:solidFill>
+                  <a:srgbClr val="000000"/>
+                </a:solidFill>
+                <a:latin typeface="Arial"/>
+                <a:ea typeface="Arial"/>
+                <a:cs typeface="Arial"/>
+                <a:sym typeface="Arial"/>
+              </a:defRPr>
+            </a:lvl1pPr>
+            <a:lvl2pPr marR="0" lvl="1" algn="l" rtl="0">
+              <a:lnSpc>
+                <a:spcPct val="100000"/>
+              </a:lnSpc>
+              <a:spcBef>
+                <a:spcPts val="0"/>
+              </a:spcBef>
+              <a:spcAft>
+                <a:spcPts val="0"/>
+              </a:spcAft>
+              <a:buClr>
+                <a:srgbClr val="000000"/>
+              </a:buClr>
+              <a:buFont typeface="Arial"/>
+              <a:defRPr sz="1867" b="0" i="0" u="none" strike="noStrike" cap="none">
+                <a:solidFill>
+                  <a:srgbClr val="000000"/>
+                </a:solidFill>
+                <a:latin typeface="Arial"/>
+                <a:ea typeface="Arial"/>
+                <a:cs typeface="Arial"/>
+                <a:sym typeface="Arial"/>
+              </a:defRPr>
+            </a:lvl2pPr>
+            <a:lvl3pPr marR="0" lvl="2" algn="l" rtl="0">
+              <a:lnSpc>
+                <a:spcPct val="100000"/>
+              </a:lnSpc>
+              <a:spcBef>
+                <a:spcPts val="0"/>
+              </a:spcBef>
+              <a:spcAft>
+                <a:spcPts val="0"/>
+              </a:spcAft>
+              <a:buClr>
+                <a:srgbClr val="000000"/>
+              </a:buClr>
+              <a:buFont typeface="Arial"/>
+              <a:defRPr sz="1867" b="0" i="0" u="none" strike="noStrike" cap="none">
+                <a:solidFill>
+                  <a:srgbClr val="000000"/>
+                </a:solidFill>
+                <a:latin typeface="Arial"/>
+                <a:ea typeface="Arial"/>
+                <a:cs typeface="Arial"/>
+                <a:sym typeface="Arial"/>
+              </a:defRPr>
+            </a:lvl3pPr>
+            <a:lvl4pPr marR="0" lvl="3" algn="l" rtl="0">
+              <a:lnSpc>
+                <a:spcPct val="100000"/>
+              </a:lnSpc>
+              <a:spcBef>
+                <a:spcPts val="0"/>
+              </a:spcBef>
+              <a:spcAft>
+                <a:spcPts val="0"/>
+              </a:spcAft>
+              <a:buClr>
+                <a:srgbClr val="000000"/>
+              </a:buClr>
+              <a:buFont typeface="Arial"/>
+              <a:defRPr sz="1867" b="0" i="0" u="none" strike="noStrike" cap="none">
+                <a:solidFill>
+                  <a:srgbClr val="000000"/>
+                </a:solidFill>
+                <a:latin typeface="Arial"/>
+                <a:ea typeface="Arial"/>
+                <a:cs typeface="Arial"/>
+                <a:sym typeface="Arial"/>
+              </a:defRPr>
+            </a:lvl4pPr>
+            <a:lvl5pPr marR="0" lvl="4" algn="l" rtl="0">
+              <a:lnSpc>
+                <a:spcPct val="100000"/>
+              </a:lnSpc>
+              <a:spcBef>
+                <a:spcPts val="0"/>
+              </a:spcBef>
+              <a:spcAft>
+                <a:spcPts val="0"/>
+              </a:spcAft>
+              <a:buClr>
+                <a:srgbClr val="000000"/>
+              </a:buClr>
+              <a:buFont typeface="Arial"/>
+              <a:defRPr sz="1867" b="0" i="0" u="none" strike="noStrike" cap="none">
+                <a:solidFill>
+                  <a:srgbClr val="000000"/>
+                </a:solidFill>
+                <a:latin typeface="Arial"/>
+                <a:ea typeface="Arial"/>
+                <a:cs typeface="Arial"/>
+                <a:sym typeface="Arial"/>
+              </a:defRPr>
+            </a:lvl5pPr>
+            <a:lvl6pPr marR="0" lvl="5" algn="l" rtl="0">
+              <a:lnSpc>
+                <a:spcPct val="100000"/>
+              </a:lnSpc>
+              <a:spcBef>
+                <a:spcPts val="0"/>
+              </a:spcBef>
+              <a:spcAft>
+                <a:spcPts val="0"/>
+              </a:spcAft>
+              <a:buClr>
+                <a:srgbClr val="000000"/>
+              </a:buClr>
+              <a:buFont typeface="Arial"/>
+              <a:defRPr sz="1867" b="0" i="0" u="none" strike="noStrike" cap="none">
+                <a:solidFill>
+                  <a:srgbClr val="000000"/>
+                </a:solidFill>
+                <a:latin typeface="Arial"/>
+                <a:ea typeface="Arial"/>
+                <a:cs typeface="Arial"/>
+                <a:sym typeface="Arial"/>
+              </a:defRPr>
+            </a:lvl6pPr>
+            <a:lvl7pPr marR="0" lvl="6" algn="l" rtl="0">
+              <a:lnSpc>
+                <a:spcPct val="100000"/>
+              </a:lnSpc>
+              <a:spcBef>
+                <a:spcPts val="0"/>
+              </a:spcBef>
+              <a:spcAft>
+                <a:spcPts val="0"/>
+              </a:spcAft>
+              <a:buClr>
+                <a:srgbClr val="000000"/>
+              </a:buClr>
+              <a:buFont typeface="Arial"/>
+              <a:defRPr sz="1867" b="0" i="0" u="none" strike="noStrike" cap="none">
+                <a:solidFill>
+                  <a:srgbClr val="000000"/>
+                </a:solidFill>
+                <a:latin typeface="Arial"/>
+                <a:ea typeface="Arial"/>
+                <a:cs typeface="Arial"/>
+                <a:sym typeface="Arial"/>
+              </a:defRPr>
+            </a:lvl7pPr>
+            <a:lvl8pPr marR="0" lvl="7" algn="l" rtl="0">
+              <a:lnSpc>
+                <a:spcPct val="100000"/>
+              </a:lnSpc>
+              <a:spcBef>
+                <a:spcPts val="0"/>
+              </a:spcBef>
+              <a:spcAft>
+                <a:spcPts val="0"/>
+              </a:spcAft>
+              <a:buClr>
+                <a:srgbClr val="000000"/>
+              </a:buClr>
+              <a:buFont typeface="Arial"/>
+              <a:defRPr sz="1867" b="0" i="0" u="none" strike="noStrike" cap="none">
+                <a:solidFill>
+                  <a:srgbClr val="000000"/>
+                </a:solidFill>
+                <a:latin typeface="Arial"/>
+                <a:ea typeface="Arial"/>
+                <a:cs typeface="Arial"/>
+                <a:sym typeface="Arial"/>
+              </a:defRPr>
+            </a:lvl8pPr>
+            <a:lvl9pPr marR="0" lvl="8" algn="l" rtl="0">
+              <a:lnSpc>
+                <a:spcPct val="100000"/>
+              </a:lnSpc>
+              <a:spcBef>
+                <a:spcPts val="0"/>
+              </a:spcBef>
+              <a:spcAft>
+                <a:spcPts val="0"/>
+              </a:spcAft>
+              <a:buClr>
+                <a:srgbClr val="000000"/>
+              </a:buClr>
+              <a:buFont typeface="Arial"/>
+              <a:defRPr sz="1867" b="0" i="0" u="none" strike="noStrike" cap="none">
+                <a:solidFill>
+                  <a:srgbClr val="000000"/>
+                </a:solidFill>
+                <a:latin typeface="Arial"/>
+                <a:ea typeface="Arial"/>
+                <a:cs typeface="Arial"/>
+                <a:sym typeface="Arial"/>
+              </a:defRPr>
+            </a:lvl9pPr>
+          </a:lstStyle>
+          <a:p>
+            <a:pPr marL="0" lvl="0" indent="0" algn="ctr" rtl="0">
+              <a:spcBef>
+                <a:spcPts val="0"/>
+              </a:spcBef>
+              <a:spcAft>
+                <a:spcPts val="0"/>
+              </a:spcAft>
+              <a:buNone/>
+            </a:pPr>
+            <a:endParaRPr sz="2489">
+              <a:latin typeface="Calibri"/>
+              <a:ea typeface="Calibri"/>
+              <a:cs typeface="Calibri"/>
+              <a:sym typeface="Calibri"/>
+            </a:endParaRPr>
+          </a:p>
+        </p:txBody>
+      </p:sp>
+      <p:sp>
+        <p:nvSpPr>
+          <p:cNvPr id="229" name="Google Shape;229;p34"/>
+          <p:cNvSpPr/>
+          <p:nvPr/>
+        </p:nvSpPr>
+        <p:spPr>
+          <a:xfrm>
+            <a:off x="3280622" y="3861740"/>
+            <a:ext cx="758400" cy="196800"/>
+          </a:xfrm>
+          <a:prstGeom prst="rightArrow">
+            <a:avLst>
+              <a:gd name="adj1" fmla="val 50000"/>
+              <a:gd name="adj2" fmla="val 50000"/>
+            </a:avLst>
+          </a:prstGeom>
+          <a:solidFill>
+            <a:srgbClr val="DFE3E5"/>
+          </a:solidFill>
+          <a:ln w="9525" cap="flat" cmpd="sng">
+            <a:solidFill>
+              <a:srgbClr val="335B74"/>
+            </a:solidFill>
+            <a:prstDash val="solid"/>
+            <a:round/>
+            <a:headEnd type="none" w="sm" len="sm"/>
+            <a:tailEnd type="none" w="sm" len="sm"/>
+          </a:ln>
+          <a:effectLst>
+            <a:outerShdw blurRad="57150" dist="19050" dir="5400000" algn="bl" rotWithShape="0">
+              <a:srgbClr val="000000">
+                <a:alpha val="50000"/>
+              </a:srgbClr>
+            </a:outerShdw>
+          </a:effectLst>
+        </p:spPr>
+        <p:txBody>
+          <a:bodyPr spcFirstLastPara="1" wrap="square" lIns="121900" tIns="121900" rIns="121900" bIns="121900" anchor="ctr" anchorCtr="0">
+            <a:noAutofit/>
+          </a:bodyPr>
+          <a:lstStyle>
+            <a:defPPr marR="0" lvl="0" algn="l" rtl="0">
+              <a:lnSpc>
+                <a:spcPct val="100000"/>
+              </a:lnSpc>
+              <a:spcBef>
+                <a:spcPts val="0"/>
+              </a:spcBef>
+              <a:spcAft>
+                <a:spcPts val="0"/>
+              </a:spcAft>
+            </a:defPPr>
+            <a:lvl1pPr marR="0" lvl="0" algn="l" rtl="0">
+              <a:lnSpc>
+                <a:spcPct val="100000"/>
+              </a:lnSpc>
+              <a:spcBef>
+                <a:spcPts val="0"/>
+              </a:spcBef>
+              <a:spcAft>
+                <a:spcPts val="0"/>
+              </a:spcAft>
+              <a:buClr>
+                <a:srgbClr val="000000"/>
+              </a:buClr>
+              <a:buFont typeface="Arial"/>
+              <a:defRPr sz="1867" b="0" i="0" u="none" strike="noStrike" cap="none">
+                <a:solidFill>
+                  <a:srgbClr val="000000"/>
+                </a:solidFill>
+                <a:latin typeface="Arial"/>
+                <a:ea typeface="Arial"/>
+                <a:cs typeface="Arial"/>
+                <a:sym typeface="Arial"/>
+              </a:defRPr>
+            </a:lvl1pPr>
+            <a:lvl2pPr marR="0" lvl="1" algn="l" rtl="0">
+              <a:lnSpc>
+                <a:spcPct val="100000"/>
+              </a:lnSpc>
+              <a:spcBef>
+                <a:spcPts val="0"/>
+              </a:spcBef>
+              <a:spcAft>
+                <a:spcPts val="0"/>
+              </a:spcAft>
+              <a:buClr>
+                <a:srgbClr val="000000"/>
+              </a:buClr>
+              <a:buFont typeface="Arial"/>
+              <a:defRPr sz="1867" b="0" i="0" u="none" strike="noStrike" cap="none">
+                <a:solidFill>
+                  <a:srgbClr val="000000"/>
+                </a:solidFill>
+                <a:latin typeface="Arial"/>
+                <a:ea typeface="Arial"/>
+                <a:cs typeface="Arial"/>
+                <a:sym typeface="Arial"/>
+              </a:defRPr>
+            </a:lvl2pPr>
+            <a:lvl3pPr marR="0" lvl="2" algn="l" rtl="0">
+              <a:lnSpc>
+                <a:spcPct val="100000"/>
+              </a:lnSpc>
+              <a:spcBef>
+                <a:spcPts val="0"/>
+              </a:spcBef>
+              <a:spcAft>
+                <a:spcPts val="0"/>
+              </a:spcAft>
+              <a:buClr>
+                <a:srgbClr val="000000"/>
+              </a:buClr>
+              <a:buFont typeface="Arial"/>
+              <a:defRPr sz="1867" b="0" i="0" u="none" strike="noStrike" cap="none">
+                <a:solidFill>
+                  <a:srgbClr val="000000"/>
+                </a:solidFill>
+                <a:latin typeface="Arial"/>
+                <a:ea typeface="Arial"/>
+                <a:cs typeface="Arial"/>
+                <a:sym typeface="Arial"/>
+              </a:defRPr>
+            </a:lvl3pPr>
+            <a:lvl4pPr marR="0" lvl="3" algn="l" rtl="0">
+              <a:lnSpc>
+                <a:spcPct val="100000"/>
+              </a:lnSpc>
+              <a:spcBef>
+                <a:spcPts val="0"/>
+              </a:spcBef>
+              <a:spcAft>
+                <a:spcPts val="0"/>
+              </a:spcAft>
+              <a:buClr>
+                <a:srgbClr val="000000"/>
+              </a:buClr>
+              <a:buFont typeface="Arial"/>
+              <a:defRPr sz="1867" b="0" i="0" u="none" strike="noStrike" cap="none">
+                <a:solidFill>
+                  <a:srgbClr val="000000"/>
+                </a:solidFill>
+                <a:latin typeface="Arial"/>
+                <a:ea typeface="Arial"/>
+                <a:cs typeface="Arial"/>
+                <a:sym typeface="Arial"/>
+              </a:defRPr>
+            </a:lvl4pPr>
+            <a:lvl5pPr marR="0" lvl="4" algn="l" rtl="0">
+              <a:lnSpc>
+                <a:spcPct val="100000"/>
+              </a:lnSpc>
+              <a:spcBef>
+                <a:spcPts val="0"/>
+              </a:spcBef>
+              <a:spcAft>
+                <a:spcPts val="0"/>
+              </a:spcAft>
+              <a:buClr>
+                <a:srgbClr val="000000"/>
+              </a:buClr>
+              <a:buFont typeface="Arial"/>
+              <a:defRPr sz="1867" b="0" i="0" u="none" strike="noStrike" cap="none">
+                <a:solidFill>
+                  <a:srgbClr val="000000"/>
+                </a:solidFill>
+                <a:latin typeface="Arial"/>
+                <a:ea typeface="Arial"/>
+                <a:cs typeface="Arial"/>
+                <a:sym typeface="Arial"/>
+              </a:defRPr>
+            </a:lvl5pPr>
+            <a:lvl6pPr marR="0" lvl="5" algn="l" rtl="0">
+              <a:lnSpc>
+                <a:spcPct val="100000"/>
+              </a:lnSpc>
+              <a:spcBef>
+                <a:spcPts val="0"/>
+              </a:spcBef>
+              <a:spcAft>
+                <a:spcPts val="0"/>
+              </a:spcAft>
+              <a:buClr>
+                <a:srgbClr val="000000"/>
+              </a:buClr>
+              <a:buFont typeface="Arial"/>
+              <a:defRPr sz="1867" b="0" i="0" u="none" strike="noStrike" cap="none">
+                <a:solidFill>
+                  <a:srgbClr val="000000"/>
+                </a:solidFill>
+                <a:latin typeface="Arial"/>
+                <a:ea typeface="Arial"/>
+                <a:cs typeface="Arial"/>
+                <a:sym typeface="Arial"/>
+              </a:defRPr>
+            </a:lvl6pPr>
+            <a:lvl7pPr marR="0" lvl="6" algn="l" rtl="0">
+              <a:lnSpc>
+                <a:spcPct val="100000"/>
+              </a:lnSpc>
+              <a:spcBef>
+                <a:spcPts val="0"/>
+              </a:spcBef>
+              <a:spcAft>
+                <a:spcPts val="0"/>
+              </a:spcAft>
+              <a:buClr>
+                <a:srgbClr val="000000"/>
+              </a:buClr>
+              <a:buFont typeface="Arial"/>
+              <a:defRPr sz="1867" b="0" i="0" u="none" strike="noStrike" cap="none">
+                <a:solidFill>
+                  <a:srgbClr val="000000"/>
+                </a:solidFill>
+                <a:latin typeface="Arial"/>
+                <a:ea typeface="Arial"/>
+                <a:cs typeface="Arial"/>
+                <a:sym typeface="Arial"/>
+              </a:defRPr>
+            </a:lvl7pPr>
+            <a:lvl8pPr marR="0" lvl="7" algn="l" rtl="0">
+              <a:lnSpc>
+                <a:spcPct val="100000"/>
+              </a:lnSpc>
+              <a:spcBef>
+                <a:spcPts val="0"/>
+              </a:spcBef>
+              <a:spcAft>
+                <a:spcPts val="0"/>
+              </a:spcAft>
+              <a:buClr>
+                <a:srgbClr val="000000"/>
+              </a:buClr>
+              <a:buFont typeface="Arial"/>
+              <a:defRPr sz="1867" b="0" i="0" u="none" strike="noStrike" cap="none">
+                <a:solidFill>
+                  <a:srgbClr val="000000"/>
+                </a:solidFill>
+                <a:latin typeface="Arial"/>
+                <a:ea typeface="Arial"/>
+                <a:cs typeface="Arial"/>
+                <a:sym typeface="Arial"/>
+              </a:defRPr>
+            </a:lvl8pPr>
+            <a:lvl9pPr marR="0" lvl="8" algn="l" rtl="0">
+              <a:lnSpc>
+                <a:spcPct val="100000"/>
+              </a:lnSpc>
+              <a:spcBef>
+                <a:spcPts val="0"/>
+              </a:spcBef>
+              <a:spcAft>
+                <a:spcPts val="0"/>
+              </a:spcAft>
+              <a:buClr>
+                <a:srgbClr val="000000"/>
+              </a:buClr>
+              <a:buFont typeface="Arial"/>
+              <a:defRPr sz="1867" b="0" i="0" u="none" strike="noStrike" cap="none">
+                <a:solidFill>
+                  <a:srgbClr val="000000"/>
+                </a:solidFill>
+                <a:latin typeface="Arial"/>
+                <a:ea typeface="Arial"/>
+                <a:cs typeface="Arial"/>
+                <a:sym typeface="Arial"/>
+              </a:defRPr>
+            </a:lvl9pPr>
+          </a:lstStyle>
+          <a:p>
+            <a:pPr marL="0" lvl="0" indent="0" algn="ctr" rtl="0">
+              <a:spcBef>
+                <a:spcPts val="0"/>
+              </a:spcBef>
+              <a:spcAft>
+                <a:spcPts val="0"/>
+              </a:spcAft>
+              <a:buNone/>
+            </a:pPr>
+            <a:endParaRPr sz="2489">
+              <a:latin typeface="Calibri"/>
+              <a:ea typeface="Calibri"/>
+              <a:cs typeface="Calibri"/>
+              <a:sym typeface="Calibri"/>
+            </a:endParaRPr>
+          </a:p>
+        </p:txBody>
+      </p:sp>
+      <p:sp>
+        <p:nvSpPr>
+          <p:cNvPr id="230" name="Google Shape;230;p34"/>
+          <p:cNvSpPr/>
+          <p:nvPr/>
+        </p:nvSpPr>
+        <p:spPr>
+          <a:xfrm>
+            <a:off x="5300632" y="3861740"/>
+            <a:ext cx="912400" cy="196800"/>
+          </a:xfrm>
+          <a:prstGeom prst="rightArrow">
+            <a:avLst>
+              <a:gd name="adj1" fmla="val 50000"/>
+              <a:gd name="adj2" fmla="val 50000"/>
+            </a:avLst>
+          </a:prstGeom>
+          <a:solidFill>
+            <a:srgbClr val="DFE3E5"/>
+          </a:solidFill>
+          <a:ln w="9525" cap="flat" cmpd="sng">
+            <a:solidFill>
+              <a:srgbClr val="335B74"/>
+            </a:solidFill>
+            <a:prstDash val="solid"/>
+            <a:round/>
+            <a:headEnd type="none" w="sm" len="sm"/>
+            <a:tailEnd type="none" w="sm" len="sm"/>
+          </a:ln>
+          <a:effectLst>
+            <a:outerShdw blurRad="57150" dist="19050" dir="5400000" algn="bl" rotWithShape="0">
+              <a:srgbClr val="000000">
+                <a:alpha val="50000"/>
+              </a:srgbClr>
+            </a:outerShdw>
+          </a:effectLst>
+        </p:spPr>
+        <p:txBody>
+          <a:bodyPr spcFirstLastPara="1" wrap="square" lIns="121900" tIns="121900" rIns="121900" bIns="121900" anchor="ctr" anchorCtr="0">
+            <a:noAutofit/>
+          </a:bodyPr>
+          <a:lstStyle>
+            <a:defPPr marR="0" lvl="0" algn="l" rtl="0">
+              <a:lnSpc>
+                <a:spcPct val="100000"/>
+              </a:lnSpc>
+              <a:spcBef>
+                <a:spcPts val="0"/>
+              </a:spcBef>
+              <a:spcAft>
+                <a:spcPts val="0"/>
+              </a:spcAft>
+            </a:defPPr>
+            <a:lvl1pPr marR="0" lvl="0" algn="l" rtl="0">
+              <a:lnSpc>
+                <a:spcPct val="100000"/>
+              </a:lnSpc>
+              <a:spcBef>
+                <a:spcPts val="0"/>
+              </a:spcBef>
+              <a:spcAft>
+                <a:spcPts val="0"/>
+              </a:spcAft>
+              <a:buClr>
+                <a:srgbClr val="000000"/>
+              </a:buClr>
+              <a:buFont typeface="Arial"/>
+              <a:defRPr sz="1867" b="0" i="0" u="none" strike="noStrike" cap="none">
+                <a:solidFill>
+                  <a:srgbClr val="000000"/>
+                </a:solidFill>
+                <a:latin typeface="Arial"/>
+                <a:ea typeface="Arial"/>
+                <a:cs typeface="Arial"/>
+                <a:sym typeface="Arial"/>
+              </a:defRPr>
+            </a:lvl1pPr>
+            <a:lvl2pPr marR="0" lvl="1" algn="l" rtl="0">
+              <a:lnSpc>
+                <a:spcPct val="100000"/>
+              </a:lnSpc>
+              <a:spcBef>
+                <a:spcPts val="0"/>
+              </a:spcBef>
+              <a:spcAft>
+                <a:spcPts val="0"/>
+              </a:spcAft>
+              <a:buClr>
+                <a:srgbClr val="000000"/>
+              </a:buClr>
+              <a:buFont typeface="Arial"/>
+              <a:defRPr sz="1867" b="0" i="0" u="none" strike="noStrike" cap="none">
+                <a:solidFill>
+                  <a:srgbClr val="000000"/>
+                </a:solidFill>
+                <a:latin typeface="Arial"/>
+                <a:ea typeface="Arial"/>
+                <a:cs typeface="Arial"/>
+                <a:sym typeface="Arial"/>
+              </a:defRPr>
+            </a:lvl2pPr>
+            <a:lvl3pPr marR="0" lvl="2" algn="l" rtl="0">
+              <a:lnSpc>
+                <a:spcPct val="100000"/>
+              </a:lnSpc>
+              <a:spcBef>
+                <a:spcPts val="0"/>
+              </a:spcBef>
+              <a:spcAft>
+                <a:spcPts val="0"/>
+              </a:spcAft>
+              <a:buClr>
+                <a:srgbClr val="000000"/>
+              </a:buClr>
+              <a:buFont typeface="Arial"/>
+              <a:defRPr sz="1867" b="0" i="0" u="none" strike="noStrike" cap="none">
+                <a:solidFill>
+                  <a:srgbClr val="000000"/>
+                </a:solidFill>
+                <a:latin typeface="Arial"/>
+                <a:ea typeface="Arial"/>
+                <a:cs typeface="Arial"/>
+                <a:sym typeface="Arial"/>
+              </a:defRPr>
+            </a:lvl3pPr>
+            <a:lvl4pPr marR="0" lvl="3" algn="l" rtl="0">
+              <a:lnSpc>
+                <a:spcPct val="100000"/>
+              </a:lnSpc>
+              <a:spcBef>
+                <a:spcPts val="0"/>
+              </a:spcBef>
+              <a:spcAft>
+                <a:spcPts val="0"/>
+              </a:spcAft>
+              <a:buClr>
+                <a:srgbClr val="000000"/>
+              </a:buClr>
+              <a:buFont typeface="Arial"/>
+              <a:defRPr sz="1867" b="0" i="0" u="none" strike="noStrike" cap="none">
+                <a:solidFill>
+                  <a:srgbClr val="000000"/>
+                </a:solidFill>
+                <a:latin typeface="Arial"/>
+                <a:ea typeface="Arial"/>
+                <a:cs typeface="Arial"/>
+                <a:sym typeface="Arial"/>
+              </a:defRPr>
+            </a:lvl4pPr>
+            <a:lvl5pPr marR="0" lvl="4" algn="l" rtl="0">
+              <a:lnSpc>
+                <a:spcPct val="100000"/>
+              </a:lnSpc>
+              <a:spcBef>
+                <a:spcPts val="0"/>
+              </a:spcBef>
+              <a:spcAft>
+                <a:spcPts val="0"/>
+              </a:spcAft>
+              <a:buClr>
+                <a:srgbClr val="000000"/>
+              </a:buClr>
+              <a:buFont typeface="Arial"/>
+              <a:defRPr sz="1867" b="0" i="0" u="none" strike="noStrike" cap="none">
+                <a:solidFill>
+                  <a:srgbClr val="000000"/>
+                </a:solidFill>
+                <a:latin typeface="Arial"/>
+                <a:ea typeface="Arial"/>
+                <a:cs typeface="Arial"/>
+                <a:sym typeface="Arial"/>
+              </a:defRPr>
+            </a:lvl5pPr>
+            <a:lvl6pPr marR="0" lvl="5" algn="l" rtl="0">
+              <a:lnSpc>
+                <a:spcPct val="100000"/>
+              </a:lnSpc>
+              <a:spcBef>
+                <a:spcPts val="0"/>
+              </a:spcBef>
+              <a:spcAft>
+                <a:spcPts val="0"/>
+              </a:spcAft>
+              <a:buClr>
+                <a:srgbClr val="000000"/>
+              </a:buClr>
+              <a:buFont typeface="Arial"/>
+              <a:defRPr sz="1867" b="0" i="0" u="none" strike="noStrike" cap="none">
+                <a:solidFill>
+                  <a:srgbClr val="000000"/>
+                </a:solidFill>
+                <a:latin typeface="Arial"/>
+                <a:ea typeface="Arial"/>
+                <a:cs typeface="Arial"/>
+                <a:sym typeface="Arial"/>
+              </a:defRPr>
+            </a:lvl6pPr>
+            <a:lvl7pPr marR="0" lvl="6" algn="l" rtl="0">
+              <a:lnSpc>
+                <a:spcPct val="100000"/>
+              </a:lnSpc>
+              <a:spcBef>
+                <a:spcPts val="0"/>
+              </a:spcBef>
+              <a:spcAft>
+                <a:spcPts val="0"/>
+              </a:spcAft>
+              <a:buClr>
+                <a:srgbClr val="000000"/>
+              </a:buClr>
+              <a:buFont typeface="Arial"/>
+              <a:defRPr sz="1867" b="0" i="0" u="none" strike="noStrike" cap="none">
+                <a:solidFill>
+                  <a:srgbClr val="000000"/>
+                </a:solidFill>
+                <a:latin typeface="Arial"/>
+                <a:ea typeface="Arial"/>
+                <a:cs typeface="Arial"/>
+                <a:sym typeface="Arial"/>
+              </a:defRPr>
+            </a:lvl7pPr>
+            <a:lvl8pPr marR="0" lvl="7" algn="l" rtl="0">
+              <a:lnSpc>
+                <a:spcPct val="100000"/>
+              </a:lnSpc>
+              <a:spcBef>
+                <a:spcPts val="0"/>
+              </a:spcBef>
+              <a:spcAft>
+                <a:spcPts val="0"/>
+              </a:spcAft>
+              <a:buClr>
+                <a:srgbClr val="000000"/>
+              </a:buClr>
+              <a:buFont typeface="Arial"/>
+              <a:defRPr sz="1867" b="0" i="0" u="none" strike="noStrike" cap="none">
+                <a:solidFill>
+                  <a:srgbClr val="000000"/>
+                </a:solidFill>
+                <a:latin typeface="Arial"/>
+                <a:ea typeface="Arial"/>
+                <a:cs typeface="Arial"/>
+                <a:sym typeface="Arial"/>
+              </a:defRPr>
+            </a:lvl8pPr>
+            <a:lvl9pPr marR="0" lvl="8" algn="l" rtl="0">
+              <a:lnSpc>
+                <a:spcPct val="100000"/>
+              </a:lnSpc>
+              <a:spcBef>
+                <a:spcPts val="0"/>
+              </a:spcBef>
+              <a:spcAft>
+                <a:spcPts val="0"/>
+              </a:spcAft>
+              <a:buClr>
+                <a:srgbClr val="000000"/>
+              </a:buClr>
+              <a:buFont typeface="Arial"/>
+              <a:defRPr sz="1867" b="0" i="0" u="none" strike="noStrike" cap="none">
+                <a:solidFill>
+                  <a:srgbClr val="000000"/>
+                </a:solidFill>
+                <a:latin typeface="Arial"/>
+                <a:ea typeface="Arial"/>
+                <a:cs typeface="Arial"/>
+                <a:sym typeface="Arial"/>
+              </a:defRPr>
+            </a:lvl9pPr>
+          </a:lstStyle>
+          <a:p>
+            <a:pPr marL="0" lvl="0" indent="0" algn="ctr" rtl="0">
+              <a:spcBef>
+                <a:spcPts val="0"/>
+              </a:spcBef>
+              <a:spcAft>
+                <a:spcPts val="0"/>
+              </a:spcAft>
+              <a:buNone/>
+            </a:pPr>
+            <a:endParaRPr sz="2489">
+              <a:latin typeface="Calibri"/>
+              <a:ea typeface="Calibri"/>
+              <a:cs typeface="Calibri"/>
+              <a:sym typeface="Calibri"/>
+            </a:endParaRPr>
+          </a:p>
+        </p:txBody>
+      </p:sp>
+      <p:sp>
+        <p:nvSpPr>
+          <p:cNvPr id="231" name="Google Shape;231;p34"/>
+          <p:cNvSpPr/>
+          <p:nvPr/>
+        </p:nvSpPr>
+        <p:spPr>
+          <a:xfrm>
+            <a:off x="8209031" y="3861740"/>
+            <a:ext cx="826000" cy="196800"/>
+          </a:xfrm>
+          <a:prstGeom prst="rightArrow">
+            <a:avLst>
+              <a:gd name="adj1" fmla="val 50000"/>
+              <a:gd name="adj2" fmla="val 50000"/>
+            </a:avLst>
+          </a:prstGeom>
+          <a:solidFill>
+            <a:srgbClr val="DFE3E5"/>
+          </a:solidFill>
+          <a:ln w="9525" cap="flat" cmpd="sng">
+            <a:solidFill>
+              <a:srgbClr val="335B74"/>
+            </a:solidFill>
+            <a:prstDash val="solid"/>
+            <a:round/>
+            <a:headEnd type="none" w="sm" len="sm"/>
+            <a:tailEnd type="none" w="sm" len="sm"/>
+          </a:ln>
+          <a:effectLst>
+            <a:outerShdw blurRad="57150" dist="19050" dir="5400000" algn="bl" rotWithShape="0">
+              <a:srgbClr val="000000">
+                <a:alpha val="50000"/>
+              </a:srgbClr>
+            </a:outerShdw>
+          </a:effectLst>
+        </p:spPr>
+        <p:txBody>
+          <a:bodyPr spcFirstLastPara="1" wrap="square" lIns="121900" tIns="121900" rIns="121900" bIns="121900" anchor="ctr" anchorCtr="0">
+            <a:noAutofit/>
+          </a:bodyPr>
+          <a:lstStyle>
+            <a:defPPr marR="0" lvl="0" algn="l" rtl="0">
+              <a:lnSpc>
+                <a:spcPct val="100000"/>
+              </a:lnSpc>
+              <a:spcBef>
+                <a:spcPts val="0"/>
+              </a:spcBef>
+              <a:spcAft>
+                <a:spcPts val="0"/>
+              </a:spcAft>
+            </a:defPPr>
+            <a:lvl1pPr marR="0" lvl="0" algn="l" rtl="0">
+              <a:lnSpc>
+                <a:spcPct val="100000"/>
+              </a:lnSpc>
+              <a:spcBef>
+                <a:spcPts val="0"/>
+              </a:spcBef>
+              <a:spcAft>
+                <a:spcPts val="0"/>
+              </a:spcAft>
+              <a:buClr>
+                <a:srgbClr val="000000"/>
+              </a:buClr>
+              <a:buFont typeface="Arial"/>
+              <a:defRPr sz="1867" b="0" i="0" u="none" strike="noStrike" cap="none">
+                <a:solidFill>
+                  <a:srgbClr val="000000"/>
+                </a:solidFill>
+                <a:latin typeface="Arial"/>
+                <a:ea typeface="Arial"/>
+                <a:cs typeface="Arial"/>
+                <a:sym typeface="Arial"/>
+              </a:defRPr>
+            </a:lvl1pPr>
+            <a:lvl2pPr marR="0" lvl="1" algn="l" rtl="0">
+              <a:lnSpc>
+                <a:spcPct val="100000"/>
+              </a:lnSpc>
+              <a:spcBef>
+                <a:spcPts val="0"/>
+              </a:spcBef>
+              <a:spcAft>
+                <a:spcPts val="0"/>
+              </a:spcAft>
+              <a:buClr>
+                <a:srgbClr val="000000"/>
+              </a:buClr>
+              <a:buFont typeface="Arial"/>
+              <a:defRPr sz="1867" b="0" i="0" u="none" strike="noStrike" cap="none">
+                <a:solidFill>
+                  <a:srgbClr val="000000"/>
+                </a:solidFill>
+                <a:latin typeface="Arial"/>
+                <a:ea typeface="Arial"/>
+                <a:cs typeface="Arial"/>
+                <a:sym typeface="Arial"/>
+              </a:defRPr>
+            </a:lvl2pPr>
+            <a:lvl3pPr marR="0" lvl="2" algn="l" rtl="0">
+              <a:lnSpc>
+                <a:spcPct val="100000"/>
+              </a:lnSpc>
+              <a:spcBef>
+                <a:spcPts val="0"/>
+              </a:spcBef>
+              <a:spcAft>
+                <a:spcPts val="0"/>
+              </a:spcAft>
+              <a:buClr>
+                <a:srgbClr val="000000"/>
+              </a:buClr>
+              <a:buFont typeface="Arial"/>
+              <a:defRPr sz="1867" b="0" i="0" u="none" strike="noStrike" cap="none">
+                <a:solidFill>
+                  <a:srgbClr val="000000"/>
+                </a:solidFill>
+                <a:latin typeface="Arial"/>
+                <a:ea typeface="Arial"/>
+                <a:cs typeface="Arial"/>
+                <a:sym typeface="Arial"/>
+              </a:defRPr>
+            </a:lvl3pPr>
+            <a:lvl4pPr marR="0" lvl="3" algn="l" rtl="0">
+              <a:lnSpc>
+                <a:spcPct val="100000"/>
+              </a:lnSpc>
+              <a:spcBef>
+                <a:spcPts val="0"/>
+              </a:spcBef>
+              <a:spcAft>
+                <a:spcPts val="0"/>
+              </a:spcAft>
+              <a:buClr>
+                <a:srgbClr val="000000"/>
+              </a:buClr>
+              <a:buFont typeface="Arial"/>
+              <a:defRPr sz="1867" b="0" i="0" u="none" strike="noStrike" cap="none">
+                <a:solidFill>
+                  <a:srgbClr val="000000"/>
+                </a:solidFill>
+                <a:latin typeface="Arial"/>
+                <a:ea typeface="Arial"/>
+                <a:cs typeface="Arial"/>
+                <a:sym typeface="Arial"/>
+              </a:defRPr>
+            </a:lvl4pPr>
+            <a:lvl5pPr marR="0" lvl="4" algn="l" rtl="0">
+              <a:lnSpc>
+                <a:spcPct val="100000"/>
+              </a:lnSpc>
+              <a:spcBef>
+                <a:spcPts val="0"/>
+              </a:spcBef>
+              <a:spcAft>
+                <a:spcPts val="0"/>
+              </a:spcAft>
+              <a:buClr>
+                <a:srgbClr val="000000"/>
+              </a:buClr>
+              <a:buFont typeface="Arial"/>
+              <a:defRPr sz="1867" b="0" i="0" u="none" strike="noStrike" cap="none">
+                <a:solidFill>
+                  <a:srgbClr val="000000"/>
+                </a:solidFill>
+                <a:latin typeface="Arial"/>
+                <a:ea typeface="Arial"/>
+                <a:cs typeface="Arial"/>
+                <a:sym typeface="Arial"/>
+              </a:defRPr>
+            </a:lvl5pPr>
+            <a:lvl6pPr marR="0" lvl="5" algn="l" rtl="0">
+              <a:lnSpc>
+                <a:spcPct val="100000"/>
+              </a:lnSpc>
+              <a:spcBef>
+                <a:spcPts val="0"/>
+              </a:spcBef>
+              <a:spcAft>
+                <a:spcPts val="0"/>
+              </a:spcAft>
+              <a:buClr>
+                <a:srgbClr val="000000"/>
+              </a:buClr>
+              <a:buFont typeface="Arial"/>
+              <a:defRPr sz="1867" b="0" i="0" u="none" strike="noStrike" cap="none">
+                <a:solidFill>
+                  <a:srgbClr val="000000"/>
+                </a:solidFill>
+                <a:latin typeface="Arial"/>
+                <a:ea typeface="Arial"/>
+                <a:cs typeface="Arial"/>
+                <a:sym typeface="Arial"/>
+              </a:defRPr>
+            </a:lvl6pPr>
+            <a:lvl7pPr marR="0" lvl="6" algn="l" rtl="0">
+              <a:lnSpc>
+                <a:spcPct val="100000"/>
+              </a:lnSpc>
+              <a:spcBef>
+                <a:spcPts val="0"/>
+              </a:spcBef>
+              <a:spcAft>
+                <a:spcPts val="0"/>
+              </a:spcAft>
+              <a:buClr>
+                <a:srgbClr val="000000"/>
+              </a:buClr>
+              <a:buFont typeface="Arial"/>
+              <a:defRPr sz="1867" b="0" i="0" u="none" strike="noStrike" cap="none">
+                <a:solidFill>
+                  <a:srgbClr val="000000"/>
+                </a:solidFill>
+                <a:latin typeface="Arial"/>
+                <a:ea typeface="Arial"/>
+                <a:cs typeface="Arial"/>
+                <a:sym typeface="Arial"/>
+              </a:defRPr>
+            </a:lvl7pPr>
+            <a:lvl8pPr marR="0" lvl="7" algn="l" rtl="0">
+              <a:lnSpc>
+                <a:spcPct val="100000"/>
+              </a:lnSpc>
+              <a:spcBef>
+                <a:spcPts val="0"/>
+              </a:spcBef>
+              <a:spcAft>
+                <a:spcPts val="0"/>
+              </a:spcAft>
+              <a:buClr>
+                <a:srgbClr val="000000"/>
+              </a:buClr>
+              <a:buFont typeface="Arial"/>
+              <a:defRPr sz="1867" b="0" i="0" u="none" strike="noStrike" cap="none">
+                <a:solidFill>
+                  <a:srgbClr val="000000"/>
+                </a:solidFill>
+                <a:latin typeface="Arial"/>
+                <a:ea typeface="Arial"/>
+                <a:cs typeface="Arial"/>
+                <a:sym typeface="Arial"/>
+              </a:defRPr>
+            </a:lvl8pPr>
+            <a:lvl9pPr marR="0" lvl="8" algn="l" rtl="0">
+              <a:lnSpc>
+                <a:spcPct val="100000"/>
+              </a:lnSpc>
+              <a:spcBef>
+                <a:spcPts val="0"/>
+              </a:spcBef>
+              <a:spcAft>
+                <a:spcPts val="0"/>
+              </a:spcAft>
+              <a:buClr>
+                <a:srgbClr val="000000"/>
+              </a:buClr>
+              <a:buFont typeface="Arial"/>
+              <a:defRPr sz="1867" b="0" i="0" u="none" strike="noStrike" cap="none">
+                <a:solidFill>
+                  <a:srgbClr val="000000"/>
+                </a:solidFill>
+                <a:latin typeface="Arial"/>
+                <a:ea typeface="Arial"/>
+                <a:cs typeface="Arial"/>
+                <a:sym typeface="Arial"/>
+              </a:defRPr>
+            </a:lvl9pPr>
+          </a:lstStyle>
+          <a:p>
+            <a:pPr marL="0" lvl="0" indent="0" algn="ctr" rtl="0">
+              <a:spcBef>
+                <a:spcPts val="0"/>
+              </a:spcBef>
+              <a:spcAft>
+                <a:spcPts val="0"/>
+              </a:spcAft>
+              <a:buNone/>
+            </a:pPr>
+            <a:endParaRPr sz="2489">
+              <a:latin typeface="Calibri"/>
+              <a:ea typeface="Calibri"/>
+              <a:cs typeface="Calibri"/>
+              <a:sym typeface="Calibri"/>
+            </a:endParaRPr>
+          </a:p>
+        </p:txBody>
+      </p:sp>
+      <p:pic>
+        <p:nvPicPr>
+          <p:cNvPr id="232" name="Google Shape;232;p34"/>
+          <p:cNvPicPr preferRelativeResize="0"/>
+          <p:nvPr/>
+        </p:nvPicPr>
+        <p:blipFill>
+          <a:blip r:embed="rId3">
+            <a:alphaModFix/>
+          </a:blip>
+          <a:stretch>
+            <a:fillRect/>
+          </a:stretch>
+        </p:blipFill>
+        <p:spPr>
+          <a:xfrm>
+            <a:off x="4665939" y="2252000"/>
+            <a:ext cx="5124465" cy="3416292"/>
+          </a:xfrm>
+          <a:prstGeom prst="rect">
+            <a:avLst/>
+          </a:prstGeom>
+          <a:noFill/>
+          <a:ln>
+            <a:noFill/>
+          </a:ln>
+        </p:spPr>
+      </p:pic>
+      <p:sp>
+        <p:nvSpPr>
+          <p:cNvPr id="5" name="Google Shape;211;p33">
+            <a:extLst>
+              <a:ext uri="{FF2B5EF4-FFF2-40B4-BE49-F238E27FC236}">
+                <a16:creationId xmlns:a16="http://schemas.microsoft.com/office/drawing/2014/main" id="{E0E47159-A9F5-6412-F898-29C79B02E900}"/>
+              </a:ext>
+            </a:extLst>
+          </p:cNvPr>
+          <p:cNvSpPr/>
+          <p:nvPr/>
+        </p:nvSpPr>
+        <p:spPr>
+          <a:xfrm>
+            <a:off x="2052971" y="3440514"/>
+            <a:ext cx="1158800" cy="528400"/>
+          </a:xfrm>
+          <a:prstGeom prst="rect">
+            <a:avLst/>
+          </a:prstGeom>
+          <a:noFill/>
+          <a:ln w="19050" cap="flat" cmpd="sng">
+            <a:solidFill>
+              <a:srgbClr val="9900FF"/>
+            </a:solidFill>
+            <a:prstDash val="solid"/>
+            <a:round/>
+            <a:headEnd type="none" w="sm" len="sm"/>
+            <a:tailEnd type="none" w="sm" len="sm"/>
+          </a:ln>
+          <a:effectLst>
+            <a:outerShdw blurRad="57150" dist="19050" dir="5400000" algn="bl" rotWithShape="0">
+              <a:srgbClr val="000000">
+                <a:alpha val="50000"/>
+              </a:srgbClr>
+            </a:outerShdw>
+          </a:effectLst>
+        </p:spPr>
+        <p:txBody>
+          <a:bodyPr spcFirstLastPara="1" wrap="square" lIns="121900" tIns="121900" rIns="121900" bIns="121900" anchor="ctr" anchorCtr="0">
+            <a:noAutofit/>
+          </a:bodyPr>
+          <a:lstStyle>
+            <a:defPPr marR="0" lvl="0" algn="l" rtl="0">
+              <a:lnSpc>
+                <a:spcPct val="100000"/>
+              </a:lnSpc>
+              <a:spcBef>
+                <a:spcPts val="0"/>
+              </a:spcBef>
+              <a:spcAft>
+                <a:spcPts val="0"/>
+              </a:spcAft>
+            </a:defPPr>
+            <a:lvl1pPr marR="0" lvl="0" algn="l" rtl="0">
+              <a:lnSpc>
+                <a:spcPct val="100000"/>
+              </a:lnSpc>
+              <a:spcBef>
+                <a:spcPts val="0"/>
+              </a:spcBef>
+              <a:spcAft>
+                <a:spcPts val="0"/>
+              </a:spcAft>
+              <a:buClr>
+                <a:srgbClr val="000000"/>
+              </a:buClr>
+              <a:buFont typeface="Arial"/>
+              <a:defRPr sz="1867" b="0" i="0" u="none" strike="noStrike" cap="none">
+                <a:solidFill>
+                  <a:srgbClr val="000000"/>
+                </a:solidFill>
+                <a:latin typeface="Arial"/>
+                <a:ea typeface="Arial"/>
+                <a:cs typeface="Arial"/>
+                <a:sym typeface="Arial"/>
+              </a:defRPr>
+            </a:lvl1pPr>
+            <a:lvl2pPr marR="0" lvl="1" algn="l" rtl="0">
+              <a:lnSpc>
+                <a:spcPct val="100000"/>
+              </a:lnSpc>
+              <a:spcBef>
+                <a:spcPts val="0"/>
+              </a:spcBef>
+              <a:spcAft>
+                <a:spcPts val="0"/>
+              </a:spcAft>
+              <a:buClr>
+                <a:srgbClr val="000000"/>
+              </a:buClr>
+              <a:buFont typeface="Arial"/>
+              <a:defRPr sz="1867" b="0" i="0" u="none" strike="noStrike" cap="none">
+                <a:solidFill>
+                  <a:srgbClr val="000000"/>
+                </a:solidFill>
+                <a:latin typeface="Arial"/>
+                <a:ea typeface="Arial"/>
+                <a:cs typeface="Arial"/>
+                <a:sym typeface="Arial"/>
+              </a:defRPr>
+            </a:lvl2pPr>
+            <a:lvl3pPr marR="0" lvl="2" algn="l" rtl="0">
+              <a:lnSpc>
+                <a:spcPct val="100000"/>
+              </a:lnSpc>
+              <a:spcBef>
+                <a:spcPts val="0"/>
+              </a:spcBef>
+              <a:spcAft>
+                <a:spcPts val="0"/>
+              </a:spcAft>
+              <a:buClr>
+                <a:srgbClr val="000000"/>
+              </a:buClr>
+              <a:buFont typeface="Arial"/>
+              <a:defRPr sz="1867" b="0" i="0" u="none" strike="noStrike" cap="none">
+                <a:solidFill>
+                  <a:srgbClr val="000000"/>
+                </a:solidFill>
+                <a:latin typeface="Arial"/>
+                <a:ea typeface="Arial"/>
+                <a:cs typeface="Arial"/>
+                <a:sym typeface="Arial"/>
+              </a:defRPr>
+            </a:lvl3pPr>
+            <a:lvl4pPr marR="0" lvl="3" algn="l" rtl="0">
+              <a:lnSpc>
+                <a:spcPct val="100000"/>
+              </a:lnSpc>
+              <a:spcBef>
+                <a:spcPts val="0"/>
+              </a:spcBef>
+              <a:spcAft>
+                <a:spcPts val="0"/>
+              </a:spcAft>
+              <a:buClr>
+                <a:srgbClr val="000000"/>
+              </a:buClr>
+              <a:buFont typeface="Arial"/>
+              <a:defRPr sz="1867" b="0" i="0" u="none" strike="noStrike" cap="none">
+                <a:solidFill>
+                  <a:srgbClr val="000000"/>
+                </a:solidFill>
+                <a:latin typeface="Arial"/>
+                <a:ea typeface="Arial"/>
+                <a:cs typeface="Arial"/>
+                <a:sym typeface="Arial"/>
+              </a:defRPr>
+            </a:lvl4pPr>
+            <a:lvl5pPr marR="0" lvl="4" algn="l" rtl="0">
+              <a:lnSpc>
+                <a:spcPct val="100000"/>
+              </a:lnSpc>
+              <a:spcBef>
+                <a:spcPts val="0"/>
+              </a:spcBef>
+              <a:spcAft>
+                <a:spcPts val="0"/>
+              </a:spcAft>
+              <a:buClr>
+                <a:srgbClr val="000000"/>
+              </a:buClr>
+              <a:buFont typeface="Arial"/>
+              <a:defRPr sz="1867" b="0" i="0" u="none" strike="noStrike" cap="none">
+                <a:solidFill>
+                  <a:srgbClr val="000000"/>
+                </a:solidFill>
+                <a:latin typeface="Arial"/>
+                <a:ea typeface="Arial"/>
+                <a:cs typeface="Arial"/>
+                <a:sym typeface="Arial"/>
+              </a:defRPr>
+            </a:lvl5pPr>
+            <a:lvl6pPr marR="0" lvl="5" algn="l" rtl="0">
+              <a:lnSpc>
+                <a:spcPct val="100000"/>
+              </a:lnSpc>
+              <a:spcBef>
+                <a:spcPts val="0"/>
+              </a:spcBef>
+              <a:spcAft>
+                <a:spcPts val="0"/>
+              </a:spcAft>
+              <a:buClr>
+                <a:srgbClr val="000000"/>
+              </a:buClr>
+              <a:buFont typeface="Arial"/>
+              <a:defRPr sz="1867" b="0" i="0" u="none" strike="noStrike" cap="none">
+                <a:solidFill>
+                  <a:srgbClr val="000000"/>
+                </a:solidFill>
+                <a:latin typeface="Arial"/>
+                <a:ea typeface="Arial"/>
+                <a:cs typeface="Arial"/>
+                <a:sym typeface="Arial"/>
+              </a:defRPr>
+            </a:lvl6pPr>
+            <a:lvl7pPr marR="0" lvl="6" algn="l" rtl="0">
+              <a:lnSpc>
+                <a:spcPct val="100000"/>
+              </a:lnSpc>
+              <a:spcBef>
+                <a:spcPts val="0"/>
+              </a:spcBef>
+              <a:spcAft>
+                <a:spcPts val="0"/>
+              </a:spcAft>
+              <a:buClr>
+                <a:srgbClr val="000000"/>
+              </a:buClr>
+              <a:buFont typeface="Arial"/>
+              <a:defRPr sz="1867" b="0" i="0" u="none" strike="noStrike" cap="none">
+                <a:solidFill>
+                  <a:srgbClr val="000000"/>
+                </a:solidFill>
+                <a:latin typeface="Arial"/>
+                <a:ea typeface="Arial"/>
+                <a:cs typeface="Arial"/>
+                <a:sym typeface="Arial"/>
+              </a:defRPr>
+            </a:lvl7pPr>
+            <a:lvl8pPr marR="0" lvl="7" algn="l" rtl="0">
+              <a:lnSpc>
+                <a:spcPct val="100000"/>
+              </a:lnSpc>
+              <a:spcBef>
+                <a:spcPts val="0"/>
+              </a:spcBef>
+              <a:spcAft>
+                <a:spcPts val="0"/>
+              </a:spcAft>
+              <a:buClr>
+                <a:srgbClr val="000000"/>
+              </a:buClr>
+              <a:buFont typeface="Arial"/>
+              <a:defRPr sz="1867" b="0" i="0" u="none" strike="noStrike" cap="none">
+                <a:solidFill>
+                  <a:srgbClr val="000000"/>
+                </a:solidFill>
+                <a:latin typeface="Arial"/>
+                <a:ea typeface="Arial"/>
+                <a:cs typeface="Arial"/>
+                <a:sym typeface="Arial"/>
+              </a:defRPr>
+            </a:lvl8pPr>
+            <a:lvl9pPr marR="0" lvl="8" algn="l" rtl="0">
+              <a:lnSpc>
+                <a:spcPct val="100000"/>
+              </a:lnSpc>
+              <a:spcBef>
+                <a:spcPts val="0"/>
+              </a:spcBef>
+              <a:spcAft>
+                <a:spcPts val="0"/>
+              </a:spcAft>
+              <a:buClr>
+                <a:srgbClr val="000000"/>
+              </a:buClr>
+              <a:buFont typeface="Arial"/>
+              <a:defRPr sz="1867" b="0" i="0" u="none" strike="noStrike" cap="none">
+                <a:solidFill>
+                  <a:srgbClr val="000000"/>
+                </a:solidFill>
+                <a:latin typeface="Arial"/>
+                <a:ea typeface="Arial"/>
+                <a:cs typeface="Arial"/>
+                <a:sym typeface="Arial"/>
+              </a:defRPr>
+            </a:lvl9pPr>
+          </a:lstStyle>
+          <a:p>
+            <a:pPr marL="0" lvl="0" indent="0" algn="ctr" rtl="0">
+              <a:spcBef>
+                <a:spcPts val="0"/>
+              </a:spcBef>
+              <a:spcAft>
+                <a:spcPts val="0"/>
+              </a:spcAft>
+              <a:buNone/>
+            </a:pPr>
+            <a:endParaRPr sz="2489">
+              <a:latin typeface="Source Code Pro"/>
+              <a:ea typeface="Source Code Pro"/>
+              <a:cs typeface="Source Code Pro"/>
+              <a:sym typeface="Source Code Pro"/>
+            </a:endParaRPr>
+          </a:p>
+        </p:txBody>
+      </p:sp>
+      <p:sp>
+        <p:nvSpPr>
+          <p:cNvPr id="7" name="Google Shape;195;p33">
+            <a:extLst>
+              <a:ext uri="{FF2B5EF4-FFF2-40B4-BE49-F238E27FC236}">
+                <a16:creationId xmlns:a16="http://schemas.microsoft.com/office/drawing/2014/main" id="{055C77B6-9701-0DEB-0EE9-EA42C30DD5F5}"/>
+              </a:ext>
+            </a:extLst>
+          </p:cNvPr>
+          <p:cNvSpPr txBox="1"/>
+          <p:nvPr/>
+        </p:nvSpPr>
+        <p:spPr>
+          <a:xfrm>
+            <a:off x="435173" y="547190"/>
+            <a:ext cx="13160400" cy="1091200"/>
+          </a:xfrm>
+          <a:prstGeom prst="rect">
+            <a:avLst/>
+          </a:prstGeom>
+          <a:noFill/>
+          <a:ln>
+            <a:noFill/>
+          </a:ln>
+        </p:spPr>
+        <p:txBody>
+          <a:bodyPr spcFirstLastPara="1" wrap="square" lIns="0" tIns="60933" rIns="0" bIns="60933" anchor="t" anchorCtr="0">
+            <a:normAutofit/>
+          </a:bodyPr>
+          <a:lstStyle>
+            <a:defPPr marR="0" lvl="0" algn="l" rtl="0">
+              <a:lnSpc>
+                <a:spcPct val="100000"/>
+              </a:lnSpc>
+              <a:spcBef>
+                <a:spcPts val="0"/>
+              </a:spcBef>
+              <a:spcAft>
+                <a:spcPts val="0"/>
+              </a:spcAft>
+            </a:defPPr>
+            <a:lvl1pPr marR="0" lvl="0" algn="l" rtl="0">
+              <a:lnSpc>
+                <a:spcPct val="100000"/>
+              </a:lnSpc>
+              <a:spcBef>
+                <a:spcPts val="0"/>
+              </a:spcBef>
+              <a:spcAft>
+                <a:spcPts val="0"/>
+              </a:spcAft>
+              <a:buClr>
+                <a:srgbClr val="000000"/>
+              </a:buClr>
+              <a:buFont typeface="Arial"/>
+              <a:defRPr sz="1867" b="0" i="0" u="none" strike="noStrike" cap="none">
+                <a:solidFill>
+                  <a:srgbClr val="000000"/>
+                </a:solidFill>
+                <a:latin typeface="Arial"/>
+                <a:ea typeface="Arial"/>
+                <a:cs typeface="Arial"/>
+                <a:sym typeface="Arial"/>
+              </a:defRPr>
+            </a:lvl1pPr>
+            <a:lvl2pPr marR="0" lvl="1" algn="l" rtl="0">
+              <a:lnSpc>
+                <a:spcPct val="100000"/>
+              </a:lnSpc>
+              <a:spcBef>
+                <a:spcPts val="0"/>
+              </a:spcBef>
+              <a:spcAft>
+                <a:spcPts val="0"/>
+              </a:spcAft>
+              <a:buClr>
+                <a:srgbClr val="000000"/>
+              </a:buClr>
+              <a:buFont typeface="Arial"/>
+              <a:defRPr sz="1867" b="0" i="0" u="none" strike="noStrike" cap="none">
+                <a:solidFill>
+                  <a:srgbClr val="000000"/>
+                </a:solidFill>
+                <a:latin typeface="Arial"/>
+                <a:ea typeface="Arial"/>
+                <a:cs typeface="Arial"/>
+                <a:sym typeface="Arial"/>
+              </a:defRPr>
+            </a:lvl2pPr>
+            <a:lvl3pPr marR="0" lvl="2" algn="l" rtl="0">
+              <a:lnSpc>
+                <a:spcPct val="100000"/>
+              </a:lnSpc>
+              <a:spcBef>
+                <a:spcPts val="0"/>
+              </a:spcBef>
+              <a:spcAft>
+                <a:spcPts val="0"/>
+              </a:spcAft>
+              <a:buClr>
+                <a:srgbClr val="000000"/>
+              </a:buClr>
+              <a:buFont typeface="Arial"/>
+              <a:defRPr sz="1867" b="0" i="0" u="none" strike="noStrike" cap="none">
+                <a:solidFill>
+                  <a:srgbClr val="000000"/>
+                </a:solidFill>
+                <a:latin typeface="Arial"/>
+                <a:ea typeface="Arial"/>
+                <a:cs typeface="Arial"/>
+                <a:sym typeface="Arial"/>
+              </a:defRPr>
+            </a:lvl3pPr>
+            <a:lvl4pPr marR="0" lvl="3" algn="l" rtl="0">
+              <a:lnSpc>
+                <a:spcPct val="100000"/>
+              </a:lnSpc>
+              <a:spcBef>
+                <a:spcPts val="0"/>
+              </a:spcBef>
+              <a:spcAft>
+                <a:spcPts val="0"/>
+              </a:spcAft>
+              <a:buClr>
+                <a:srgbClr val="000000"/>
+              </a:buClr>
+              <a:buFont typeface="Arial"/>
+              <a:defRPr sz="1867" b="0" i="0" u="none" strike="noStrike" cap="none">
+                <a:solidFill>
+                  <a:srgbClr val="000000"/>
+                </a:solidFill>
+                <a:latin typeface="Arial"/>
+                <a:ea typeface="Arial"/>
+                <a:cs typeface="Arial"/>
+                <a:sym typeface="Arial"/>
+              </a:defRPr>
+            </a:lvl4pPr>
+            <a:lvl5pPr marR="0" lvl="4" algn="l" rtl="0">
+              <a:lnSpc>
+                <a:spcPct val="100000"/>
+              </a:lnSpc>
+              <a:spcBef>
+                <a:spcPts val="0"/>
+              </a:spcBef>
+              <a:spcAft>
+                <a:spcPts val="0"/>
+              </a:spcAft>
+              <a:buClr>
+                <a:srgbClr val="000000"/>
+              </a:buClr>
+              <a:buFont typeface="Arial"/>
+              <a:defRPr sz="1867" b="0" i="0" u="none" strike="noStrike" cap="none">
+                <a:solidFill>
+                  <a:srgbClr val="000000"/>
+                </a:solidFill>
+                <a:latin typeface="Arial"/>
+                <a:ea typeface="Arial"/>
+                <a:cs typeface="Arial"/>
+                <a:sym typeface="Arial"/>
+              </a:defRPr>
+            </a:lvl5pPr>
+            <a:lvl6pPr marR="0" lvl="5" algn="l" rtl="0">
+              <a:lnSpc>
+                <a:spcPct val="100000"/>
+              </a:lnSpc>
+              <a:spcBef>
+                <a:spcPts val="0"/>
+              </a:spcBef>
+              <a:spcAft>
+                <a:spcPts val="0"/>
+              </a:spcAft>
+              <a:buClr>
+                <a:srgbClr val="000000"/>
+              </a:buClr>
+              <a:buFont typeface="Arial"/>
+              <a:defRPr sz="1867" b="0" i="0" u="none" strike="noStrike" cap="none">
+                <a:solidFill>
+                  <a:srgbClr val="000000"/>
+                </a:solidFill>
+                <a:latin typeface="Arial"/>
+                <a:ea typeface="Arial"/>
+                <a:cs typeface="Arial"/>
+                <a:sym typeface="Arial"/>
+              </a:defRPr>
+            </a:lvl6pPr>
+            <a:lvl7pPr marR="0" lvl="6" algn="l" rtl="0">
+              <a:lnSpc>
+                <a:spcPct val="100000"/>
+              </a:lnSpc>
+              <a:spcBef>
+                <a:spcPts val="0"/>
+              </a:spcBef>
+              <a:spcAft>
+                <a:spcPts val="0"/>
+              </a:spcAft>
+              <a:buClr>
+                <a:srgbClr val="000000"/>
+              </a:buClr>
+              <a:buFont typeface="Arial"/>
+              <a:defRPr sz="1867" b="0" i="0" u="none" strike="noStrike" cap="none">
+                <a:solidFill>
+                  <a:srgbClr val="000000"/>
+                </a:solidFill>
+                <a:latin typeface="Arial"/>
+                <a:ea typeface="Arial"/>
+                <a:cs typeface="Arial"/>
+                <a:sym typeface="Arial"/>
+              </a:defRPr>
+            </a:lvl7pPr>
+            <a:lvl8pPr marR="0" lvl="7" algn="l" rtl="0">
+              <a:lnSpc>
+                <a:spcPct val="100000"/>
+              </a:lnSpc>
+              <a:spcBef>
+                <a:spcPts val="0"/>
+              </a:spcBef>
+              <a:spcAft>
+                <a:spcPts val="0"/>
+              </a:spcAft>
+              <a:buClr>
+                <a:srgbClr val="000000"/>
+              </a:buClr>
+              <a:buFont typeface="Arial"/>
+              <a:defRPr sz="1867" b="0" i="0" u="none" strike="noStrike" cap="none">
+                <a:solidFill>
+                  <a:srgbClr val="000000"/>
+                </a:solidFill>
+                <a:latin typeface="Arial"/>
+                <a:ea typeface="Arial"/>
+                <a:cs typeface="Arial"/>
+                <a:sym typeface="Arial"/>
+              </a:defRPr>
+            </a:lvl8pPr>
+            <a:lvl9pPr marR="0" lvl="8" algn="l" rtl="0">
+              <a:lnSpc>
+                <a:spcPct val="100000"/>
+              </a:lnSpc>
+              <a:spcBef>
+                <a:spcPts val="0"/>
+              </a:spcBef>
+              <a:spcAft>
+                <a:spcPts val="0"/>
+              </a:spcAft>
+              <a:buClr>
+                <a:srgbClr val="000000"/>
+              </a:buClr>
+              <a:buFont typeface="Arial"/>
+              <a:defRPr sz="1867" b="0" i="0" u="none" strike="noStrike" cap="none">
+                <a:solidFill>
+                  <a:srgbClr val="000000"/>
+                </a:solidFill>
+                <a:latin typeface="Arial"/>
+                <a:ea typeface="Arial"/>
+                <a:cs typeface="Arial"/>
+                <a:sym typeface="Arial"/>
+              </a:defRPr>
+            </a:lvl9pPr>
+          </a:lstStyle>
+          <a:p>
+            <a:r>
+              <a:rPr lang="en-GB" sz="2700" b="1" u="sng" dirty="0">
+                <a:solidFill>
+                  <a:srgbClr val="3F3F3F"/>
+                </a:solidFill>
+                <a:latin typeface="Source Code Pro"/>
+                <a:ea typeface="Source Code Pro"/>
+                <a:cs typeface="Source Code Pro"/>
+                <a:sym typeface="Source Code Pro"/>
+              </a:rPr>
+              <a:t>B</a:t>
+            </a:r>
+            <a:r>
+              <a:rPr lang="en-GB" sz="2700" dirty="0">
+                <a:solidFill>
+                  <a:srgbClr val="3F3F3F"/>
+                </a:solidFill>
+                <a:latin typeface="Source Code Pro"/>
+                <a:ea typeface="Source Code Pro"/>
+                <a:cs typeface="Source Code Pro"/>
+                <a:sym typeface="Source Code Pro"/>
+              </a:rPr>
+              <a:t>idirectional </a:t>
+            </a:r>
+            <a:r>
+              <a:rPr lang="en-GB" sz="2700" b="1" u="sng" dirty="0">
+                <a:solidFill>
+                  <a:srgbClr val="3F3F3F"/>
+                </a:solidFill>
+                <a:latin typeface="Source Code Pro"/>
+                <a:ea typeface="Source Code Pro"/>
+                <a:cs typeface="Source Code Pro"/>
+                <a:sym typeface="Source Code Pro"/>
+              </a:rPr>
+              <a:t>E</a:t>
+            </a:r>
+            <a:r>
+              <a:rPr lang="en-GB" sz="2700" dirty="0">
+                <a:solidFill>
+                  <a:srgbClr val="3F3F3F"/>
+                </a:solidFill>
+                <a:latin typeface="Source Code Pro"/>
+                <a:ea typeface="Source Code Pro"/>
+                <a:cs typeface="Source Code Pro"/>
+                <a:sym typeface="Source Code Pro"/>
+              </a:rPr>
+              <a:t>ncoder </a:t>
+            </a:r>
+            <a:r>
+              <a:rPr lang="en-GB" sz="2700" b="1" u="sng" dirty="0">
+                <a:solidFill>
+                  <a:srgbClr val="3F3F3F"/>
+                </a:solidFill>
+                <a:latin typeface="Source Code Pro"/>
+                <a:ea typeface="Source Code Pro"/>
+                <a:cs typeface="Source Code Pro"/>
+                <a:sym typeface="Source Code Pro"/>
+              </a:rPr>
+              <a:t>R</a:t>
+            </a:r>
+            <a:r>
+              <a:rPr lang="en-GB" sz="2700" dirty="0">
+                <a:solidFill>
+                  <a:srgbClr val="3F3F3F"/>
+                </a:solidFill>
+                <a:latin typeface="Source Code Pro"/>
+                <a:ea typeface="Source Code Pro"/>
+                <a:cs typeface="Source Code Pro"/>
+                <a:sym typeface="Source Code Pro"/>
+              </a:rPr>
+              <a:t>epresentations from </a:t>
+            </a:r>
+            <a:r>
+              <a:rPr lang="en-GB" sz="2700" b="1" u="sng" dirty="0">
+                <a:solidFill>
+                  <a:srgbClr val="3F3F3F"/>
+                </a:solidFill>
+                <a:latin typeface="Source Code Pro"/>
+                <a:ea typeface="Source Code Pro"/>
+                <a:cs typeface="Source Code Pro"/>
+                <a:sym typeface="Source Code Pro"/>
+              </a:rPr>
+              <a:t>T</a:t>
+            </a:r>
+            <a:r>
+              <a:rPr lang="en-GB" sz="2700" dirty="0">
+                <a:solidFill>
+                  <a:srgbClr val="3F3F3F"/>
+                </a:solidFill>
+                <a:latin typeface="Source Code Pro"/>
+                <a:ea typeface="Source Code Pro"/>
+                <a:cs typeface="Source Code Pro"/>
+                <a:sym typeface="Source Code Pro"/>
+              </a:rPr>
+              <a:t>ransformers</a:t>
+            </a:r>
+            <a:endParaRPr lang="en-GB" sz="2700" dirty="0">
+              <a:latin typeface="Source Code Pro"/>
+              <a:ea typeface="Source Code Pro"/>
+              <a:cs typeface="Source Code Pro"/>
+              <a:sym typeface="Source Code Pro"/>
+            </a:endParaRPr>
+          </a:p>
+          <a:p>
+            <a:pPr marL="0" lvl="0" indent="0" algn="l">
+              <a:lnSpc>
+                <a:spcPct val="90000"/>
+              </a:lnSpc>
+              <a:spcBef>
+                <a:spcPts val="1600"/>
+              </a:spcBef>
+              <a:spcAft>
+                <a:spcPts val="0"/>
+              </a:spcAft>
+              <a:buNone/>
+            </a:pPr>
+            <a:endParaRPr lang="en-GB" sz="2667" dirty="0">
+              <a:solidFill>
+                <a:srgbClr val="3F3F3F"/>
+              </a:solidFill>
+              <a:latin typeface="Calibri"/>
+              <a:ea typeface="Calibri"/>
+              <a:cs typeface="Calibri"/>
+            </a:endParaRPr>
+          </a:p>
+          <a:p>
+            <a:pPr marL="0" lvl="0" indent="0" algn="l" rtl="0">
+              <a:lnSpc>
+                <a:spcPct val="90000"/>
+              </a:lnSpc>
+              <a:spcBef>
+                <a:spcPts val="1600"/>
+              </a:spcBef>
+              <a:spcAft>
+                <a:spcPts val="0"/>
+              </a:spcAft>
+              <a:buNone/>
+            </a:pPr>
+            <a:endParaRPr sz="3200" dirty="0">
+              <a:solidFill>
+                <a:srgbClr val="3F3F3F"/>
+              </a:solidFill>
+              <a:latin typeface="Calibri"/>
+              <a:ea typeface="Calibri"/>
+              <a:cs typeface="Calibri"/>
+            </a:endParaRPr>
+          </a:p>
+          <a:p>
+            <a:pPr marL="0" lvl="0" indent="0" algn="l" rtl="0">
+              <a:lnSpc>
+                <a:spcPct val="90000"/>
+              </a:lnSpc>
+              <a:spcBef>
+                <a:spcPts val="1600"/>
+              </a:spcBef>
+              <a:spcAft>
+                <a:spcPts val="0"/>
+              </a:spcAft>
+              <a:buNone/>
+            </a:pPr>
+            <a:endParaRPr sz="2667" dirty="0">
+              <a:solidFill>
+                <a:srgbClr val="3F3F3F"/>
+              </a:solidFill>
+              <a:latin typeface="Calibri"/>
+              <a:ea typeface="Calibri"/>
+              <a:cs typeface="Calibri"/>
+            </a:endParaRPr>
+          </a:p>
+          <a:p>
+            <a:pPr marL="0" lvl="0" indent="0" algn="l" rtl="0">
+              <a:lnSpc>
+                <a:spcPct val="90000"/>
+              </a:lnSpc>
+              <a:spcBef>
+                <a:spcPts val="1600"/>
+              </a:spcBef>
+              <a:spcAft>
+                <a:spcPts val="0"/>
+              </a:spcAft>
+              <a:buNone/>
+            </a:pPr>
+            <a:endParaRPr sz="2667" dirty="0">
+              <a:solidFill>
+                <a:srgbClr val="3F3F3F"/>
+              </a:solidFill>
+              <a:latin typeface="Calibri"/>
+              <a:ea typeface="Calibri"/>
+              <a:cs typeface="Calibri"/>
+              <a:sym typeface="Calibri"/>
+            </a:endParaRPr>
+          </a:p>
+          <a:p>
+            <a:pPr marL="0" lvl="0" indent="0" algn="l" rtl="0">
+              <a:lnSpc>
+                <a:spcPct val="90000"/>
+              </a:lnSpc>
+              <a:spcBef>
+                <a:spcPts val="1600"/>
+              </a:spcBef>
+              <a:spcAft>
+                <a:spcPts val="267"/>
+              </a:spcAft>
+              <a:buNone/>
+            </a:pPr>
+            <a:endParaRPr sz="2667" dirty="0">
+              <a:solidFill>
+                <a:srgbClr val="3F3F3F"/>
+              </a:solidFill>
+              <a:latin typeface="Calibri"/>
+              <a:ea typeface="Calibri"/>
+              <a:cs typeface="Calibri"/>
+            </a:endParaRPr>
+          </a:p>
+        </p:txBody>
+      </p:sp>
+    </p:spTree>
+  </p:cSld>
+  <p:clrMapOvr>
+    <a:masterClrMapping/>
+  </p:clrMapOvr>
 </p:sld>
 </file>
 
